--- a/docs/Abschlusspräsentation/DualNet-Abschlusspraesentation-v2.pptx
+++ b/docs/Abschlusspräsentation/DualNet-Abschlusspraesentation-v2.pptx
@@ -4,6 +4,9 @@
   <p:sldMasterIdLst>
     <p:sldMasterId id="2147483648" r:id="rId1"/>
   </p:sldMasterIdLst>
+  <p:notesMasterIdLst>
+    <p:notesMasterId r:id="rId18"/>
+  </p:notesMasterIdLst>
   <p:sldIdLst>
     <p:sldId id="256" r:id="rId2"/>
     <p:sldId id="257" r:id="rId3"/>
@@ -22,9 +25,6 @@
     <p:sldId id="270" r:id="rId16"/>
     <p:sldId id="271" r:id="rId17"/>
   </p:sldIdLst>
-  <p:notesMasterIdLst>
-    <p:notesMasterId r:id="rId18"/>
-  </p:notesMasterIdLst>
   <p:sldSz cx="12192000" cy="6858000"/>
   <p:notesSz cx="6858000" cy="12192000"/>
   <p:defaultTextStyle>
@@ -119,13 +119,20 @@
       </a:defRPr>
     </a:lvl9pPr>
   </p:defaultTextStyle>
+  <p:extLst>
+    <p:ext uri="{EFAFB233-063F-42B5-8137-9DF3F51BA10A}">
+      <p15:sldGuideLst xmlns:p15="http://schemas.microsoft.com/office/powerpoint/2012/main"/>
+    </p:ext>
+  </p:extLst>
 </p:presentation>
 </file>
 
 <file path=ppt/charts/chart1.xml><?xml version="1.0" encoding="utf-8"?>
-<c:chartSpace xmlns:c="http://schemas.openxmlformats.org/drawingml/2006/chart" xmlns:a="http://schemas.openxmlformats.org/drawingml/2006/main" xmlns:r="http://schemas.openxmlformats.org/officeDocument/2006/relationships">
+<c:chartSpace xmlns:c="http://schemas.openxmlformats.org/drawingml/2006/chart" xmlns:a="http://schemas.openxmlformats.org/drawingml/2006/main" xmlns:r="http://schemas.openxmlformats.org/officeDocument/2006/relationships" xmlns:c16r2="http://schemas.microsoft.com/office/drawing/2015/06/chart">
   <c:date1904 val="0"/>
+  <c:lang val="en-GB"/>
   <c:roundedCorners val="1"/>
+  <c:style val="2"/>
   <c:chart>
     <c:autoTitleDeleted val="1"/>
     <c:plotArea>
@@ -157,18 +164,26 @@
           <c:invertIfNegative val="0"/>
           <c:dLbls>
             <c:numFmt formatCode="#,##0" sourceLinked="0"/>
+            <c:spPr>
+              <a:noFill/>
+              <a:ln>
+                <a:noFill/>
+              </a:ln>
+              <a:effectLst/>
+            </c:spPr>
             <c:txPr>
               <a:bodyPr/>
               <a:lstStyle/>
               <a:p>
                 <a:pPr>
-                  <a:defRPr b="1" i="0" strike="noStrike" sz="1200" u="none">
+                  <a:defRPr sz="1200" b="1" i="0" u="none" strike="noStrike">
                     <a:solidFill>
                       <a:srgbClr val="2A2D34"/>
                     </a:solidFill>
                     <a:latin typeface="Arial"/>
                   </a:defRPr>
                 </a:pPr>
+                <a:endParaRPr lang="en-DE"/>
               </a:p>
             </c:txPr>
             <c:showLegendKey val="0"/>
@@ -178,28 +193,31 @@
             <c:showPercent val="0"/>
             <c:showBubbleSize val="0"/>
             <c:showLeaderLines val="0"/>
+            <c:extLst>
+              <c:ext xmlns:c15="http://schemas.microsoft.com/office/drawing/2012/chart" uri="{CE6537A1-D6FC-4f65-9D91-7224C49458BB}">
+                <c15:showLeaderLines val="0"/>
+              </c:ext>
+            </c:extLst>
           </c:dLbls>
           <c:cat>
-            <c:multiLvlStrRef>
+            <c:strRef>
               <c:f>Sheet1!$A$2:$A$5</c:f>
-              <c:multiLvlStrCache>
+              <c:strCache>
                 <c:ptCount val="4"/>
-                <c:lvl>
-                  <c:pt idx="0">
-                    <c:v>Max</c:v>
-                  </c:pt>
-                  <c:pt idx="1">
-                    <c:v>Johannes</c:v>
-                  </c:pt>
-                  <c:pt idx="2">
-                    <c:v>Sebastiano</c:v>
-                  </c:pt>
-                  <c:pt idx="3">
-                    <c:v>Ali</c:v>
-                  </c:pt>
-                </c:lvl>
-              </c:multiLvlStrCache>
-            </c:multiLvlStrRef>
+                <c:pt idx="0">
+                  <c:v>Max</c:v>
+                </c:pt>
+                <c:pt idx="1">
+                  <c:v>Johannes</c:v>
+                </c:pt>
+                <c:pt idx="2">
+                  <c:v>Sebastiano</c:v>
+                </c:pt>
+                <c:pt idx="3">
+                  <c:v>Ali</c:v>
+                </c:pt>
+              </c:strCache>
+            </c:strRef>
           </c:cat>
           <c:val>
             <c:numRef>
@@ -222,36 +240,23 @@
               </c:numCache>
             </c:numRef>
           </c:val>
+          <c:extLst>
+            <c:ext xmlns:c16="http://schemas.microsoft.com/office/drawing/2014/chart" uri="{C3380CC4-5D6E-409C-BE32-E72D297353CC}">
+              <c16:uniqueId val="{00000000-7A85-8245-8A2C-8B6A8875DB91}"/>
+            </c:ext>
+          </c:extLst>
         </c:ser>
         <c:dLbls>
-          <c:numFmt formatCode="#,##0" sourceLinked="0"/>
-          <c:txPr>
-            <a:bodyPr/>
-            <a:lstStyle/>
-            <a:p>
-              <a:pPr>
-                <a:defRPr b="1" i="0" strike="noStrike" sz="1200" u="none">
-                  <a:solidFill>
-                    <a:srgbClr val="2A2D34"/>
-                  </a:solidFill>
-                  <a:latin typeface="Arial"/>
-                </a:defRPr>
-              </a:pPr>
-            </a:p>
-          </c:txPr>
           <c:showLegendKey val="0"/>
           <c:showVal val="1"/>
           <c:showCatName val="0"/>
           <c:showSerName val="0"/>
           <c:showPercent val="0"/>
           <c:showBubbleSize val="0"/>
-          <c:showLeaderLines val="0"/>
         </c:dLbls>
         <c:gapWidth val="150"/>
-        <c:overlap val="0"/>
         <c:axId val="2094734554"/>
         <c:axId val="2094734552"/>
-        <c:axId val="2094734556"/>
       </c:barChart>
       <c:catAx>
         <c:axId val="2094734554"/>
@@ -292,6 +297,7 @@
         <c:crosses val="autoZero"/>
         <c:auto val="1"/>
         <c:lblAlgn val="ctr"/>
+        <c:lblOffset val="100"/>
         <c:noMultiLvlLbl val="1"/>
       </c:catAx>
       <c:valAx>
@@ -355,6 +361,7 @@
     </c:plotArea>
     <c:plotVisOnly val="1"/>
     <c:dispBlanksAs val="span"/>
+    <c:showDLblsOverMax val="1"/>
   </c:chart>
   <c:spPr>
     <a:solidFill>
@@ -393,234 +400,10 @@
           <a:chExt cx="0" cy="0"/>
         </a:xfrm>
       </p:grpSpPr>
-      <p:sp>
-        <p:nvSpPr>
-          <p:cNvPr id="2" name="Header Placeholder 1"/>
-          <p:cNvSpPr>
-            <a:spLocks noGrp="1"/>
-          </p:cNvSpPr>
-          <p:nvPr>
-            <p:ph type="hdr" sz="quarter"/>
-          </p:nvPr>
-        </p:nvSpPr>
-        <p:spPr>
-          <a:xfrm>
-            <a:off x="0" y="0"/>
-            <a:ext cx="2971800" cy="458788"/>
-          </a:xfrm>
-          <a:prstGeom prst="rect">
-            <a:avLst/>
-          </a:prstGeom>
-        </p:spPr>
-        <p:txBody>
-          <a:bodyPr vert="horz" lIns="91440" tIns="45720" rIns="91440" bIns="45720" rtlCol="0"/>
-          <a:lstStyle>
-            <a:lvl1pPr algn="l">
-              <a:defRPr sz="1200"/>
-            </a:lvl1pPr>
-          </a:lstStyle>
-          <a:p>
-            <a:endParaRPr lang="en-US"/>
-          </a:p>
-        </p:txBody>
-      </p:sp>
-      <p:sp>
-        <p:nvSpPr>
-          <p:cNvPr id="3" name="Date Placeholder 2"/>
-          <p:cNvSpPr>
-            <a:spLocks noGrp="1"/>
-          </p:cNvSpPr>
-          <p:nvPr>
-            <p:ph type="dt" idx="1"/>
-          </p:nvPr>
-        </p:nvSpPr>
-        <p:spPr>
-          <a:xfrm>
-            <a:off x="3884613" y="0"/>
-            <a:ext cx="2971800" cy="458788"/>
-          </a:xfrm>
-          <a:prstGeom prst="rect">
-            <a:avLst/>
-          </a:prstGeom>
-        </p:spPr>
-        <p:txBody>
-          <a:bodyPr vert="horz" lIns="91440" tIns="45720" rIns="91440" bIns="45720" rtlCol="0"/>
-          <a:lstStyle>
-            <a:lvl1pPr algn="r">
-              <a:defRPr sz="1200"/>
-            </a:lvl1pPr>
-          </a:lstStyle>
-          <a:p>
-            <a:fld id="{5282F153-3F37-0F45-9E97-73ACFA13230C}" type="datetimeFigureOut">
-              <a:rPr lang="en-US"/>
-              <a:t>7/23/19</a:t>
-            </a:fld>
-            <a:endParaRPr lang="en-US"/>
-          </a:p>
-        </p:txBody>
-      </p:sp>
-      <p:sp>
-        <p:nvSpPr>
-          <p:cNvPr id="4" name="Slide Image Placeholder 3"/>
-          <p:cNvSpPr>
-            <a:spLocks noGrp="1" noRot="1" noChangeAspect="1"/>
-          </p:cNvSpPr>
-          <p:nvPr>
-            <p:ph type="sldImg" idx="2"/>
-          </p:nvPr>
-        </p:nvSpPr>
-        <p:spPr>
-          <a:xfrm>
-            <a:off x="685800" y="1143000"/>
-            <a:ext cx="5486400" cy="3086100"/>
-          </a:xfrm>
-          <a:prstGeom prst="rect">
-            <a:avLst/>
-          </a:prstGeom>
-          <a:noFill/>
-          <a:ln w="12700">
-            <a:solidFill>
-              <a:prstClr val="black"/>
-            </a:solidFill>
-          </a:ln>
-        </p:spPr>
-        <p:txBody>
-          <a:bodyPr vert="horz" lIns="91440" tIns="45720" rIns="91440" bIns="45720" rtlCol="0" anchor="ctr"/>
-          <a:lstStyle/>
-          <a:p>
-            <a:endParaRPr lang="en-US"/>
-          </a:p>
-        </p:txBody>
-      </p:sp>
-      <p:sp>
-        <p:nvSpPr>
-          <p:cNvPr id="5" name="Notes Placeholder 4"/>
-          <p:cNvSpPr>
-            <a:spLocks noGrp="1"/>
-          </p:cNvSpPr>
-          <p:nvPr>
-            <p:ph type="body" sz="quarter" idx="3"/>
-          </p:nvPr>
-        </p:nvSpPr>
-        <p:spPr>
-          <a:xfrm>
-            <a:off x="685800" y="4400550"/>
-            <a:ext cx="5486400" cy="3600450"/>
-          </a:xfrm>
-          <a:prstGeom prst="rect">
-            <a:avLst/>
-          </a:prstGeom>
-        </p:spPr>
-        <p:txBody>
-          <a:bodyPr vert="horz" lIns="91440" tIns="45720" rIns="91440" bIns="45720" rtlCol="0"/>
-          <a:lstStyle/>
-          <a:p>
-            <a:pPr lvl="0"/>
-            <a:r>
-              <a:rPr lang="en-US"/>
-              <a:t>Click to edit Master text styles</a:t>
-            </a:r>
-          </a:p>
-          <a:p>
-            <a:pPr lvl="1"/>
-            <a:r>
-              <a:rPr lang="en-US"/>
-              <a:t>Second level</a:t>
-            </a:r>
-          </a:p>
-          <a:p>
-            <a:pPr lvl="2"/>
-            <a:r>
-              <a:rPr lang="en-US"/>
-              <a:t>Third level</a:t>
-            </a:r>
-          </a:p>
-          <a:p>
-            <a:pPr lvl="3"/>
-            <a:r>
-              <a:rPr lang="en-US"/>
-              <a:t>Fourth level</a:t>
-            </a:r>
-          </a:p>
-          <a:p>
-            <a:pPr lvl="4"/>
-            <a:r>
-              <a:rPr lang="en-US"/>
-              <a:t>Fifth level</a:t>
-            </a:r>
-          </a:p>
-        </p:txBody>
-      </p:sp>
-      <p:sp>
-        <p:nvSpPr>
-          <p:cNvPr id="6" name="Footer Placeholder 5"/>
-          <p:cNvSpPr>
-            <a:spLocks noGrp="1"/>
-          </p:cNvSpPr>
-          <p:nvPr>
-            <p:ph type="ftr" sz="quarter" idx="4"/>
-          </p:nvPr>
-        </p:nvSpPr>
-        <p:spPr>
-          <a:xfrm>
-            <a:off x="0" y="8685213"/>
-            <a:ext cx="2971800" cy="458787"/>
-          </a:xfrm>
-          <a:prstGeom prst="rect">
-            <a:avLst/>
-          </a:prstGeom>
-        </p:spPr>
-        <p:txBody>
-          <a:bodyPr vert="horz" lIns="91440" tIns="45720" rIns="91440" bIns="45720" rtlCol="0" anchor="b"/>
-          <a:lstStyle>
-            <a:lvl1pPr algn="l">
-              <a:defRPr sz="1200"/>
-            </a:lvl1pPr>
-          </a:lstStyle>
-          <a:p>
-            <a:endParaRPr lang="en-US"/>
-          </a:p>
-        </p:txBody>
-      </p:sp>
-      <p:sp>
-        <p:nvSpPr>
-          <p:cNvPr id="7" name="Slide Number Placeholder 6"/>
-          <p:cNvSpPr>
-            <a:spLocks noGrp="1"/>
-          </p:cNvSpPr>
-          <p:nvPr>
-            <p:ph type="sldNum" sz="quarter" idx="5"/>
-          </p:nvPr>
-        </p:nvSpPr>
-        <p:spPr>
-          <a:xfrm>
-            <a:off x="3884613" y="8685213"/>
-            <a:ext cx="2971800" cy="458787"/>
-          </a:xfrm>
-          <a:prstGeom prst="rect">
-            <a:avLst/>
-          </a:prstGeom>
-        </p:spPr>
-        <p:txBody>
-          <a:bodyPr vert="horz" lIns="91440" tIns="45720" rIns="91440" bIns="45720" rtlCol="0" anchor="b"/>
-          <a:lstStyle>
-            <a:lvl1pPr algn="r">
-              <a:defRPr sz="1200"/>
-            </a:lvl1pPr>
-          </a:lstStyle>
-          <a:p>
-            <a:fld id="{CE5E9CC1-C706-0F49-92D6-E571CC5EEA8F}" type="slidenum">
-              <a:rPr lang="en-US"/>
-              <a:t>‹#›</a:t>
-            </a:fld>
-            <a:endParaRPr lang="en-US"/>
-          </a:p>
-        </p:txBody>
-      </p:sp>
     </p:spTree>
     <p:extLst>
       <p:ext uri="{BB962C8B-B14F-4D97-AF65-F5344CB8AC3E}">
-        <p14:creationId xmlns:p14="http://schemas.microsoft.com/office/powerpoint/2010/main" val="1024086991"/>
+        <p14:creationId xmlns:p14="http://schemas.microsoft.com/office/powerpoint/2010/main" val="115077547"/>
       </p:ext>
     </p:extLst>
   </p:cSld>
@@ -764,10 +547,6 @@
           <a:bodyPr/>
           <a:lstStyle/>
           <a:p>
-            <a:r>
-              <a:rPr lang="en-US" dirty="0"/>
-              <a:t/>
-            </a:r>
             <a:endParaRPr lang="en-US" dirty="0"/>
           </a:p>
         </p:txBody>
@@ -852,10 +631,6 @@
           <a:bodyPr/>
           <a:lstStyle/>
           <a:p>
-            <a:r>
-              <a:rPr lang="en-US" dirty="0"/>
-              <a:t/>
-            </a:r>
             <a:endParaRPr lang="en-US" dirty="0"/>
           </a:p>
         </p:txBody>
@@ -940,10 +715,6 @@
           <a:bodyPr/>
           <a:lstStyle/>
           <a:p>
-            <a:r>
-              <a:rPr lang="en-US" dirty="0"/>
-              <a:t/>
-            </a:r>
             <a:endParaRPr lang="en-US" dirty="0"/>
           </a:p>
         </p:txBody>
@@ -1028,10 +799,6 @@
           <a:bodyPr/>
           <a:lstStyle/>
           <a:p>
-            <a:r>
-              <a:rPr lang="en-US" dirty="0"/>
-              <a:t/>
-            </a:r>
             <a:endParaRPr lang="en-US" dirty="0"/>
           </a:p>
         </p:txBody>
@@ -1116,10 +883,6 @@
           <a:bodyPr/>
           <a:lstStyle/>
           <a:p>
-            <a:r>
-              <a:rPr lang="en-US" dirty="0"/>
-              <a:t/>
-            </a:r>
             <a:endParaRPr lang="en-US" dirty="0"/>
           </a:p>
         </p:txBody>
@@ -1204,10 +967,6 @@
           <a:bodyPr/>
           <a:lstStyle/>
           <a:p>
-            <a:r>
-              <a:rPr lang="en-US" dirty="0"/>
-              <a:t/>
-            </a:r>
             <a:endParaRPr lang="en-US" dirty="0"/>
           </a:p>
         </p:txBody>
@@ -1292,10 +1051,6 @@
           <a:bodyPr/>
           <a:lstStyle/>
           <a:p>
-            <a:r>
-              <a:rPr lang="en-US" dirty="0"/>
-              <a:t/>
-            </a:r>
             <a:endParaRPr lang="en-US" dirty="0"/>
           </a:p>
         </p:txBody>
@@ -1380,10 +1135,6 @@
           <a:bodyPr/>
           <a:lstStyle/>
           <a:p>
-            <a:r>
-              <a:rPr lang="en-US" dirty="0"/>
-              <a:t/>
-            </a:r>
             <a:endParaRPr lang="en-US" dirty="0"/>
           </a:p>
         </p:txBody>
@@ -1468,10 +1219,6 @@
           <a:bodyPr/>
           <a:lstStyle/>
           <a:p>
-            <a:r>
-              <a:rPr lang="en-US" dirty="0"/>
-              <a:t/>
-            </a:r>
             <a:endParaRPr lang="en-US" dirty="0"/>
           </a:p>
         </p:txBody>
@@ -1556,10 +1303,6 @@
           <a:bodyPr/>
           <a:lstStyle/>
           <a:p>
-            <a:r>
-              <a:rPr lang="en-US" dirty="0"/>
-              <a:t/>
-            </a:r>
             <a:endParaRPr lang="en-US" dirty="0"/>
           </a:p>
         </p:txBody>
@@ -1644,10 +1387,6 @@
           <a:bodyPr/>
           <a:lstStyle/>
           <a:p>
-            <a:r>
-              <a:rPr lang="en-US" dirty="0"/>
-              <a:t/>
-            </a:r>
             <a:endParaRPr lang="en-US" dirty="0"/>
           </a:p>
         </p:txBody>
@@ -1732,10 +1471,6 @@
           <a:bodyPr/>
           <a:lstStyle/>
           <a:p>
-            <a:r>
-              <a:rPr lang="en-US" dirty="0"/>
-              <a:t/>
-            </a:r>
             <a:endParaRPr lang="en-US" dirty="0"/>
           </a:p>
         </p:txBody>
@@ -1820,10 +1555,6 @@
           <a:bodyPr/>
           <a:lstStyle/>
           <a:p>
-            <a:r>
-              <a:rPr lang="en-US" dirty="0"/>
-              <a:t/>
-            </a:r>
             <a:endParaRPr lang="en-US" dirty="0"/>
           </a:p>
         </p:txBody>
@@ -1908,10 +1639,6 @@
           <a:bodyPr/>
           <a:lstStyle/>
           <a:p>
-            <a:r>
-              <a:rPr lang="en-US" dirty="0"/>
-              <a:t/>
-            </a:r>
             <a:endParaRPr lang="en-US" dirty="0"/>
           </a:p>
         </p:txBody>
@@ -1996,10 +1723,6 @@
           <a:bodyPr/>
           <a:lstStyle/>
           <a:p>
-            <a:r>
-              <a:rPr lang="en-US" dirty="0"/>
-              <a:t/>
-            </a:r>
             <a:endParaRPr lang="en-US" dirty="0"/>
           </a:p>
         </p:txBody>
@@ -2084,10 +1807,6 @@
           <a:bodyPr/>
           <a:lstStyle/>
           <a:p>
-            <a:r>
-              <a:rPr lang="en-US" dirty="0"/>
-              <a:t/>
-            </a:r>
             <a:endParaRPr lang="en-US" dirty="0"/>
           </a:p>
         </p:txBody>
@@ -2161,6 +1880,11 @@
 <file path=ppt/slideMasters/slideMaster1.xml><?xml version="1.0" encoding="utf-8"?>
 <p:sldMaster xmlns:a="http://schemas.openxmlformats.org/drawingml/2006/main" xmlns:r="http://schemas.openxmlformats.org/officeDocument/2006/relationships" xmlns:p="http://schemas.openxmlformats.org/presentationml/2006/main">
   <p:cSld>
+    <p:bg>
+      <p:bgRef idx="1001">
+        <a:schemeClr val="bg1"/>
+      </p:bgRef>
+    </p:bg>
     <p:spTree>
       <p:nvGrpSpPr>
         <p:cNvPr id="1" name=""/>
@@ -2443,6 +2167,7 @@
         <a:solidFill>
           <a:srgbClr val="FFFFFF"/>
         </a:solidFill>
+        <a:effectLst/>
       </p:bgPr>
     </p:bg>
     <p:spTree>
@@ -2508,7 +2233,7 @@
         <p:spPr>
           <a:xfrm>
             <a:off x="8951976" y="2231136"/>
-            <a:ext cx="1028700" cy="-685800"/>
+            <a:ext cx="1028700" cy="0"/>
           </a:xfrm>
           <a:prstGeom prst="line">
             <a:avLst/>
@@ -2577,7 +2302,7 @@
         <p:spPr>
           <a:xfrm>
             <a:off x="10094976" y="2974086"/>
-            <a:ext cx="1085850" cy="-800100"/>
+            <a:ext cx="1085850" cy="0"/>
           </a:xfrm>
           <a:prstGeom prst="line">
             <a:avLst/>
@@ -2646,7 +2371,7 @@
         <p:spPr>
           <a:xfrm>
             <a:off x="10895076" y="3488436"/>
-            <a:ext cx="1143000" cy="-628650"/>
+            <a:ext cx="1143000" cy="0"/>
           </a:xfrm>
           <a:prstGeom prst="line">
             <a:avLst/>
@@ -2789,7 +2514,7 @@
         <p:spPr>
           <a:xfrm>
             <a:off x="9317736" y="4626864"/>
-            <a:ext cx="781812" cy="-521208"/>
+            <a:ext cx="781812" cy="0"/>
           </a:xfrm>
           <a:prstGeom prst="line">
             <a:avLst/>
@@ -2858,7 +2583,7 @@
         <p:spPr>
           <a:xfrm>
             <a:off x="10186416" y="5191506"/>
-            <a:ext cx="825246" cy="-608076"/>
+            <a:ext cx="825246" cy="0"/>
           </a:xfrm>
           <a:prstGeom prst="line">
             <a:avLst/>
@@ -2927,7 +2652,7 @@
         <p:spPr>
           <a:xfrm>
             <a:off x="10794492" y="5582412"/>
-            <a:ext cx="868680" cy="-477774"/>
+            <a:ext cx="868680" cy="0"/>
           </a:xfrm>
           <a:prstGeom prst="line">
             <a:avLst/>
@@ -3082,11 +2807,11 @@
           <a:bodyPr wrap="square" rtlCol="0" anchor="ctr"/>
           <a:lstStyle/>
           <a:p>
-            <a:pPr algn="ctr" indent="0" marL="0">
-              <a:buNone/>
-            </a:pPr>
-            <a:r>
-              <a:rPr lang="en-US" sz="2000" b="1" spc="300" kern="0" dirty="0">
+            <a:pPr marL="0" indent="0" algn="ctr">
+              <a:buNone/>
+            </a:pPr>
+            <a:r>
+              <a:rPr lang="en-US" sz="2000" b="1" kern="0" spc="300" dirty="0">
                 <a:solidFill>
                   <a:srgbClr val="C5394A"/>
                 </a:solidFill>
@@ -3141,11 +2866,11 @@
           <a:bodyPr wrap="square" rtlCol="0" anchor="ctr"/>
           <a:lstStyle/>
           <a:p>
-            <a:pPr indent="0" marL="0">
-              <a:buNone/>
-            </a:pPr>
-            <a:r>
-              <a:rPr lang="en-US" sz="1300" b="1" spc="200" kern="0" dirty="0">
+            <a:pPr marL="0" indent="0">
+              <a:buNone/>
+            </a:pPr>
+            <a:r>
+              <a:rPr lang="en-US" sz="1300" b="1" kern="0" spc="200" dirty="0">
                 <a:solidFill>
                   <a:srgbClr val="C5394A"/>
                 </a:solidFill>
@@ -3180,7 +2905,7 @@
           <a:bodyPr wrap="square" rtlCol="0" anchor="ctr"/>
           <a:lstStyle/>
           <a:p>
-            <a:pPr indent="0" marL="0">
+            <a:pPr marL="0" indent="0">
               <a:buNone/>
             </a:pPr>
             <a:r>
@@ -3219,7 +2944,7 @@
           <a:bodyPr wrap="square" rtlCol="0" anchor="ctr"/>
           <a:lstStyle/>
           <a:p>
-            <a:pPr indent="0" marL="0">
+            <a:pPr marL="0" indent="0">
               <a:buNone/>
             </a:pPr>
             <a:r>
@@ -3278,7 +3003,7 @@
           <a:bodyPr wrap="square" rtlCol="0" anchor="ctr"/>
           <a:lstStyle/>
           <a:p>
-            <a:pPr indent="0" marL="0">
+            <a:pPr marL="0" indent="0">
               <a:buNone/>
             </a:pPr>
             <a:r>
@@ -3292,9 +3017,6 @@
               </a:rPr>
               <a:t>Team:  </a:t>
             </a:r>
-            <a:pPr indent="0" marL="0">
-              <a:buNone/>
-            </a:pPr>
             <a:r>
               <a:rPr lang="en-US" sz="1500" dirty="0">
                 <a:solidFill>
@@ -3331,7 +3053,7 @@
           <a:bodyPr wrap="square" rtlCol="0" anchor="ctr"/>
           <a:lstStyle/>
           <a:p>
-            <a:pPr indent="0" marL="0">
+            <a:pPr marL="0" indent="0">
               <a:buNone/>
             </a:pPr>
             <a:r>
@@ -3345,9 +3067,6 @@
               </a:rPr>
               <a:t>Kurs:  </a:t>
             </a:r>
-            <a:pPr indent="0" marL="0">
-              <a:buNone/>
-            </a:pPr>
             <a:r>
               <a:rPr lang="en-US" sz="1500" dirty="0">
                 <a:solidFill>
@@ -3379,6 +3098,7 @@
         <a:solidFill>
           <a:srgbClr val="FFFFFF"/>
         </a:solidFill>
+        <a:effectLst/>
       </p:bgPr>
     </p:bg>
     <p:spTree>
@@ -3456,7 +3176,7 @@
           <a:bodyPr wrap="square" lIns="0" tIns="0" rIns="0" bIns="0" rtlCol="0" anchor="ctr"/>
           <a:lstStyle/>
           <a:p>
-            <a:pPr algn="l" indent="0" marL="0">
+            <a:pPr marL="0" indent="0" algn="l">
               <a:buNone/>
             </a:pPr>
             <a:r>
@@ -3495,7 +3215,7 @@
           <a:bodyPr wrap="square" lIns="0" tIns="0" rIns="0" bIns="0" rtlCol="0" anchor="ctr"/>
           <a:lstStyle/>
           <a:p>
-            <a:pPr algn="r" indent="0" marL="0">
+            <a:pPr marL="0" indent="0" algn="r">
               <a:buNone/>
             </a:pPr>
             <a:r>
@@ -3534,11 +3254,11 @@
           <a:bodyPr wrap="square" lIns="0" tIns="0" rIns="0" bIns="0" rtlCol="0" anchor="ctr"/>
           <a:lstStyle/>
           <a:p>
-            <a:pPr algn="r" indent="0" marL="0">
-              <a:buNone/>
-            </a:pPr>
-            <a:r>
-              <a:rPr lang="en-US" sz="900" b="1" spc="100" kern="0" dirty="0">
+            <a:pPr marL="0" indent="0" algn="r">
+              <a:buNone/>
+            </a:pPr>
+            <a:r>
+              <a:rPr lang="en-US" sz="900" b="1" kern="0" spc="100" dirty="0">
                 <a:solidFill>
                   <a:srgbClr val="C5394A"/>
                 </a:solidFill>
@@ -3573,11 +3293,11 @@
           <a:bodyPr wrap="square" lIns="0" tIns="0" rIns="0" bIns="0" rtlCol="0" anchor="ctr"/>
           <a:lstStyle/>
           <a:p>
-            <a:pPr indent="0" marL="0">
-              <a:buNone/>
-            </a:pPr>
-            <a:r>
-              <a:rPr lang="en-US" sz="1200" b="1" spc="200" kern="0" dirty="0">
+            <a:pPr marL="0" indent="0">
+              <a:buNone/>
+            </a:pPr>
+            <a:r>
+              <a:rPr lang="en-US" sz="1200" b="1" kern="0" spc="200" dirty="0">
                 <a:solidFill>
                   <a:srgbClr val="C5394A"/>
                 </a:solidFill>
@@ -3612,7 +3332,7 @@
           <a:bodyPr wrap="square" lIns="0" tIns="0" rIns="0" bIns="0" rtlCol="0" anchor="ctr"/>
           <a:lstStyle/>
           <a:p>
-            <a:pPr indent="0" marL="0">
+            <a:pPr marL="0" indent="0">
               <a:buNone/>
             </a:pPr>
             <a:r>
@@ -3651,7 +3371,7 @@
           <a:bodyPr wrap="square" rtlCol="0" anchor="ctr"/>
           <a:lstStyle/>
           <a:p>
-            <a:pPr indent="0" marL="0">
+            <a:pPr marL="0" indent="0">
               <a:buNone/>
             </a:pPr>
             <a:r>
@@ -3691,251 +3411,7 @@
       </p:sp>
       <p:pic>
         <p:nvPicPr>
-          <p:cNvPr id="11" name="Image 0" descr="preencoded.png">    </p:cNvPr>
-          <p:cNvPicPr>
-            <a:picLocks noChangeAspect="1"/>
-          </p:cNvPicPr>
-          <p:nvPr/>
-        </p:nvPicPr>
-        <p:blipFill>
-          <a:blip r:embed="rId1"/>
-          <a:stretch>
-            <a:fillRect/>
-          </a:stretch>
-        </p:blipFill>
-        <p:spPr>
-          <a:xfrm>
-            <a:off x="636422" y="2145182"/>
-            <a:ext cx="190195" cy="190195"/>
-          </a:xfrm>
-          <a:prstGeom prst="rect">
-            <a:avLst/>
-          </a:prstGeom>
-        </p:spPr>
-      </p:pic>
-      <p:sp>
-        <p:nvSpPr>
-          <p:cNvPr id="12" name="Text 9"/>
-          <p:cNvSpPr/>
-          <p:nvPr/>
-        </p:nvSpPr>
-        <p:spPr>
-          <a:xfrm>
-            <a:off x="1051560" y="2020824"/>
-            <a:ext cx="4754880" cy="310896"/>
-          </a:xfrm>
-          <a:prstGeom prst="rect">
-            <a:avLst/>
-          </a:prstGeom>
-          <a:noFill/>
-          <a:ln/>
-        </p:spPr>
-        <p:txBody>
-          <a:bodyPr wrap="square" lIns="0" tIns="0" rIns="0" bIns="0" rtlCol="0" anchor="ctr"/>
-          <a:lstStyle/>
-          <a:p>
-            <a:pPr indent="0" marL="0">
-              <a:buNone/>
-            </a:pPr>
-            <a:r>
-              <a:rPr lang="en-US" sz="1400" b="1" dirty="0">
-                <a:solidFill>
-                  <a:srgbClr val="2A2D34"/>
-                </a:solidFill>
-                <a:latin typeface="Calibri" pitchFamily="34" charset="0"/>
-                <a:ea typeface="Calibri" pitchFamily="34" charset="-122"/>
-                <a:cs typeface="Calibri" pitchFamily="34" charset="-120"/>
-              </a:rPr>
-              <a:t>Schichten-Architektur</a:t>
-            </a:r>
-            <a:endParaRPr lang="en-US" sz="1400" dirty="0"/>
-          </a:p>
-        </p:txBody>
-      </p:sp>
-      <p:sp>
-        <p:nvSpPr>
-          <p:cNvPr id="13" name="Text 10"/>
-          <p:cNvSpPr/>
-          <p:nvPr/>
-        </p:nvSpPr>
-        <p:spPr>
-          <a:xfrm>
-            <a:off x="1051560" y="2313432"/>
-            <a:ext cx="4754880" cy="274320"/>
-          </a:xfrm>
-          <a:prstGeom prst="rect">
-            <a:avLst/>
-          </a:prstGeom>
-          <a:noFill/>
-          <a:ln/>
-        </p:spPr>
-        <p:txBody>
-          <a:bodyPr wrap="square" lIns="0" tIns="0" rIns="0" bIns="0" rtlCol="0" anchor="ctr"/>
-          <a:lstStyle/>
-          <a:p>
-            <a:pPr indent="0" marL="0">
-              <a:buNone/>
-            </a:pPr>
-            <a:r>
-              <a:rPr lang="en-US" sz="1100" dirty="0">
-                <a:solidFill>
-                  <a:srgbClr val="63676E"/>
-                </a:solidFill>
-                <a:latin typeface="Calibri" pitchFamily="34" charset="0"/>
-                <a:ea typeface="Calibri" pitchFamily="34" charset="-122"/>
-                <a:cs typeface="Calibri" pitchFamily="34" charset="-120"/>
-              </a:rPr>
-              <a:t>Anfrage – Logik – Speicher</a:t>
-            </a:r>
-            <a:endParaRPr lang="en-US" sz="1100" dirty="0"/>
-          </a:p>
-        </p:txBody>
-      </p:sp>
-      <p:sp>
-        <p:nvSpPr>
-          <p:cNvPr id="14" name="Shape 11"/>
-          <p:cNvSpPr/>
-          <p:nvPr/>
-        </p:nvSpPr>
-        <p:spPr>
-          <a:xfrm>
-            <a:off x="548640" y="2715768"/>
-            <a:ext cx="365760" cy="365760"/>
-          </a:xfrm>
-          <a:prstGeom prst="ellipse">
-            <a:avLst/>
-          </a:prstGeom>
-          <a:solidFill>
-            <a:srgbClr val="3E4856"/>
-          </a:solidFill>
-          <a:ln/>
-        </p:spPr>
-      </p:sp>
-      <p:pic>
-        <p:nvPicPr>
-          <p:cNvPr id="15" name="Image 1" descr="preencoded.png">    </p:cNvPr>
-          <p:cNvPicPr>
-            <a:picLocks noChangeAspect="1"/>
-          </p:cNvPicPr>
-          <p:nvPr/>
-        </p:nvPicPr>
-        <p:blipFill>
-          <a:blip r:embed="rId2"/>
-          <a:stretch>
-            <a:fillRect/>
-          </a:stretch>
-        </p:blipFill>
-        <p:spPr>
-          <a:xfrm>
-            <a:off x="636422" y="2803550"/>
-            <a:ext cx="190195" cy="190195"/>
-          </a:xfrm>
-          <a:prstGeom prst="rect">
-            <a:avLst/>
-          </a:prstGeom>
-        </p:spPr>
-      </p:pic>
-      <p:sp>
-        <p:nvSpPr>
-          <p:cNvPr id="16" name="Text 12"/>
-          <p:cNvSpPr/>
-          <p:nvPr/>
-        </p:nvSpPr>
-        <p:spPr>
-          <a:xfrm>
-            <a:off x="1051560" y="2679192"/>
-            <a:ext cx="4754880" cy="310896"/>
-          </a:xfrm>
-          <a:prstGeom prst="rect">
-            <a:avLst/>
-          </a:prstGeom>
-          <a:noFill/>
-          <a:ln/>
-        </p:spPr>
-        <p:txBody>
-          <a:bodyPr wrap="square" lIns="0" tIns="0" rIns="0" bIns="0" rtlCol="0" anchor="ctr"/>
-          <a:lstStyle/>
-          <a:p>
-            <a:pPr indent="0" marL="0">
-              <a:buNone/>
-            </a:pPr>
-            <a:r>
-              <a:rPr lang="en-US" sz="1400" b="1" dirty="0">
-                <a:solidFill>
-                  <a:srgbClr val="2A2D34"/>
-                </a:solidFill>
-                <a:latin typeface="Calibri" pitchFamily="34" charset="0"/>
-                <a:ea typeface="Calibri" pitchFamily="34" charset="-122"/>
-                <a:cs typeface="Calibri" pitchFamily="34" charset="-120"/>
-              </a:rPr>
-              <a:t>Repository-Muster</a:t>
-            </a:r>
-            <a:endParaRPr lang="en-US" sz="1400" dirty="0"/>
-          </a:p>
-        </p:txBody>
-      </p:sp>
-      <p:sp>
-        <p:nvSpPr>
-          <p:cNvPr id="17" name="Text 13"/>
-          <p:cNvSpPr/>
-          <p:nvPr/>
-        </p:nvSpPr>
-        <p:spPr>
-          <a:xfrm>
-            <a:off x="1051560" y="2971800"/>
-            <a:ext cx="4754880" cy="274320"/>
-          </a:xfrm>
-          <a:prstGeom prst="rect">
-            <a:avLst/>
-          </a:prstGeom>
-          <a:noFill/>
-          <a:ln/>
-        </p:spPr>
-        <p:txBody>
-          <a:bodyPr wrap="square" lIns="0" tIns="0" rIns="0" bIns="0" rtlCol="0" anchor="ctr"/>
-          <a:lstStyle/>
-          <a:p>
-            <a:pPr indent="0" marL="0">
-              <a:buNone/>
-            </a:pPr>
-            <a:r>
-              <a:rPr lang="en-US" sz="1100" dirty="0">
-                <a:solidFill>
-                  <a:srgbClr val="63676E"/>
-                </a:solidFill>
-                <a:latin typeface="Calibri" pitchFamily="34" charset="0"/>
-                <a:ea typeface="Calibri" pitchFamily="34" charset="-122"/>
-                <a:cs typeface="Calibri" pitchFamily="34" charset="-120"/>
-              </a:rPr>
-              <a:t>Standardisierter Datenzugriff</a:t>
-            </a:r>
-            <a:endParaRPr lang="en-US" sz="1100" dirty="0"/>
-          </a:p>
-        </p:txBody>
-      </p:sp>
-      <p:sp>
-        <p:nvSpPr>
-          <p:cNvPr id="18" name="Shape 14"/>
-          <p:cNvSpPr/>
-          <p:nvPr/>
-        </p:nvSpPr>
-        <p:spPr>
-          <a:xfrm>
-            <a:off x="548640" y="3374136"/>
-            <a:ext cx="365760" cy="365760"/>
-          </a:xfrm>
-          <a:prstGeom prst="ellipse">
-            <a:avLst/>
-          </a:prstGeom>
-          <a:solidFill>
-            <a:srgbClr val="C5394A"/>
-          </a:solidFill>
-          <a:ln/>
-        </p:spPr>
-      </p:sp>
-      <p:pic>
-        <p:nvPicPr>
-          <p:cNvPr id="19" name="Image 2" descr="preencoded.png">    </p:cNvPr>
+          <p:cNvPr id="11" name="Image 0" descr="preencoded.png"/>
           <p:cNvPicPr>
             <a:picLocks noChangeAspect="1"/>
           </p:cNvPicPr>
@@ -3949,7 +3425,7 @@
         </p:blipFill>
         <p:spPr>
           <a:xfrm>
-            <a:off x="636422" y="3461918"/>
+            <a:off x="636422" y="2145182"/>
             <a:ext cx="190195" cy="190195"/>
           </a:xfrm>
           <a:prstGeom prst="rect">
@@ -3959,13 +3435,13 @@
       </p:pic>
       <p:sp>
         <p:nvSpPr>
-          <p:cNvPr id="20" name="Text 15"/>
-          <p:cNvSpPr/>
-          <p:nvPr/>
-        </p:nvSpPr>
-        <p:spPr>
-          <a:xfrm>
-            <a:off x="1051560" y="3337560"/>
+          <p:cNvPr id="12" name="Text 9"/>
+          <p:cNvSpPr/>
+          <p:nvPr/>
+        </p:nvSpPr>
+        <p:spPr>
+          <a:xfrm>
+            <a:off x="1051560" y="2020824"/>
             <a:ext cx="4754880" cy="310896"/>
           </a:xfrm>
           <a:prstGeom prst="rect">
@@ -3978,7 +3454,7 @@
           <a:bodyPr wrap="square" lIns="0" tIns="0" rIns="0" bIns="0" rtlCol="0" anchor="ctr"/>
           <a:lstStyle/>
           <a:p>
-            <a:pPr indent="0" marL="0">
+            <a:pPr marL="0" indent="0">
               <a:buNone/>
             </a:pPr>
             <a:r>
@@ -3990,7 +3466,7 @@
                 <a:ea typeface="Calibri" pitchFamily="34" charset="-122"/>
                 <a:cs typeface="Calibri" pitchFamily="34" charset="-120"/>
               </a:rPr>
-              <a:t>DTO / Mapper</a:t>
+              <a:t>Schichten-Architektur</a:t>
             </a:r>
             <a:endParaRPr lang="en-US" sz="1400" dirty="0"/>
           </a:p>
@@ -3998,13 +3474,13 @@
       </p:sp>
       <p:sp>
         <p:nvSpPr>
-          <p:cNvPr id="21" name="Text 16"/>
-          <p:cNvSpPr/>
-          <p:nvPr/>
-        </p:nvSpPr>
-        <p:spPr>
-          <a:xfrm>
-            <a:off x="1051560" y="3630168"/>
+          <p:cNvPr id="13" name="Text 10"/>
+          <p:cNvSpPr/>
+          <p:nvPr/>
+        </p:nvSpPr>
+        <p:spPr>
+          <a:xfrm>
+            <a:off x="1051560" y="2313432"/>
             <a:ext cx="4754880" cy="274320"/>
           </a:xfrm>
           <a:prstGeom prst="rect">
@@ -4017,7 +3493,7 @@
           <a:bodyPr wrap="square" lIns="0" tIns="0" rIns="0" bIns="0" rtlCol="0" anchor="ctr"/>
           <a:lstStyle/>
           <a:p>
-            <a:pPr indent="0" marL="0">
+            <a:pPr marL="0" indent="0">
               <a:buNone/>
             </a:pPr>
             <a:r>
@@ -4029,6 +3505,250 @@
                 <a:ea typeface="Calibri" pitchFamily="34" charset="-122"/>
                 <a:cs typeface="Calibri" pitchFamily="34" charset="-120"/>
               </a:rPr>
+              <a:t>Anfrage – Logik – Speicher</a:t>
+            </a:r>
+            <a:endParaRPr lang="en-US" sz="1100" dirty="0"/>
+          </a:p>
+        </p:txBody>
+      </p:sp>
+      <p:sp>
+        <p:nvSpPr>
+          <p:cNvPr id="14" name="Shape 11"/>
+          <p:cNvSpPr/>
+          <p:nvPr/>
+        </p:nvSpPr>
+        <p:spPr>
+          <a:xfrm>
+            <a:off x="548640" y="2715768"/>
+            <a:ext cx="365760" cy="365760"/>
+          </a:xfrm>
+          <a:prstGeom prst="ellipse">
+            <a:avLst/>
+          </a:prstGeom>
+          <a:solidFill>
+            <a:srgbClr val="3E4856"/>
+          </a:solidFill>
+          <a:ln/>
+        </p:spPr>
+      </p:sp>
+      <p:pic>
+        <p:nvPicPr>
+          <p:cNvPr id="15" name="Image 1" descr="preencoded.png"/>
+          <p:cNvPicPr>
+            <a:picLocks noChangeAspect="1"/>
+          </p:cNvPicPr>
+          <p:nvPr/>
+        </p:nvPicPr>
+        <p:blipFill>
+          <a:blip r:embed="rId3"/>
+          <a:stretch>
+            <a:fillRect/>
+          </a:stretch>
+        </p:blipFill>
+        <p:spPr>
+          <a:xfrm>
+            <a:off x="636422" y="2803550"/>
+            <a:ext cx="190195" cy="190195"/>
+          </a:xfrm>
+          <a:prstGeom prst="rect">
+            <a:avLst/>
+          </a:prstGeom>
+        </p:spPr>
+      </p:pic>
+      <p:sp>
+        <p:nvSpPr>
+          <p:cNvPr id="16" name="Text 12"/>
+          <p:cNvSpPr/>
+          <p:nvPr/>
+        </p:nvSpPr>
+        <p:spPr>
+          <a:xfrm>
+            <a:off x="1051560" y="2679192"/>
+            <a:ext cx="4754880" cy="310896"/>
+          </a:xfrm>
+          <a:prstGeom prst="rect">
+            <a:avLst/>
+          </a:prstGeom>
+          <a:noFill/>
+          <a:ln/>
+        </p:spPr>
+        <p:txBody>
+          <a:bodyPr wrap="square" lIns="0" tIns="0" rIns="0" bIns="0" rtlCol="0" anchor="ctr"/>
+          <a:lstStyle/>
+          <a:p>
+            <a:pPr marL="0" indent="0">
+              <a:buNone/>
+            </a:pPr>
+            <a:r>
+              <a:rPr lang="en-US" sz="1400" b="1" dirty="0">
+                <a:solidFill>
+                  <a:srgbClr val="2A2D34"/>
+                </a:solidFill>
+                <a:latin typeface="Calibri" pitchFamily="34" charset="0"/>
+                <a:ea typeface="Calibri" pitchFamily="34" charset="-122"/>
+                <a:cs typeface="Calibri" pitchFamily="34" charset="-120"/>
+              </a:rPr>
+              <a:t>Repository-Muster</a:t>
+            </a:r>
+            <a:endParaRPr lang="en-US" sz="1400" dirty="0"/>
+          </a:p>
+        </p:txBody>
+      </p:sp>
+      <p:sp>
+        <p:nvSpPr>
+          <p:cNvPr id="17" name="Text 13"/>
+          <p:cNvSpPr/>
+          <p:nvPr/>
+        </p:nvSpPr>
+        <p:spPr>
+          <a:xfrm>
+            <a:off x="1051560" y="2971800"/>
+            <a:ext cx="4754880" cy="274320"/>
+          </a:xfrm>
+          <a:prstGeom prst="rect">
+            <a:avLst/>
+          </a:prstGeom>
+          <a:noFill/>
+          <a:ln/>
+        </p:spPr>
+        <p:txBody>
+          <a:bodyPr wrap="square" lIns="0" tIns="0" rIns="0" bIns="0" rtlCol="0" anchor="ctr"/>
+          <a:lstStyle/>
+          <a:p>
+            <a:pPr marL="0" indent="0">
+              <a:buNone/>
+            </a:pPr>
+            <a:r>
+              <a:rPr lang="en-US" sz="1100" dirty="0">
+                <a:solidFill>
+                  <a:srgbClr val="63676E"/>
+                </a:solidFill>
+                <a:latin typeface="Calibri" pitchFamily="34" charset="0"/>
+                <a:ea typeface="Calibri" pitchFamily="34" charset="-122"/>
+                <a:cs typeface="Calibri" pitchFamily="34" charset="-120"/>
+              </a:rPr>
+              <a:t>Standardisierter Datenzugriff</a:t>
+            </a:r>
+            <a:endParaRPr lang="en-US" sz="1100" dirty="0"/>
+          </a:p>
+        </p:txBody>
+      </p:sp>
+      <p:sp>
+        <p:nvSpPr>
+          <p:cNvPr id="18" name="Shape 14"/>
+          <p:cNvSpPr/>
+          <p:nvPr/>
+        </p:nvSpPr>
+        <p:spPr>
+          <a:xfrm>
+            <a:off x="548640" y="3374136"/>
+            <a:ext cx="365760" cy="365760"/>
+          </a:xfrm>
+          <a:prstGeom prst="ellipse">
+            <a:avLst/>
+          </a:prstGeom>
+          <a:solidFill>
+            <a:srgbClr val="C5394A"/>
+          </a:solidFill>
+          <a:ln/>
+        </p:spPr>
+      </p:sp>
+      <p:pic>
+        <p:nvPicPr>
+          <p:cNvPr id="19" name="Image 2" descr="preencoded.png"/>
+          <p:cNvPicPr>
+            <a:picLocks noChangeAspect="1"/>
+          </p:cNvPicPr>
+          <p:nvPr/>
+        </p:nvPicPr>
+        <p:blipFill>
+          <a:blip r:embed="rId3"/>
+          <a:stretch>
+            <a:fillRect/>
+          </a:stretch>
+        </p:blipFill>
+        <p:spPr>
+          <a:xfrm>
+            <a:off x="636422" y="3461918"/>
+            <a:ext cx="190195" cy="190195"/>
+          </a:xfrm>
+          <a:prstGeom prst="rect">
+            <a:avLst/>
+          </a:prstGeom>
+        </p:spPr>
+      </p:pic>
+      <p:sp>
+        <p:nvSpPr>
+          <p:cNvPr id="20" name="Text 15"/>
+          <p:cNvSpPr/>
+          <p:nvPr/>
+        </p:nvSpPr>
+        <p:spPr>
+          <a:xfrm>
+            <a:off x="1051560" y="3337560"/>
+            <a:ext cx="4754880" cy="310896"/>
+          </a:xfrm>
+          <a:prstGeom prst="rect">
+            <a:avLst/>
+          </a:prstGeom>
+          <a:noFill/>
+          <a:ln/>
+        </p:spPr>
+        <p:txBody>
+          <a:bodyPr wrap="square" lIns="0" tIns="0" rIns="0" bIns="0" rtlCol="0" anchor="ctr"/>
+          <a:lstStyle/>
+          <a:p>
+            <a:pPr marL="0" indent="0">
+              <a:buNone/>
+            </a:pPr>
+            <a:r>
+              <a:rPr lang="en-US" sz="1400" b="1" dirty="0">
+                <a:solidFill>
+                  <a:srgbClr val="2A2D34"/>
+                </a:solidFill>
+                <a:latin typeface="Calibri" pitchFamily="34" charset="0"/>
+                <a:ea typeface="Calibri" pitchFamily="34" charset="-122"/>
+                <a:cs typeface="Calibri" pitchFamily="34" charset="-120"/>
+              </a:rPr>
+              <a:t>DTO / Mapper</a:t>
+            </a:r>
+            <a:endParaRPr lang="en-US" sz="1400" dirty="0"/>
+          </a:p>
+        </p:txBody>
+      </p:sp>
+      <p:sp>
+        <p:nvSpPr>
+          <p:cNvPr id="21" name="Text 16"/>
+          <p:cNvSpPr/>
+          <p:nvPr/>
+        </p:nvSpPr>
+        <p:spPr>
+          <a:xfrm>
+            <a:off x="1051560" y="3630168"/>
+            <a:ext cx="4754880" cy="274320"/>
+          </a:xfrm>
+          <a:prstGeom prst="rect">
+            <a:avLst/>
+          </a:prstGeom>
+          <a:noFill/>
+          <a:ln/>
+        </p:spPr>
+        <p:txBody>
+          <a:bodyPr wrap="square" lIns="0" tIns="0" rIns="0" bIns="0" rtlCol="0" anchor="ctr"/>
+          <a:lstStyle/>
+          <a:p>
+            <a:pPr marL="0" indent="0">
+              <a:buNone/>
+            </a:pPr>
+            <a:r>
+              <a:rPr lang="en-US" sz="1100" dirty="0">
+                <a:solidFill>
+                  <a:srgbClr val="63676E"/>
+                </a:solidFill>
+                <a:latin typeface="Calibri" pitchFamily="34" charset="0"/>
+                <a:ea typeface="Calibri" pitchFamily="34" charset="-122"/>
+                <a:cs typeface="Calibri" pitchFamily="34" charset="-120"/>
+              </a:rPr>
               <a:t>Saubere Trennung Daten / Antwort</a:t>
             </a:r>
             <a:endParaRPr lang="en-US" sz="1100" dirty="0"/>
@@ -4057,7 +3777,303 @@
       </p:sp>
       <p:pic>
         <p:nvPicPr>
-          <p:cNvPr id="23" name="Image 3" descr="preencoded.png">    </p:cNvPr>
+          <p:cNvPr id="23" name="Image 3" descr="preencoded.png"/>
+          <p:cNvPicPr>
+            <a:picLocks noChangeAspect="1"/>
+          </p:cNvPicPr>
+          <p:nvPr/>
+        </p:nvPicPr>
+        <p:blipFill>
+          <a:blip r:embed="rId3"/>
+          <a:stretch>
+            <a:fillRect/>
+          </a:stretch>
+        </p:blipFill>
+        <p:spPr>
+          <a:xfrm>
+            <a:off x="636422" y="4120286"/>
+            <a:ext cx="190195" cy="190195"/>
+          </a:xfrm>
+          <a:prstGeom prst="rect">
+            <a:avLst/>
+          </a:prstGeom>
+        </p:spPr>
+      </p:pic>
+      <p:sp>
+        <p:nvSpPr>
+          <p:cNvPr id="24" name="Text 18"/>
+          <p:cNvSpPr/>
+          <p:nvPr/>
+        </p:nvSpPr>
+        <p:spPr>
+          <a:xfrm>
+            <a:off x="1051560" y="3995928"/>
+            <a:ext cx="4754880" cy="310896"/>
+          </a:xfrm>
+          <a:prstGeom prst="rect">
+            <a:avLst/>
+          </a:prstGeom>
+          <a:noFill/>
+          <a:ln/>
+        </p:spPr>
+        <p:txBody>
+          <a:bodyPr wrap="square" lIns="0" tIns="0" rIns="0" bIns="0" rtlCol="0" anchor="ctr"/>
+          <a:lstStyle/>
+          <a:p>
+            <a:pPr marL="0" indent="0">
+              <a:buNone/>
+            </a:pPr>
+            <a:r>
+              <a:rPr lang="en-US" sz="1400" b="1" dirty="0">
+                <a:solidFill>
+                  <a:srgbClr val="2A2D34"/>
+                </a:solidFill>
+                <a:latin typeface="Calibri" pitchFamily="34" charset="0"/>
+                <a:ea typeface="Calibri" pitchFamily="34" charset="-122"/>
+                <a:cs typeface="Calibri" pitchFamily="34" charset="-120"/>
+              </a:rPr>
+              <a:t>Dependency Injection</a:t>
+            </a:r>
+            <a:endParaRPr lang="en-US" sz="1400" dirty="0"/>
+          </a:p>
+        </p:txBody>
+      </p:sp>
+      <p:sp>
+        <p:nvSpPr>
+          <p:cNvPr id="25" name="Text 19"/>
+          <p:cNvSpPr/>
+          <p:nvPr/>
+        </p:nvSpPr>
+        <p:spPr>
+          <a:xfrm>
+            <a:off x="1051560" y="4288536"/>
+            <a:ext cx="4754880" cy="274320"/>
+          </a:xfrm>
+          <a:prstGeom prst="rect">
+            <a:avLst/>
+          </a:prstGeom>
+          <a:noFill/>
+          <a:ln/>
+        </p:spPr>
+        <p:txBody>
+          <a:bodyPr wrap="square" lIns="0" tIns="0" rIns="0" bIns="0" rtlCol="0" anchor="ctr"/>
+          <a:lstStyle/>
+          <a:p>
+            <a:pPr marL="0" indent="0">
+              <a:buNone/>
+            </a:pPr>
+            <a:r>
+              <a:rPr lang="en-US" sz="1100" dirty="0">
+                <a:solidFill>
+                  <a:srgbClr val="63676E"/>
+                </a:solidFill>
+                <a:latin typeface="Calibri" pitchFamily="34" charset="0"/>
+                <a:ea typeface="Calibri" pitchFamily="34" charset="-122"/>
+                <a:cs typeface="Calibri" pitchFamily="34" charset="-120"/>
+              </a:rPr>
+              <a:t>Lose gekoppelte Bausteine</a:t>
+            </a:r>
+            <a:endParaRPr lang="en-US" sz="1100" dirty="0"/>
+          </a:p>
+        </p:txBody>
+      </p:sp>
+      <p:sp>
+        <p:nvSpPr>
+          <p:cNvPr id="26" name="Shape 20"/>
+          <p:cNvSpPr/>
+          <p:nvPr/>
+        </p:nvSpPr>
+        <p:spPr>
+          <a:xfrm>
+            <a:off x="548640" y="4690872"/>
+            <a:ext cx="365760" cy="365760"/>
+          </a:xfrm>
+          <a:prstGeom prst="ellipse">
+            <a:avLst/>
+          </a:prstGeom>
+          <a:solidFill>
+            <a:srgbClr val="C5394A"/>
+          </a:solidFill>
+          <a:ln/>
+        </p:spPr>
+      </p:sp>
+      <p:pic>
+        <p:nvPicPr>
+          <p:cNvPr id="27" name="Image 4" descr="preencoded.png"/>
+          <p:cNvPicPr>
+            <a:picLocks noChangeAspect="1"/>
+          </p:cNvPicPr>
+          <p:nvPr/>
+        </p:nvPicPr>
+        <p:blipFill>
+          <a:blip r:embed="rId3"/>
+          <a:stretch>
+            <a:fillRect/>
+          </a:stretch>
+        </p:blipFill>
+        <p:spPr>
+          <a:xfrm>
+            <a:off x="636422" y="4778654"/>
+            <a:ext cx="190195" cy="190195"/>
+          </a:xfrm>
+          <a:prstGeom prst="rect">
+            <a:avLst/>
+          </a:prstGeom>
+        </p:spPr>
+      </p:pic>
+      <p:sp>
+        <p:nvSpPr>
+          <p:cNvPr id="28" name="Text 21"/>
+          <p:cNvSpPr/>
+          <p:nvPr/>
+        </p:nvSpPr>
+        <p:spPr>
+          <a:xfrm>
+            <a:off x="1051560" y="4654296"/>
+            <a:ext cx="4754880" cy="310896"/>
+          </a:xfrm>
+          <a:prstGeom prst="rect">
+            <a:avLst/>
+          </a:prstGeom>
+          <a:noFill/>
+          <a:ln/>
+        </p:spPr>
+        <p:txBody>
+          <a:bodyPr wrap="square" lIns="0" tIns="0" rIns="0" bIns="0" rtlCol="0" anchor="ctr"/>
+          <a:lstStyle/>
+          <a:p>
+            <a:pPr marL="0" indent="0">
+              <a:buNone/>
+            </a:pPr>
+            <a:r>
+              <a:rPr lang="en-US" sz="1400" b="1" dirty="0">
+                <a:solidFill>
+                  <a:srgbClr val="2A2D34"/>
+                </a:solidFill>
+                <a:latin typeface="Calibri" pitchFamily="34" charset="0"/>
+                <a:ea typeface="Calibri" pitchFamily="34" charset="-122"/>
+                <a:cs typeface="Calibri" pitchFamily="34" charset="-120"/>
+              </a:rPr>
+              <a:t>SRP · DRY · IOSP · SLA</a:t>
+            </a:r>
+            <a:endParaRPr lang="en-US" sz="1400" dirty="0"/>
+          </a:p>
+        </p:txBody>
+      </p:sp>
+      <p:sp>
+        <p:nvSpPr>
+          <p:cNvPr id="29" name="Text 22"/>
+          <p:cNvSpPr/>
+          <p:nvPr/>
+        </p:nvSpPr>
+        <p:spPr>
+          <a:xfrm>
+            <a:off x="1051560" y="4946904"/>
+            <a:ext cx="4754880" cy="274320"/>
+          </a:xfrm>
+          <a:prstGeom prst="rect">
+            <a:avLst/>
+          </a:prstGeom>
+          <a:noFill/>
+          <a:ln/>
+        </p:spPr>
+        <p:txBody>
+          <a:bodyPr wrap="square" lIns="0" tIns="0" rIns="0" bIns="0" rtlCol="0" anchor="ctr"/>
+          <a:lstStyle/>
+          <a:p>
+            <a:pPr marL="0" indent="0">
+              <a:buNone/>
+            </a:pPr>
+            <a:r>
+              <a:rPr lang="en-US" sz="1100" dirty="0">
+                <a:solidFill>
+                  <a:srgbClr val="63676E"/>
+                </a:solidFill>
+                <a:latin typeface="Calibri" pitchFamily="34" charset="0"/>
+                <a:ea typeface="Calibri" pitchFamily="34" charset="-122"/>
+                <a:cs typeface="Calibri" pitchFamily="34" charset="-120"/>
+              </a:rPr>
+              <a:t>Clean-Code-Prinzipien</a:t>
+            </a:r>
+            <a:endParaRPr lang="en-US" sz="1100" dirty="0"/>
+          </a:p>
+        </p:txBody>
+      </p:sp>
+      <p:sp>
+        <p:nvSpPr>
+          <p:cNvPr id="30" name="Shape 23"/>
+          <p:cNvSpPr/>
+          <p:nvPr/>
+        </p:nvSpPr>
+        <p:spPr>
+          <a:xfrm>
+            <a:off x="6355080" y="1645920"/>
+            <a:ext cx="5212080" cy="3840480"/>
+          </a:xfrm>
+          <a:prstGeom prst="rect">
+            <a:avLst/>
+          </a:prstGeom>
+          <a:solidFill>
+            <a:srgbClr val="F5F5F7"/>
+          </a:solidFill>
+          <a:ln w="12700">
+            <a:solidFill>
+              <a:srgbClr val="E7E5E8"/>
+            </a:solidFill>
+            <a:prstDash val="solid"/>
+          </a:ln>
+          <a:effectLst>
+            <a:outerShdw blurRad="101600" dist="38100" dir="5400000" algn="bl" rotWithShape="0">
+              <a:srgbClr val="000000">
+                <a:alpha val="8000"/>
+              </a:srgbClr>
+            </a:outerShdw>
+          </a:effectLst>
+        </p:spPr>
+      </p:sp>
+      <p:sp>
+        <p:nvSpPr>
+          <p:cNvPr id="31" name="Shape 24"/>
+          <p:cNvSpPr/>
+          <p:nvPr/>
+        </p:nvSpPr>
+        <p:spPr>
+          <a:xfrm>
+            <a:off x="6355080" y="1645920"/>
+            <a:ext cx="5212080" cy="640080"/>
+          </a:xfrm>
+          <a:prstGeom prst="rect">
+            <a:avLst/>
+          </a:prstGeom>
+          <a:solidFill>
+            <a:srgbClr val="3E4856"/>
+          </a:solidFill>
+          <a:ln/>
+        </p:spPr>
+      </p:sp>
+      <p:sp>
+        <p:nvSpPr>
+          <p:cNvPr id="32" name="Shape 25"/>
+          <p:cNvSpPr/>
+          <p:nvPr/>
+        </p:nvSpPr>
+        <p:spPr>
+          <a:xfrm>
+            <a:off x="6537960" y="1783080"/>
+            <a:ext cx="365760" cy="365760"/>
+          </a:xfrm>
+          <a:prstGeom prst="ellipse">
+            <a:avLst/>
+          </a:prstGeom>
+          <a:solidFill>
+            <a:srgbClr val="FFFFFF"/>
+          </a:solidFill>
+          <a:ln/>
+        </p:spPr>
+      </p:sp>
+      <p:pic>
+        <p:nvPicPr>
+          <p:cNvPr id="33" name="Image 5" descr="preencoded.png"/>
           <p:cNvPicPr>
             <a:picLocks noChangeAspect="1"/>
           </p:cNvPicPr>
@@ -4071,302 +4087,6 @@
         </p:blipFill>
         <p:spPr>
           <a:xfrm>
-            <a:off x="636422" y="4120286"/>
-            <a:ext cx="190195" cy="190195"/>
-          </a:xfrm>
-          <a:prstGeom prst="rect">
-            <a:avLst/>
-          </a:prstGeom>
-        </p:spPr>
-      </p:pic>
-      <p:sp>
-        <p:nvSpPr>
-          <p:cNvPr id="24" name="Text 18"/>
-          <p:cNvSpPr/>
-          <p:nvPr/>
-        </p:nvSpPr>
-        <p:spPr>
-          <a:xfrm>
-            <a:off x="1051560" y="3995928"/>
-            <a:ext cx="4754880" cy="310896"/>
-          </a:xfrm>
-          <a:prstGeom prst="rect">
-            <a:avLst/>
-          </a:prstGeom>
-          <a:noFill/>
-          <a:ln/>
-        </p:spPr>
-        <p:txBody>
-          <a:bodyPr wrap="square" lIns="0" tIns="0" rIns="0" bIns="0" rtlCol="0" anchor="ctr"/>
-          <a:lstStyle/>
-          <a:p>
-            <a:pPr indent="0" marL="0">
-              <a:buNone/>
-            </a:pPr>
-            <a:r>
-              <a:rPr lang="en-US" sz="1400" b="1" dirty="0">
-                <a:solidFill>
-                  <a:srgbClr val="2A2D34"/>
-                </a:solidFill>
-                <a:latin typeface="Calibri" pitchFamily="34" charset="0"/>
-                <a:ea typeface="Calibri" pitchFamily="34" charset="-122"/>
-                <a:cs typeface="Calibri" pitchFamily="34" charset="-120"/>
-              </a:rPr>
-              <a:t>Dependency Injection</a:t>
-            </a:r>
-            <a:endParaRPr lang="en-US" sz="1400" dirty="0"/>
-          </a:p>
-        </p:txBody>
-      </p:sp>
-      <p:sp>
-        <p:nvSpPr>
-          <p:cNvPr id="25" name="Text 19"/>
-          <p:cNvSpPr/>
-          <p:nvPr/>
-        </p:nvSpPr>
-        <p:spPr>
-          <a:xfrm>
-            <a:off x="1051560" y="4288536"/>
-            <a:ext cx="4754880" cy="274320"/>
-          </a:xfrm>
-          <a:prstGeom prst="rect">
-            <a:avLst/>
-          </a:prstGeom>
-          <a:noFill/>
-          <a:ln/>
-        </p:spPr>
-        <p:txBody>
-          <a:bodyPr wrap="square" lIns="0" tIns="0" rIns="0" bIns="0" rtlCol="0" anchor="ctr"/>
-          <a:lstStyle/>
-          <a:p>
-            <a:pPr indent="0" marL="0">
-              <a:buNone/>
-            </a:pPr>
-            <a:r>
-              <a:rPr lang="en-US" sz="1100" dirty="0">
-                <a:solidFill>
-                  <a:srgbClr val="63676E"/>
-                </a:solidFill>
-                <a:latin typeface="Calibri" pitchFamily="34" charset="0"/>
-                <a:ea typeface="Calibri" pitchFamily="34" charset="-122"/>
-                <a:cs typeface="Calibri" pitchFamily="34" charset="-120"/>
-              </a:rPr>
-              <a:t>Lose gekoppelte Bausteine</a:t>
-            </a:r>
-            <a:endParaRPr lang="en-US" sz="1100" dirty="0"/>
-          </a:p>
-        </p:txBody>
-      </p:sp>
-      <p:sp>
-        <p:nvSpPr>
-          <p:cNvPr id="26" name="Shape 20"/>
-          <p:cNvSpPr/>
-          <p:nvPr/>
-        </p:nvSpPr>
-        <p:spPr>
-          <a:xfrm>
-            <a:off x="548640" y="4690872"/>
-            <a:ext cx="365760" cy="365760"/>
-          </a:xfrm>
-          <a:prstGeom prst="ellipse">
-            <a:avLst/>
-          </a:prstGeom>
-          <a:solidFill>
-            <a:srgbClr val="C5394A"/>
-          </a:solidFill>
-          <a:ln/>
-        </p:spPr>
-      </p:sp>
-      <p:pic>
-        <p:nvPicPr>
-          <p:cNvPr id="27" name="Image 4" descr="preencoded.png">    </p:cNvPr>
-          <p:cNvPicPr>
-            <a:picLocks noChangeAspect="1"/>
-          </p:cNvPicPr>
-          <p:nvPr/>
-        </p:nvPicPr>
-        <p:blipFill>
-          <a:blip r:embed="rId5"/>
-          <a:stretch>
-            <a:fillRect/>
-          </a:stretch>
-        </p:blipFill>
-        <p:spPr>
-          <a:xfrm>
-            <a:off x="636422" y="4778654"/>
-            <a:ext cx="190195" cy="190195"/>
-          </a:xfrm>
-          <a:prstGeom prst="rect">
-            <a:avLst/>
-          </a:prstGeom>
-        </p:spPr>
-      </p:pic>
-      <p:sp>
-        <p:nvSpPr>
-          <p:cNvPr id="28" name="Text 21"/>
-          <p:cNvSpPr/>
-          <p:nvPr/>
-        </p:nvSpPr>
-        <p:spPr>
-          <a:xfrm>
-            <a:off x="1051560" y="4654296"/>
-            <a:ext cx="4754880" cy="310896"/>
-          </a:xfrm>
-          <a:prstGeom prst="rect">
-            <a:avLst/>
-          </a:prstGeom>
-          <a:noFill/>
-          <a:ln/>
-        </p:spPr>
-        <p:txBody>
-          <a:bodyPr wrap="square" lIns="0" tIns="0" rIns="0" bIns="0" rtlCol="0" anchor="ctr"/>
-          <a:lstStyle/>
-          <a:p>
-            <a:pPr indent="0" marL="0">
-              <a:buNone/>
-            </a:pPr>
-            <a:r>
-              <a:rPr lang="en-US" sz="1400" b="1" dirty="0">
-                <a:solidFill>
-                  <a:srgbClr val="2A2D34"/>
-                </a:solidFill>
-                <a:latin typeface="Calibri" pitchFamily="34" charset="0"/>
-                <a:ea typeface="Calibri" pitchFamily="34" charset="-122"/>
-                <a:cs typeface="Calibri" pitchFamily="34" charset="-120"/>
-              </a:rPr>
-              <a:t>SRP · DRY · IOSP · SLA</a:t>
-            </a:r>
-            <a:endParaRPr lang="en-US" sz="1400" dirty="0"/>
-          </a:p>
-        </p:txBody>
-      </p:sp>
-      <p:sp>
-        <p:nvSpPr>
-          <p:cNvPr id="29" name="Text 22"/>
-          <p:cNvSpPr/>
-          <p:nvPr/>
-        </p:nvSpPr>
-        <p:spPr>
-          <a:xfrm>
-            <a:off x="1051560" y="4946904"/>
-            <a:ext cx="4754880" cy="274320"/>
-          </a:xfrm>
-          <a:prstGeom prst="rect">
-            <a:avLst/>
-          </a:prstGeom>
-          <a:noFill/>
-          <a:ln/>
-        </p:spPr>
-        <p:txBody>
-          <a:bodyPr wrap="square" lIns="0" tIns="0" rIns="0" bIns="0" rtlCol="0" anchor="ctr"/>
-          <a:lstStyle/>
-          <a:p>
-            <a:pPr indent="0" marL="0">
-              <a:buNone/>
-            </a:pPr>
-            <a:r>
-              <a:rPr lang="en-US" sz="1100" dirty="0">
-                <a:solidFill>
-                  <a:srgbClr val="63676E"/>
-                </a:solidFill>
-                <a:latin typeface="Calibri" pitchFamily="34" charset="0"/>
-                <a:ea typeface="Calibri" pitchFamily="34" charset="-122"/>
-                <a:cs typeface="Calibri" pitchFamily="34" charset="-120"/>
-              </a:rPr>
-              <a:t>Clean-Code-Prinzipien</a:t>
-            </a:r>
-            <a:endParaRPr lang="en-US" sz="1100" dirty="0"/>
-          </a:p>
-        </p:txBody>
-      </p:sp>
-      <p:sp>
-        <p:nvSpPr>
-          <p:cNvPr id="30" name="Shape 23"/>
-          <p:cNvSpPr/>
-          <p:nvPr/>
-        </p:nvSpPr>
-        <p:spPr>
-          <a:xfrm>
-            <a:off x="6355080" y="1645920"/>
-            <a:ext cx="5212080" cy="3840480"/>
-          </a:xfrm>
-          <a:prstGeom prst="rect">
-            <a:avLst/>
-          </a:prstGeom>
-          <a:solidFill>
-            <a:srgbClr val="F5F5F7"/>
-          </a:solidFill>
-          <a:ln w="12700">
-            <a:solidFill>
-              <a:srgbClr val="E7E5E8"/>
-            </a:solidFill>
-            <a:prstDash val="solid"/>
-          </a:ln>
-          <a:effectLst>
-            <a:outerShdw sx="100000" sy="100000" kx="0" ky="0" algn="bl" rotWithShape="0" blurRad="101600" dist="38100" dir="5400000">
-              <a:srgbClr val="000000">
-                <a:alpha val="8000"/>
-              </a:srgbClr>
-            </a:outerShdw>
-          </a:effectLst>
-        </p:spPr>
-      </p:sp>
-      <p:sp>
-        <p:nvSpPr>
-          <p:cNvPr id="31" name="Shape 24"/>
-          <p:cNvSpPr/>
-          <p:nvPr/>
-        </p:nvSpPr>
-        <p:spPr>
-          <a:xfrm>
-            <a:off x="6355080" y="1645920"/>
-            <a:ext cx="5212080" cy="640080"/>
-          </a:xfrm>
-          <a:prstGeom prst="rect">
-            <a:avLst/>
-          </a:prstGeom>
-          <a:solidFill>
-            <a:srgbClr val="3E4856"/>
-          </a:solidFill>
-          <a:ln/>
-        </p:spPr>
-      </p:sp>
-      <p:sp>
-        <p:nvSpPr>
-          <p:cNvPr id="32" name="Shape 25"/>
-          <p:cNvSpPr/>
-          <p:nvPr/>
-        </p:nvSpPr>
-        <p:spPr>
-          <a:xfrm>
-            <a:off x="6537960" y="1783080"/>
-            <a:ext cx="365760" cy="365760"/>
-          </a:xfrm>
-          <a:prstGeom prst="ellipse">
-            <a:avLst/>
-          </a:prstGeom>
-          <a:solidFill>
-            <a:srgbClr val="FFFFFF"/>
-          </a:solidFill>
-          <a:ln/>
-        </p:spPr>
-      </p:sp>
-      <p:pic>
-        <p:nvPicPr>
-          <p:cNvPr id="33" name="Image 5" descr="preencoded.png">    </p:cNvPr>
-          <p:cNvPicPr>
-            <a:picLocks noChangeAspect="1"/>
-          </p:cNvPicPr>
-          <p:nvPr/>
-        </p:nvPicPr>
-        <p:blipFill>
-          <a:blip r:embed="rId6"/>
-          <a:stretch>
-            <a:fillRect/>
-          </a:stretch>
-        </p:blipFill>
-        <p:spPr>
-          <a:xfrm>
             <a:off x="6625742" y="1870862"/>
             <a:ext cx="190195" cy="190195"/>
           </a:xfrm>
@@ -4396,7 +4116,7 @@
           <a:bodyPr wrap="square" lIns="0" tIns="0" rIns="0" bIns="0" rtlCol="0" anchor="ctr"/>
           <a:lstStyle/>
           <a:p>
-            <a:pPr indent="0" marL="0">
+            <a:pPr marL="0" indent="0">
               <a:buNone/>
             </a:pPr>
             <a:r>
@@ -4455,7 +4175,7 @@
           <a:bodyPr wrap="square" lIns="0" tIns="0" rIns="0" bIns="0" rtlCol="0" anchor="ctr"/>
           <a:lstStyle/>
           <a:p>
-            <a:pPr algn="ctr" indent="0" marL="0">
+            <a:pPr marL="0" indent="0" algn="ctr">
               <a:buNone/>
             </a:pPr>
             <a:r>
@@ -4494,7 +4214,7 @@
           <a:bodyPr wrap="square" lIns="0" tIns="0" rIns="0" bIns="0" rtlCol="0" anchor="ctr"/>
           <a:lstStyle/>
           <a:p>
-            <a:pPr indent="0" marL="0">
+            <a:pPr marL="0" indent="0">
               <a:buNone/>
             </a:pPr>
             <a:r>
@@ -4676,6 +4396,7 @@
         <a:solidFill>
           <a:srgbClr val="FFFFFF"/>
         </a:solidFill>
+        <a:effectLst/>
       </p:bgPr>
     </p:bg>
     <p:spTree>
@@ -4753,7 +4474,7 @@
           <a:bodyPr wrap="square" lIns="0" tIns="0" rIns="0" bIns="0" rtlCol="0" anchor="ctr"/>
           <a:lstStyle/>
           <a:p>
-            <a:pPr algn="l" indent="0" marL="0">
+            <a:pPr marL="0" indent="0" algn="l">
               <a:buNone/>
             </a:pPr>
             <a:r>
@@ -4792,7 +4513,7 @@
           <a:bodyPr wrap="square" lIns="0" tIns="0" rIns="0" bIns="0" rtlCol="0" anchor="ctr"/>
           <a:lstStyle/>
           <a:p>
-            <a:pPr algn="r" indent="0" marL="0">
+            <a:pPr marL="0" indent="0" algn="r">
               <a:buNone/>
             </a:pPr>
             <a:r>
@@ -4831,11 +4552,11 @@
           <a:bodyPr wrap="square" lIns="0" tIns="0" rIns="0" bIns="0" rtlCol="0" anchor="ctr"/>
           <a:lstStyle/>
           <a:p>
-            <a:pPr algn="r" indent="0" marL="0">
-              <a:buNone/>
-            </a:pPr>
-            <a:r>
-              <a:rPr lang="en-US" sz="900" b="1" spc="100" kern="0" dirty="0">
+            <a:pPr marL="0" indent="0" algn="r">
+              <a:buNone/>
+            </a:pPr>
+            <a:r>
+              <a:rPr lang="en-US" sz="900" b="1" kern="0" spc="100" dirty="0">
                 <a:solidFill>
                   <a:srgbClr val="C5394A"/>
                 </a:solidFill>
@@ -4870,11 +4591,11 @@
           <a:bodyPr wrap="square" lIns="0" tIns="0" rIns="0" bIns="0" rtlCol="0" anchor="ctr"/>
           <a:lstStyle/>
           <a:p>
-            <a:pPr indent="0" marL="0">
-              <a:buNone/>
-            </a:pPr>
-            <a:r>
-              <a:rPr lang="en-US" sz="1200" b="1" spc="200" kern="0" dirty="0">
+            <a:pPr marL="0" indent="0">
+              <a:buNone/>
+            </a:pPr>
+            <a:r>
+              <a:rPr lang="en-US" sz="1200" b="1" kern="0" spc="200" dirty="0">
                 <a:solidFill>
                   <a:srgbClr val="C5394A"/>
                 </a:solidFill>
@@ -4909,7 +4630,7 @@
           <a:bodyPr wrap="square" lIns="0" tIns="0" rIns="0" bIns="0" rtlCol="0" anchor="ctr"/>
           <a:lstStyle/>
           <a:p>
-            <a:pPr indent="0" marL="0">
+            <a:pPr marL="0" indent="0">
               <a:buNone/>
             </a:pPr>
             <a:r>
@@ -4951,7 +4672,7 @@
             <a:prstDash val="solid"/>
           </a:ln>
           <a:effectLst>
-            <a:outerShdw sx="100000" sy="100000" kx="0" ky="0" algn="bl" rotWithShape="0" blurRad="101600" dist="38100" dir="5400000">
+            <a:outerShdw blurRad="101600" dist="38100" dir="5400000" algn="bl" rotWithShape="0">
               <a:srgbClr val="000000">
                 <a:alpha val="8000"/>
               </a:srgbClr>
@@ -4980,7 +4701,7 @@
           <a:bodyPr wrap="square" lIns="0" tIns="0" rIns="0" bIns="0" rtlCol="0" anchor="ctr"/>
           <a:lstStyle/>
           <a:p>
-            <a:pPr algn="ctr" indent="0" marL="0">
+            <a:pPr marL="0" indent="0" algn="ctr">
               <a:buNone/>
             </a:pPr>
             <a:r>
@@ -5019,7 +4740,7 @@
           <a:bodyPr wrap="square" lIns="0" tIns="0" rIns="0" bIns="0" rtlCol="0" anchor="ctr"/>
           <a:lstStyle/>
           <a:p>
-            <a:pPr algn="ctr" indent="0" marL="0">
+            <a:pPr marL="0" indent="0" algn="ctr">
               <a:buNone/>
             </a:pPr>
             <a:r>
@@ -5061,7 +4782,7 @@
             <a:prstDash val="solid"/>
           </a:ln>
           <a:effectLst>
-            <a:outerShdw sx="100000" sy="100000" kx="0" ky="0" algn="bl" rotWithShape="0" blurRad="101600" dist="38100" dir="5400000">
+            <a:outerShdw blurRad="101600" dist="38100" dir="5400000" algn="bl" rotWithShape="0">
               <a:srgbClr val="000000">
                 <a:alpha val="8000"/>
               </a:srgbClr>
@@ -5090,7 +4811,7 @@
           <a:bodyPr wrap="square" lIns="0" tIns="0" rIns="0" bIns="0" rtlCol="0" anchor="ctr"/>
           <a:lstStyle/>
           <a:p>
-            <a:pPr algn="ctr" indent="0" marL="0">
+            <a:pPr marL="0" indent="0" algn="ctr">
               <a:buNone/>
             </a:pPr>
             <a:r>
@@ -5129,7 +4850,7 @@
           <a:bodyPr wrap="square" lIns="0" tIns="0" rIns="0" bIns="0" rtlCol="0" anchor="ctr"/>
           <a:lstStyle/>
           <a:p>
-            <a:pPr algn="ctr" indent="0" marL="0">
+            <a:pPr marL="0" indent="0" algn="ctr">
               <a:buNone/>
             </a:pPr>
             <a:r>
@@ -5171,7 +4892,7 @@
             <a:prstDash val="solid"/>
           </a:ln>
           <a:effectLst>
-            <a:outerShdw sx="100000" sy="100000" kx="0" ky="0" algn="bl" rotWithShape="0" blurRad="101600" dist="38100" dir="5400000">
+            <a:outerShdw blurRad="101600" dist="38100" dir="5400000" algn="bl" rotWithShape="0">
               <a:srgbClr val="000000">
                 <a:alpha val="8000"/>
               </a:srgbClr>
@@ -5200,7 +4921,7 @@
           <a:bodyPr wrap="square" lIns="0" tIns="0" rIns="0" bIns="0" rtlCol="0" anchor="ctr"/>
           <a:lstStyle/>
           <a:p>
-            <a:pPr algn="ctr" indent="0" marL="0">
+            <a:pPr marL="0" indent="0" algn="ctr">
               <a:buNone/>
             </a:pPr>
             <a:r>
@@ -5239,7 +4960,7 @@
           <a:bodyPr wrap="square" lIns="0" tIns="0" rIns="0" bIns="0" rtlCol="0" anchor="ctr"/>
           <a:lstStyle/>
           <a:p>
-            <a:pPr algn="ctr" indent="0" marL="0">
+            <a:pPr marL="0" indent="0" algn="ctr">
               <a:buNone/>
             </a:pPr>
             <a:r>
@@ -5304,301 +5025,7 @@
       </p:sp>
       <p:pic>
         <p:nvPicPr>
-          <p:cNvPr id="20" name="Image 0" descr="preencoded.png">    </p:cNvPr>
-          <p:cNvPicPr>
-            <a:picLocks noChangeAspect="1"/>
-          </p:cNvPicPr>
-          <p:nvPr/>
-        </p:nvPicPr>
-        <p:blipFill>
-          <a:blip r:embed="rId1"/>
-          <a:stretch>
-            <a:fillRect/>
-          </a:stretch>
-        </p:blipFill>
-        <p:spPr>
-          <a:xfrm>
-            <a:off x="830275" y="3344875"/>
-            <a:ext cx="213970" cy="213970"/>
-          </a:xfrm>
-          <a:prstGeom prst="rect">
-            <a:avLst/>
-          </a:prstGeom>
-        </p:spPr>
-      </p:pic>
-      <p:sp>
-        <p:nvSpPr>
-          <p:cNvPr id="21" name="Text 18"/>
-          <p:cNvSpPr/>
-          <p:nvPr/>
-        </p:nvSpPr>
-        <p:spPr>
-          <a:xfrm>
-            <a:off x="1325880" y="3154680"/>
-            <a:ext cx="4526280" cy="292608"/>
-          </a:xfrm>
-          <a:prstGeom prst="rect">
-            <a:avLst/>
-          </a:prstGeom>
-          <a:noFill/>
-          <a:ln/>
-        </p:spPr>
-        <p:txBody>
-          <a:bodyPr wrap="square" lIns="0" tIns="0" rIns="0" bIns="0" rtlCol="0" anchor="ctr"/>
-          <a:lstStyle/>
-          <a:p>
-            <a:pPr indent="0" marL="0">
-              <a:buNone/>
-            </a:pPr>
-            <a:r>
-              <a:rPr lang="en-US" sz="1350" b="1" dirty="0">
-                <a:solidFill>
-                  <a:srgbClr val="2A2D34"/>
-                </a:solidFill>
-                <a:latin typeface="Trebuchet MS" pitchFamily="34" charset="0"/>
-                <a:ea typeface="Trebuchet MS" pitchFamily="34" charset="-122"/>
-                <a:cs typeface="Trebuchet MS" pitchFamily="34" charset="-120"/>
-              </a:rPr>
-              <a:t>Logik-Tests</a:t>
-            </a:r>
-            <a:endParaRPr lang="en-US" sz="1350" dirty="0"/>
-          </a:p>
-        </p:txBody>
-      </p:sp>
-      <p:sp>
-        <p:nvSpPr>
-          <p:cNvPr id="22" name="Text 19"/>
-          <p:cNvSpPr/>
-          <p:nvPr/>
-        </p:nvSpPr>
-        <p:spPr>
-          <a:xfrm>
-            <a:off x="1325880" y="3447288"/>
-            <a:ext cx="4480560" cy="329184"/>
-          </a:xfrm>
-          <a:prstGeom prst="rect">
-            <a:avLst/>
-          </a:prstGeom>
-          <a:noFill/>
-          <a:ln/>
-        </p:spPr>
-        <p:txBody>
-          <a:bodyPr wrap="square" lIns="0" tIns="0" rIns="0" bIns="0" rtlCol="0" anchor="ctr"/>
-          <a:lstStyle/>
-          <a:p>
-            <a:pPr indent="0" marL="0">
-              <a:buNone/>
-            </a:pPr>
-            <a:r>
-              <a:rPr lang="en-US" sz="1050" dirty="0">
-                <a:solidFill>
-                  <a:srgbClr val="63676E"/>
-                </a:solidFill>
-                <a:latin typeface="Calibri" pitchFamily="34" charset="0"/>
-                <a:ea typeface="Calibri" pitchFamily="34" charset="-122"/>
-                <a:cs typeface="Calibri" pitchFamily="34" charset="-120"/>
-              </a:rPr>
-              <a:t>Einzelne Funktionen isoliert geprüft</a:t>
-            </a:r>
-            <a:endParaRPr lang="en-US" sz="1050" dirty="0"/>
-          </a:p>
-        </p:txBody>
-      </p:sp>
-      <p:sp>
-        <p:nvSpPr>
-          <p:cNvPr id="23" name="Shape 20"/>
-          <p:cNvSpPr/>
-          <p:nvPr/>
-        </p:nvSpPr>
-        <p:spPr>
-          <a:xfrm>
-            <a:off x="548640" y="3977640"/>
-            <a:ext cx="5440680" cy="768096"/>
-          </a:xfrm>
-          <a:prstGeom prst="rect">
-            <a:avLst/>
-          </a:prstGeom>
-          <a:solidFill>
-            <a:srgbClr val="F5F5F7"/>
-          </a:solidFill>
-          <a:ln w="12700">
-            <a:solidFill>
-              <a:srgbClr val="E7E5E8"/>
-            </a:solidFill>
-            <a:prstDash val="solid"/>
-          </a:ln>
-        </p:spPr>
-      </p:sp>
-      <p:sp>
-        <p:nvSpPr>
-          <p:cNvPr id="24" name="Shape 21"/>
-          <p:cNvSpPr/>
-          <p:nvPr/>
-        </p:nvSpPr>
-        <p:spPr>
-          <a:xfrm>
-            <a:off x="731520" y="4160520"/>
-            <a:ext cx="411480" cy="411480"/>
-          </a:xfrm>
-          <a:prstGeom prst="ellipse">
-            <a:avLst/>
-          </a:prstGeom>
-          <a:solidFill>
-            <a:srgbClr val="3E4856"/>
-          </a:solidFill>
-          <a:ln/>
-        </p:spPr>
-      </p:sp>
-      <p:pic>
-        <p:nvPicPr>
-          <p:cNvPr id="25" name="Image 1" descr="preencoded.png">    </p:cNvPr>
-          <p:cNvPicPr>
-            <a:picLocks noChangeAspect="1"/>
-          </p:cNvPicPr>
-          <p:nvPr/>
-        </p:nvPicPr>
-        <p:blipFill>
-          <a:blip r:embed="rId2"/>
-          <a:stretch>
-            <a:fillRect/>
-          </a:stretch>
-        </p:blipFill>
-        <p:spPr>
-          <a:xfrm>
-            <a:off x="830275" y="4259275"/>
-            <a:ext cx="213970" cy="213970"/>
-          </a:xfrm>
-          <a:prstGeom prst="rect">
-            <a:avLst/>
-          </a:prstGeom>
-        </p:spPr>
-      </p:pic>
-      <p:sp>
-        <p:nvSpPr>
-          <p:cNvPr id="26" name="Text 22"/>
-          <p:cNvSpPr/>
-          <p:nvPr/>
-        </p:nvSpPr>
-        <p:spPr>
-          <a:xfrm>
-            <a:off x="1325880" y="4069080"/>
-            <a:ext cx="4526280" cy="292608"/>
-          </a:xfrm>
-          <a:prstGeom prst="rect">
-            <a:avLst/>
-          </a:prstGeom>
-          <a:noFill/>
-          <a:ln/>
-        </p:spPr>
-        <p:txBody>
-          <a:bodyPr wrap="square" lIns="0" tIns="0" rIns="0" bIns="0" rtlCol="0" anchor="ctr"/>
-          <a:lstStyle/>
-          <a:p>
-            <a:pPr indent="0" marL="0">
-              <a:buNone/>
-            </a:pPr>
-            <a:r>
-              <a:rPr lang="en-US" sz="1350" b="1" dirty="0">
-                <a:solidFill>
-                  <a:srgbClr val="2A2D34"/>
-                </a:solidFill>
-                <a:latin typeface="Trebuchet MS" pitchFamily="34" charset="0"/>
-                <a:ea typeface="Trebuchet MS" pitchFamily="34" charset="-122"/>
-                <a:cs typeface="Trebuchet MS" pitchFamily="34" charset="-120"/>
-              </a:rPr>
-              <a:t>Oberflächen-Tests</a:t>
-            </a:r>
-            <a:endParaRPr lang="en-US" sz="1350" dirty="0"/>
-          </a:p>
-        </p:txBody>
-      </p:sp>
-      <p:sp>
-        <p:nvSpPr>
-          <p:cNvPr id="27" name="Text 23"/>
-          <p:cNvSpPr/>
-          <p:nvPr/>
-        </p:nvSpPr>
-        <p:spPr>
-          <a:xfrm>
-            <a:off x="1325880" y="4361688"/>
-            <a:ext cx="4480560" cy="329184"/>
-          </a:xfrm>
-          <a:prstGeom prst="rect">
-            <a:avLst/>
-          </a:prstGeom>
-          <a:noFill/>
-          <a:ln/>
-        </p:spPr>
-        <p:txBody>
-          <a:bodyPr wrap="square" lIns="0" tIns="0" rIns="0" bIns="0" rtlCol="0" anchor="ctr"/>
-          <a:lstStyle/>
-          <a:p>
-            <a:pPr indent="0" marL="0">
-              <a:buNone/>
-            </a:pPr>
-            <a:r>
-              <a:rPr lang="en-US" sz="1050" dirty="0">
-                <a:solidFill>
-                  <a:srgbClr val="63676E"/>
-                </a:solidFill>
-                <a:latin typeface="Calibri" pitchFamily="34" charset="0"/>
-                <a:ea typeface="Calibri" pitchFamily="34" charset="-122"/>
-                <a:cs typeface="Calibri" pitchFamily="34" charset="-120"/>
-              </a:rPr>
-              <a:t>Komponenten &amp; Klicks getestet</a:t>
-            </a:r>
-            <a:endParaRPr lang="en-US" sz="1050" dirty="0"/>
-          </a:p>
-        </p:txBody>
-      </p:sp>
-      <p:sp>
-        <p:nvSpPr>
-          <p:cNvPr id="28" name="Shape 24"/>
-          <p:cNvSpPr/>
-          <p:nvPr/>
-        </p:nvSpPr>
-        <p:spPr>
-          <a:xfrm>
-            <a:off x="548640" y="4892040"/>
-            <a:ext cx="5440680" cy="768096"/>
-          </a:xfrm>
-          <a:prstGeom prst="rect">
-            <a:avLst/>
-          </a:prstGeom>
-          <a:solidFill>
-            <a:srgbClr val="F5F5F7"/>
-          </a:solidFill>
-          <a:ln w="12700">
-            <a:solidFill>
-              <a:srgbClr val="E7E5E8"/>
-            </a:solidFill>
-            <a:prstDash val="solid"/>
-          </a:ln>
-        </p:spPr>
-      </p:sp>
-      <p:sp>
-        <p:nvSpPr>
-          <p:cNvPr id="29" name="Shape 25"/>
-          <p:cNvSpPr/>
-          <p:nvPr/>
-        </p:nvSpPr>
-        <p:spPr>
-          <a:xfrm>
-            <a:off x="731520" y="5074920"/>
-            <a:ext cx="411480" cy="411480"/>
-          </a:xfrm>
-          <a:prstGeom prst="ellipse">
-            <a:avLst/>
-          </a:prstGeom>
-          <a:solidFill>
-            <a:srgbClr val="C5394A"/>
-          </a:solidFill>
-          <a:ln/>
-        </p:spPr>
-      </p:sp>
-      <p:pic>
-        <p:nvPicPr>
-          <p:cNvPr id="30" name="Image 2" descr="preencoded.png">    </p:cNvPr>
+          <p:cNvPr id="20" name="Image 0" descr="preencoded.png"/>
           <p:cNvPicPr>
             <a:picLocks noChangeAspect="1"/>
           </p:cNvPicPr>
@@ -5612,7 +5039,7 @@
         </p:blipFill>
         <p:spPr>
           <a:xfrm>
-            <a:off x="830275" y="5173675"/>
+            <a:off x="830275" y="3344875"/>
             <a:ext cx="213970" cy="213970"/>
           </a:xfrm>
           <a:prstGeom prst="rect">
@@ -5622,13 +5049,13 @@
       </p:pic>
       <p:sp>
         <p:nvSpPr>
-          <p:cNvPr id="31" name="Text 26"/>
-          <p:cNvSpPr/>
-          <p:nvPr/>
-        </p:nvSpPr>
-        <p:spPr>
-          <a:xfrm>
-            <a:off x="1325880" y="4983480"/>
+          <p:cNvPr id="21" name="Text 18"/>
+          <p:cNvSpPr/>
+          <p:nvPr/>
+        </p:nvSpPr>
+        <p:spPr>
+          <a:xfrm>
+            <a:off x="1325880" y="3154680"/>
             <a:ext cx="4526280" cy="292608"/>
           </a:xfrm>
           <a:prstGeom prst="rect">
@@ -5641,7 +5068,7 @@
           <a:bodyPr wrap="square" lIns="0" tIns="0" rIns="0" bIns="0" rtlCol="0" anchor="ctr"/>
           <a:lstStyle/>
           <a:p>
-            <a:pPr indent="0" marL="0">
+            <a:pPr marL="0" indent="0">
               <a:buNone/>
             </a:pPr>
             <a:r>
@@ -5653,7 +5080,7 @@
                 <a:ea typeface="Trebuchet MS" pitchFamily="34" charset="-122"/>
                 <a:cs typeface="Trebuchet MS" pitchFamily="34" charset="-120"/>
               </a:rPr>
-              <a:t>Zusammenspiel</a:t>
+              <a:t>Logik-Tests</a:t>
             </a:r>
             <a:endParaRPr lang="en-US" sz="1350" dirty="0"/>
           </a:p>
@@ -5661,13 +5088,13 @@
       </p:sp>
       <p:sp>
         <p:nvSpPr>
-          <p:cNvPr id="32" name="Text 27"/>
-          <p:cNvSpPr/>
-          <p:nvPr/>
-        </p:nvSpPr>
-        <p:spPr>
-          <a:xfrm>
-            <a:off x="1325880" y="5276088"/>
+          <p:cNvPr id="22" name="Text 19"/>
+          <p:cNvSpPr/>
+          <p:nvPr/>
+        </p:nvSpPr>
+        <p:spPr>
+          <a:xfrm>
+            <a:off x="1325880" y="3447288"/>
             <a:ext cx="4480560" cy="329184"/>
           </a:xfrm>
           <a:prstGeom prst="rect">
@@ -5680,7 +5107,7 @@
           <a:bodyPr wrap="square" lIns="0" tIns="0" rIns="0" bIns="0" rtlCol="0" anchor="ctr"/>
           <a:lstStyle/>
           <a:p>
-            <a:pPr indent="0" marL="0">
+            <a:pPr marL="0" indent="0">
               <a:buNone/>
             </a:pPr>
             <a:r>
@@ -5692,7 +5119,7 @@
                 <a:ea typeface="Calibri" pitchFamily="34" charset="-122"/>
                 <a:cs typeface="Calibri" pitchFamily="34" charset="-120"/>
               </a:rPr>
-              <a:t>Komplette Abläufe Ende-zu-Ende</a:t>
+              <a:t>Einzelne Funktionen isoliert geprüft</a:t>
             </a:r>
             <a:endParaRPr lang="en-US" sz="1050" dirty="0"/>
           </a:p>
@@ -5700,13 +5127,13 @@
       </p:sp>
       <p:sp>
         <p:nvSpPr>
-          <p:cNvPr id="33" name="Shape 28"/>
-          <p:cNvSpPr/>
-          <p:nvPr/>
-        </p:nvSpPr>
-        <p:spPr>
-          <a:xfrm>
-            <a:off x="6126480" y="3063240"/>
+          <p:cNvPr id="23" name="Shape 20"/>
+          <p:cNvSpPr/>
+          <p:nvPr/>
+        </p:nvSpPr>
+        <p:spPr>
+          <a:xfrm>
+            <a:off x="548640" y="3977640"/>
             <a:ext cx="5440680" cy="768096"/>
           </a:xfrm>
           <a:prstGeom prst="rect">
@@ -5725,13 +5152,13 @@
       </p:sp>
       <p:sp>
         <p:nvSpPr>
-          <p:cNvPr id="34" name="Shape 29"/>
-          <p:cNvSpPr/>
-          <p:nvPr/>
-        </p:nvSpPr>
-        <p:spPr>
-          <a:xfrm>
-            <a:off x="6309360" y="3246120"/>
+          <p:cNvPr id="24" name="Shape 21"/>
+          <p:cNvSpPr/>
+          <p:nvPr/>
+        </p:nvSpPr>
+        <p:spPr>
+          <a:xfrm>
+            <a:off x="731520" y="4160520"/>
             <a:ext cx="411480" cy="411480"/>
           </a:xfrm>
           <a:prstGeom prst="ellipse">
@@ -5745,7 +5172,7 @@
       </p:sp>
       <p:pic>
         <p:nvPicPr>
-          <p:cNvPr id="35" name="Image 3" descr="preencoded.png">    </p:cNvPr>
+          <p:cNvPr id="25" name="Image 1" descr="preencoded.png"/>
           <p:cNvPicPr>
             <a:picLocks noChangeAspect="1"/>
           </p:cNvPicPr>
@@ -5759,7 +5186,7 @@
         </p:blipFill>
         <p:spPr>
           <a:xfrm>
-            <a:off x="6408115" y="3344875"/>
+            <a:off x="830275" y="4259275"/>
             <a:ext cx="213970" cy="213970"/>
           </a:xfrm>
           <a:prstGeom prst="rect">
@@ -5769,13 +5196,13 @@
       </p:pic>
       <p:sp>
         <p:nvSpPr>
-          <p:cNvPr id="36" name="Text 30"/>
-          <p:cNvSpPr/>
-          <p:nvPr/>
-        </p:nvSpPr>
-        <p:spPr>
-          <a:xfrm>
-            <a:off x="6903720" y="3154680"/>
+          <p:cNvPr id="26" name="Text 22"/>
+          <p:cNvSpPr/>
+          <p:nvPr/>
+        </p:nvSpPr>
+        <p:spPr>
+          <a:xfrm>
+            <a:off x="1325880" y="4069080"/>
             <a:ext cx="4526280" cy="292608"/>
           </a:xfrm>
           <a:prstGeom prst="rect">
@@ -5788,7 +5215,7 @@
           <a:bodyPr wrap="square" lIns="0" tIns="0" rIns="0" bIns="0" rtlCol="0" anchor="ctr"/>
           <a:lstStyle/>
           <a:p>
-            <a:pPr indent="0" marL="0">
+            <a:pPr marL="0" indent="0">
               <a:buNone/>
             </a:pPr>
             <a:r>
@@ -5800,7 +5227,7 @@
                 <a:ea typeface="Trebuchet MS" pitchFamily="34" charset="-122"/>
                 <a:cs typeface="Trebuchet MS" pitchFamily="34" charset="-120"/>
               </a:rPr>
-              <a:t>Schnelltests</a:t>
+              <a:t>Oberflächen-Tests</a:t>
             </a:r>
             <a:endParaRPr lang="en-US" sz="1350" dirty="0"/>
           </a:p>
@@ -5808,13 +5235,13 @@
       </p:sp>
       <p:sp>
         <p:nvSpPr>
-          <p:cNvPr id="37" name="Text 31"/>
-          <p:cNvSpPr/>
-          <p:nvPr/>
-        </p:nvSpPr>
-        <p:spPr>
-          <a:xfrm>
-            <a:off x="6903720" y="3447288"/>
+          <p:cNvPr id="27" name="Text 23"/>
+          <p:cNvSpPr/>
+          <p:nvPr/>
+        </p:nvSpPr>
+        <p:spPr>
+          <a:xfrm>
+            <a:off x="1325880" y="4361688"/>
             <a:ext cx="4480560" cy="329184"/>
           </a:xfrm>
           <a:prstGeom prst="rect">
@@ -5827,7 +5254,7 @@
           <a:bodyPr wrap="square" lIns="0" tIns="0" rIns="0" bIns="0" rtlCol="0" anchor="ctr"/>
           <a:lstStyle/>
           <a:p>
-            <a:pPr indent="0" marL="0">
+            <a:pPr marL="0" indent="0">
               <a:buNone/>
             </a:pPr>
             <a:r>
@@ -5839,7 +5266,7 @@
                 <a:ea typeface="Calibri" pitchFamily="34" charset="-122"/>
                 <a:cs typeface="Calibri" pitchFamily="34" charset="-120"/>
               </a:rPr>
-              <a:t>16 Kernabläufe nach jedem Update</a:t>
+              <a:t>Komponenten &amp; Klicks getestet</a:t>
             </a:r>
             <a:endParaRPr lang="en-US" sz="1050" dirty="0"/>
           </a:p>
@@ -5847,13 +5274,13 @@
       </p:sp>
       <p:sp>
         <p:nvSpPr>
-          <p:cNvPr id="38" name="Shape 32"/>
-          <p:cNvSpPr/>
-          <p:nvPr/>
-        </p:nvSpPr>
-        <p:spPr>
-          <a:xfrm>
-            <a:off x="6126480" y="3977640"/>
+          <p:cNvPr id="28" name="Shape 24"/>
+          <p:cNvSpPr/>
+          <p:nvPr/>
+        </p:nvSpPr>
+        <p:spPr>
+          <a:xfrm>
+            <a:off x="548640" y="4892040"/>
             <a:ext cx="5440680" cy="768096"/>
           </a:xfrm>
           <a:prstGeom prst="rect">
@@ -5872,13 +5299,13 @@
       </p:sp>
       <p:sp>
         <p:nvSpPr>
-          <p:cNvPr id="39" name="Shape 33"/>
-          <p:cNvSpPr/>
-          <p:nvPr/>
-        </p:nvSpPr>
-        <p:spPr>
-          <a:xfrm>
-            <a:off x="6309360" y="4160520"/>
+          <p:cNvPr id="29" name="Shape 25"/>
+          <p:cNvSpPr/>
+          <p:nvPr/>
+        </p:nvSpPr>
+        <p:spPr>
+          <a:xfrm>
+            <a:off x="731520" y="5074920"/>
             <a:ext cx="411480" cy="411480"/>
           </a:xfrm>
           <a:prstGeom prst="ellipse">
@@ -5892,7 +5319,7 @@
       </p:sp>
       <p:pic>
         <p:nvPicPr>
-          <p:cNvPr id="40" name="Image 4" descr="preencoded.png">    </p:cNvPr>
+          <p:cNvPr id="30" name="Image 2" descr="preencoded.png"/>
           <p:cNvPicPr>
             <a:picLocks noChangeAspect="1"/>
           </p:cNvPicPr>
@@ -5906,7 +5333,7 @@
         </p:blipFill>
         <p:spPr>
           <a:xfrm>
-            <a:off x="6408115" y="4259275"/>
+            <a:off x="830275" y="5173675"/>
             <a:ext cx="213970" cy="213970"/>
           </a:xfrm>
           <a:prstGeom prst="rect">
@@ -5916,13 +5343,13 @@
       </p:pic>
       <p:sp>
         <p:nvSpPr>
-          <p:cNvPr id="41" name="Text 34"/>
-          <p:cNvSpPr/>
-          <p:nvPr/>
-        </p:nvSpPr>
-        <p:spPr>
-          <a:xfrm>
-            <a:off x="6903720" y="4069080"/>
+          <p:cNvPr id="31" name="Text 26"/>
+          <p:cNvSpPr/>
+          <p:nvPr/>
+        </p:nvSpPr>
+        <p:spPr>
+          <a:xfrm>
+            <a:off x="1325880" y="4983480"/>
             <a:ext cx="4526280" cy="292608"/>
           </a:xfrm>
           <a:prstGeom prst="rect">
@@ -5935,7 +5362,7 @@
           <a:bodyPr wrap="square" lIns="0" tIns="0" rIns="0" bIns="0" rtlCol="0" anchor="ctr"/>
           <a:lstStyle/>
           <a:p>
-            <a:pPr indent="0" marL="0">
+            <a:pPr marL="0" indent="0">
               <a:buNone/>
             </a:pPr>
             <a:r>
@@ -5947,6 +5374,300 @@
                 <a:ea typeface="Trebuchet MS" pitchFamily="34" charset="-122"/>
                 <a:cs typeface="Trebuchet MS" pitchFamily="34" charset="-120"/>
               </a:rPr>
+              <a:t>Zusammenspiel</a:t>
+            </a:r>
+            <a:endParaRPr lang="en-US" sz="1350" dirty="0"/>
+          </a:p>
+        </p:txBody>
+      </p:sp>
+      <p:sp>
+        <p:nvSpPr>
+          <p:cNvPr id="32" name="Text 27"/>
+          <p:cNvSpPr/>
+          <p:nvPr/>
+        </p:nvSpPr>
+        <p:spPr>
+          <a:xfrm>
+            <a:off x="1325880" y="5276088"/>
+            <a:ext cx="4480560" cy="329184"/>
+          </a:xfrm>
+          <a:prstGeom prst="rect">
+            <a:avLst/>
+          </a:prstGeom>
+          <a:noFill/>
+          <a:ln/>
+        </p:spPr>
+        <p:txBody>
+          <a:bodyPr wrap="square" lIns="0" tIns="0" rIns="0" bIns="0" rtlCol="0" anchor="ctr"/>
+          <a:lstStyle/>
+          <a:p>
+            <a:pPr marL="0" indent="0">
+              <a:buNone/>
+            </a:pPr>
+            <a:r>
+              <a:rPr lang="en-US" sz="1050" dirty="0">
+                <a:solidFill>
+                  <a:srgbClr val="63676E"/>
+                </a:solidFill>
+                <a:latin typeface="Calibri" pitchFamily="34" charset="0"/>
+                <a:ea typeface="Calibri" pitchFamily="34" charset="-122"/>
+                <a:cs typeface="Calibri" pitchFamily="34" charset="-120"/>
+              </a:rPr>
+              <a:t>Komplette Abläufe Ende-zu-Ende</a:t>
+            </a:r>
+            <a:endParaRPr lang="en-US" sz="1050" dirty="0"/>
+          </a:p>
+        </p:txBody>
+      </p:sp>
+      <p:sp>
+        <p:nvSpPr>
+          <p:cNvPr id="33" name="Shape 28"/>
+          <p:cNvSpPr/>
+          <p:nvPr/>
+        </p:nvSpPr>
+        <p:spPr>
+          <a:xfrm>
+            <a:off x="6126480" y="3063240"/>
+            <a:ext cx="5440680" cy="768096"/>
+          </a:xfrm>
+          <a:prstGeom prst="rect">
+            <a:avLst/>
+          </a:prstGeom>
+          <a:solidFill>
+            <a:srgbClr val="F5F5F7"/>
+          </a:solidFill>
+          <a:ln w="12700">
+            <a:solidFill>
+              <a:srgbClr val="E7E5E8"/>
+            </a:solidFill>
+            <a:prstDash val="solid"/>
+          </a:ln>
+        </p:spPr>
+      </p:sp>
+      <p:sp>
+        <p:nvSpPr>
+          <p:cNvPr id="34" name="Shape 29"/>
+          <p:cNvSpPr/>
+          <p:nvPr/>
+        </p:nvSpPr>
+        <p:spPr>
+          <a:xfrm>
+            <a:off x="6309360" y="3246120"/>
+            <a:ext cx="411480" cy="411480"/>
+          </a:xfrm>
+          <a:prstGeom prst="ellipse">
+            <a:avLst/>
+          </a:prstGeom>
+          <a:solidFill>
+            <a:srgbClr val="3E4856"/>
+          </a:solidFill>
+          <a:ln/>
+        </p:spPr>
+      </p:sp>
+      <p:pic>
+        <p:nvPicPr>
+          <p:cNvPr id="35" name="Image 3" descr="preencoded.png"/>
+          <p:cNvPicPr>
+            <a:picLocks noChangeAspect="1"/>
+          </p:cNvPicPr>
+          <p:nvPr/>
+        </p:nvPicPr>
+        <p:blipFill>
+          <a:blip r:embed="rId6"/>
+          <a:stretch>
+            <a:fillRect/>
+          </a:stretch>
+        </p:blipFill>
+        <p:spPr>
+          <a:xfrm>
+            <a:off x="6408115" y="3344875"/>
+            <a:ext cx="213970" cy="213970"/>
+          </a:xfrm>
+          <a:prstGeom prst="rect">
+            <a:avLst/>
+          </a:prstGeom>
+        </p:spPr>
+      </p:pic>
+      <p:sp>
+        <p:nvSpPr>
+          <p:cNvPr id="36" name="Text 30"/>
+          <p:cNvSpPr/>
+          <p:nvPr/>
+        </p:nvSpPr>
+        <p:spPr>
+          <a:xfrm>
+            <a:off x="6903720" y="3154680"/>
+            <a:ext cx="4526280" cy="292608"/>
+          </a:xfrm>
+          <a:prstGeom prst="rect">
+            <a:avLst/>
+          </a:prstGeom>
+          <a:noFill/>
+          <a:ln/>
+        </p:spPr>
+        <p:txBody>
+          <a:bodyPr wrap="square" lIns="0" tIns="0" rIns="0" bIns="0" rtlCol="0" anchor="ctr"/>
+          <a:lstStyle/>
+          <a:p>
+            <a:pPr marL="0" indent="0">
+              <a:buNone/>
+            </a:pPr>
+            <a:r>
+              <a:rPr lang="en-US" sz="1350" b="1" dirty="0">
+                <a:solidFill>
+                  <a:srgbClr val="2A2D34"/>
+                </a:solidFill>
+                <a:latin typeface="Trebuchet MS" pitchFamily="34" charset="0"/>
+                <a:ea typeface="Trebuchet MS" pitchFamily="34" charset="-122"/>
+                <a:cs typeface="Trebuchet MS" pitchFamily="34" charset="-120"/>
+              </a:rPr>
+              <a:t>Schnelltests</a:t>
+            </a:r>
+            <a:endParaRPr lang="en-US" sz="1350" dirty="0"/>
+          </a:p>
+        </p:txBody>
+      </p:sp>
+      <p:sp>
+        <p:nvSpPr>
+          <p:cNvPr id="37" name="Text 31"/>
+          <p:cNvSpPr/>
+          <p:nvPr/>
+        </p:nvSpPr>
+        <p:spPr>
+          <a:xfrm>
+            <a:off x="6903720" y="3447288"/>
+            <a:ext cx="4480560" cy="329184"/>
+          </a:xfrm>
+          <a:prstGeom prst="rect">
+            <a:avLst/>
+          </a:prstGeom>
+          <a:noFill/>
+          <a:ln/>
+        </p:spPr>
+        <p:txBody>
+          <a:bodyPr wrap="square" lIns="0" tIns="0" rIns="0" bIns="0" rtlCol="0" anchor="ctr"/>
+          <a:lstStyle/>
+          <a:p>
+            <a:pPr marL="0" indent="0">
+              <a:buNone/>
+            </a:pPr>
+            <a:r>
+              <a:rPr lang="en-US" sz="1050" dirty="0">
+                <a:solidFill>
+                  <a:srgbClr val="63676E"/>
+                </a:solidFill>
+                <a:latin typeface="Calibri" pitchFamily="34" charset="0"/>
+                <a:ea typeface="Calibri" pitchFamily="34" charset="-122"/>
+                <a:cs typeface="Calibri" pitchFamily="34" charset="-120"/>
+              </a:rPr>
+              <a:t>16 Kernabläufe nach jedem Update</a:t>
+            </a:r>
+            <a:endParaRPr lang="en-US" sz="1050" dirty="0"/>
+          </a:p>
+        </p:txBody>
+      </p:sp>
+      <p:sp>
+        <p:nvSpPr>
+          <p:cNvPr id="38" name="Shape 32"/>
+          <p:cNvSpPr/>
+          <p:nvPr/>
+        </p:nvSpPr>
+        <p:spPr>
+          <a:xfrm>
+            <a:off x="6126480" y="3977640"/>
+            <a:ext cx="5440680" cy="768096"/>
+          </a:xfrm>
+          <a:prstGeom prst="rect">
+            <a:avLst/>
+          </a:prstGeom>
+          <a:solidFill>
+            <a:srgbClr val="F5F5F7"/>
+          </a:solidFill>
+          <a:ln w="12700">
+            <a:solidFill>
+              <a:srgbClr val="E7E5E8"/>
+            </a:solidFill>
+            <a:prstDash val="solid"/>
+          </a:ln>
+        </p:spPr>
+      </p:sp>
+      <p:sp>
+        <p:nvSpPr>
+          <p:cNvPr id="39" name="Shape 33"/>
+          <p:cNvSpPr/>
+          <p:nvPr/>
+        </p:nvSpPr>
+        <p:spPr>
+          <a:xfrm>
+            <a:off x="6309360" y="4160520"/>
+            <a:ext cx="411480" cy="411480"/>
+          </a:xfrm>
+          <a:prstGeom prst="ellipse">
+            <a:avLst/>
+          </a:prstGeom>
+          <a:solidFill>
+            <a:srgbClr val="C5394A"/>
+          </a:solidFill>
+          <a:ln/>
+        </p:spPr>
+      </p:sp>
+      <p:pic>
+        <p:nvPicPr>
+          <p:cNvPr id="40" name="Image 4" descr="preencoded.png"/>
+          <p:cNvPicPr>
+            <a:picLocks noChangeAspect="1"/>
+          </p:cNvPicPr>
+          <p:nvPr/>
+        </p:nvPicPr>
+        <p:blipFill>
+          <a:blip r:embed="rId7"/>
+          <a:stretch>
+            <a:fillRect/>
+          </a:stretch>
+        </p:blipFill>
+        <p:spPr>
+          <a:xfrm>
+            <a:off x="6408115" y="4259275"/>
+            <a:ext cx="213970" cy="213970"/>
+          </a:xfrm>
+          <a:prstGeom prst="rect">
+            <a:avLst/>
+          </a:prstGeom>
+        </p:spPr>
+      </p:pic>
+      <p:sp>
+        <p:nvSpPr>
+          <p:cNvPr id="41" name="Text 34"/>
+          <p:cNvSpPr/>
+          <p:nvPr/>
+        </p:nvSpPr>
+        <p:spPr>
+          <a:xfrm>
+            <a:off x="6903720" y="4069080"/>
+            <a:ext cx="4526280" cy="292608"/>
+          </a:xfrm>
+          <a:prstGeom prst="rect">
+            <a:avLst/>
+          </a:prstGeom>
+          <a:noFill/>
+          <a:ln/>
+        </p:spPr>
+        <p:txBody>
+          <a:bodyPr wrap="square" lIns="0" tIns="0" rIns="0" bIns="0" rtlCol="0" anchor="ctr"/>
+          <a:lstStyle/>
+          <a:p>
+            <a:pPr marL="0" indent="0">
+              <a:buNone/>
+            </a:pPr>
+            <a:r>
+              <a:rPr lang="en-US" sz="1350" b="1" dirty="0">
+                <a:solidFill>
+                  <a:srgbClr val="2A2D34"/>
+                </a:solidFill>
+                <a:latin typeface="Trebuchet MS" pitchFamily="34" charset="0"/>
+                <a:ea typeface="Trebuchet MS" pitchFamily="34" charset="-122"/>
+                <a:cs typeface="Trebuchet MS" pitchFamily="34" charset="-120"/>
+              </a:rPr>
               <a:t>Sicherheit</a:t>
             </a:r>
             <a:endParaRPr lang="en-US" sz="1350" dirty="0"/>
@@ -5974,7 +5695,7 @@
           <a:bodyPr wrap="square" lIns="0" tIns="0" rIns="0" bIns="0" rtlCol="0" anchor="ctr"/>
           <a:lstStyle/>
           <a:p>
-            <a:pPr indent="0" marL="0">
+            <a:pPr marL="0" indent="0">
               <a:buNone/>
             </a:pPr>
             <a:r>
@@ -6008,6 +5729,7 @@
         <a:solidFill>
           <a:srgbClr val="FFFFFF"/>
         </a:solidFill>
+        <a:effectLst/>
       </p:bgPr>
     </p:bg>
     <p:spTree>
@@ -6085,7 +5807,7 @@
           <a:bodyPr wrap="square" lIns="0" tIns="0" rIns="0" bIns="0" rtlCol="0" anchor="ctr"/>
           <a:lstStyle/>
           <a:p>
-            <a:pPr algn="l" indent="0" marL="0">
+            <a:pPr marL="0" indent="0" algn="l">
               <a:buNone/>
             </a:pPr>
             <a:r>
@@ -6124,7 +5846,7 @@
           <a:bodyPr wrap="square" lIns="0" tIns="0" rIns="0" bIns="0" rtlCol="0" anchor="ctr"/>
           <a:lstStyle/>
           <a:p>
-            <a:pPr algn="r" indent="0" marL="0">
+            <a:pPr marL="0" indent="0" algn="r">
               <a:buNone/>
             </a:pPr>
             <a:r>
@@ -6163,11 +5885,11 @@
           <a:bodyPr wrap="square" lIns="0" tIns="0" rIns="0" bIns="0" rtlCol="0" anchor="ctr"/>
           <a:lstStyle/>
           <a:p>
-            <a:pPr algn="r" indent="0" marL="0">
-              <a:buNone/>
-            </a:pPr>
-            <a:r>
-              <a:rPr lang="en-US" sz="900" b="1" spc="100" kern="0" dirty="0">
+            <a:pPr marL="0" indent="0" algn="r">
+              <a:buNone/>
+            </a:pPr>
+            <a:r>
+              <a:rPr lang="en-US" sz="900" b="1" kern="0" spc="100" dirty="0">
                 <a:solidFill>
                   <a:srgbClr val="C5394A"/>
                 </a:solidFill>
@@ -6202,11 +5924,11 @@
           <a:bodyPr wrap="square" lIns="0" tIns="0" rIns="0" bIns="0" rtlCol="0" anchor="ctr"/>
           <a:lstStyle/>
           <a:p>
-            <a:pPr indent="0" marL="0">
-              <a:buNone/>
-            </a:pPr>
-            <a:r>
-              <a:rPr lang="en-US" sz="1200" b="1" spc="200" kern="0" dirty="0">
+            <a:pPr marL="0" indent="0">
+              <a:buNone/>
+            </a:pPr>
+            <a:r>
+              <a:rPr lang="en-US" sz="1200" b="1" kern="0" spc="200" dirty="0">
                 <a:solidFill>
                   <a:srgbClr val="C5394A"/>
                 </a:solidFill>
@@ -6241,7 +5963,7 @@
           <a:bodyPr wrap="square" lIns="0" tIns="0" rIns="0" bIns="0" rtlCol="0" anchor="ctr"/>
           <a:lstStyle/>
           <a:p>
-            <a:pPr indent="0" marL="0">
+            <a:pPr marL="0" indent="0">
               <a:buNone/>
             </a:pPr>
             <a:r>
@@ -6278,7 +6000,7 @@
           </a:solidFill>
           <a:ln/>
           <a:effectLst>
-            <a:outerShdw sx="100000" sy="100000" kx="0" ky="0" algn="bl" rotWithShape="0" blurRad="101600" dist="38100" dir="5400000">
+            <a:outerShdw blurRad="101600" dist="38100" dir="5400000" algn="bl" rotWithShape="0">
               <a:srgbClr val="000000">
                 <a:alpha val="8000"/>
               </a:srgbClr>
@@ -6307,7 +6029,7 @@
           <a:bodyPr wrap="square" lIns="0" tIns="0" rIns="0" bIns="0" rtlCol="0" anchor="ctr"/>
           <a:lstStyle/>
           <a:p>
-            <a:pPr algn="ctr" indent="0" marL="0">
+            <a:pPr marL="0" indent="0" algn="ctr">
               <a:buNone/>
             </a:pPr>
             <a:r>
@@ -6346,7 +6068,7 @@
           <a:bodyPr wrap="square" lIns="0" tIns="0" rIns="0" bIns="0" rtlCol="0" anchor="ctr"/>
           <a:lstStyle/>
           <a:p>
-            <a:pPr algn="ctr" indent="0" marL="0">
+            <a:pPr marL="0" indent="0" algn="ctr">
               <a:buNone/>
             </a:pPr>
             <a:r>
@@ -6385,7 +6107,7 @@
           <a:bodyPr wrap="square" lIns="0" tIns="0" rIns="0" bIns="0" rtlCol="0" anchor="ctr"/>
           <a:lstStyle/>
           <a:p>
-            <a:pPr algn="ctr" indent="0" marL="0">
+            <a:pPr marL="0" indent="0" algn="ctr">
               <a:buNone/>
             </a:pPr>
             <a:r>
@@ -6427,7 +6149,7 @@
             <a:prstDash val="solid"/>
           </a:ln>
           <a:effectLst>
-            <a:outerShdw sx="100000" sy="100000" kx="0" ky="0" algn="bl" rotWithShape="0" blurRad="101600" dist="38100" dir="5400000">
+            <a:outerShdw blurRad="101600" dist="38100" dir="5400000" algn="bl" rotWithShape="0">
               <a:srgbClr val="000000">
                 <a:alpha val="8000"/>
               </a:srgbClr>
@@ -6457,423 +6179,7 @@
       </p:sp>
       <p:pic>
         <p:nvPicPr>
-          <p:cNvPr id="15" name="Image 0" descr="preencoded.png">    </p:cNvPr>
-          <p:cNvPicPr>
-            <a:picLocks noChangeAspect="1"/>
-          </p:cNvPicPr>
-          <p:nvPr/>
-        </p:nvPicPr>
-        <p:blipFill>
-          <a:blip r:embed="rId1"/>
-          <a:stretch>
-            <a:fillRect/>
-          </a:stretch>
-        </p:blipFill>
-        <p:spPr>
-          <a:xfrm>
-            <a:off x="6384341" y="1995221"/>
-            <a:ext cx="261518" cy="261518"/>
-          </a:xfrm>
-          <a:prstGeom prst="rect">
-            <a:avLst/>
-          </a:prstGeom>
-        </p:spPr>
-      </p:pic>
-      <p:sp>
-        <p:nvSpPr>
-          <p:cNvPr id="16" name="Text 13"/>
-          <p:cNvSpPr/>
-          <p:nvPr/>
-        </p:nvSpPr>
-        <p:spPr>
-          <a:xfrm>
-            <a:off x="6903720" y="1892808"/>
-            <a:ext cx="4572000" cy="457200"/>
-          </a:xfrm>
-          <a:prstGeom prst="rect">
-            <a:avLst/>
-          </a:prstGeom>
-          <a:noFill/>
-          <a:ln/>
-        </p:spPr>
-        <p:txBody>
-          <a:bodyPr wrap="square" lIns="0" tIns="0" rIns="0" bIns="0" rtlCol="0" anchor="ctr"/>
-          <a:lstStyle/>
-          <a:p>
-            <a:pPr indent="0" marL="0">
-              <a:buNone/>
-            </a:pPr>
-            <a:r>
-              <a:rPr lang="en-US" sz="1500" b="1" dirty="0">
-                <a:solidFill>
-                  <a:srgbClr val="2A2D34"/>
-                </a:solidFill>
-                <a:latin typeface="Trebuchet MS" pitchFamily="34" charset="0"/>
-                <a:ea typeface="Trebuchet MS" pitchFamily="34" charset="-122"/>
-                <a:cs typeface="Trebuchet MS" pitchFamily="34" charset="-120"/>
-              </a:rPr>
-              <a:t>Code-Komplexität (PMD)</a:t>
-            </a:r>
-            <a:endParaRPr lang="en-US" sz="1500" dirty="0"/>
-          </a:p>
-        </p:txBody>
-      </p:sp>
-      <p:sp>
-        <p:nvSpPr>
-          <p:cNvPr id="17" name="Text 14"/>
-          <p:cNvSpPr/>
-          <p:nvPr/>
-        </p:nvSpPr>
-        <p:spPr>
-          <a:xfrm>
-            <a:off x="6309360" y="2514600"/>
-            <a:ext cx="5029200" cy="1234440"/>
-          </a:xfrm>
-          <a:prstGeom prst="rect">
-            <a:avLst/>
-          </a:prstGeom>
-          <a:noFill/>
-          <a:ln/>
-        </p:spPr>
-        <p:txBody>
-          <a:bodyPr wrap="square" rtlCol="0" anchor="ctr"/>
-          <a:lstStyle/>
-          <a:p>
-            <a:pPr marL="177800" indent="-177800">
-              <a:spcAft>
-                <a:spcPts val="800"/>
-              </a:spcAft>
-              <a:buSzPct val="100000"/>
-              <a:buChar char="•"/>
-            </a:pPr>
-            <a:r>
-              <a:rPr lang="en-US" sz="1200" dirty="0">
-                <a:solidFill>
-                  <a:srgbClr val="63676E"/>
-                </a:solidFill>
-                <a:latin typeface="Calibri" pitchFamily="34" charset="0"/>
-                <a:ea typeface="Calibri" pitchFamily="34" charset="-122"/>
-                <a:cs typeface="Calibri" pitchFamily="34" charset="-120"/>
-              </a:rPr>
-              <a:t>Automatische Messung im Build bei jedem Push</a:t>
-            </a:r>
-            <a:endParaRPr lang="en-US" sz="1200" dirty="0"/>
-          </a:p>
-          <a:p>
-            <a:pPr marL="177800" indent="-177800">
-              <a:spcAft>
-                <a:spcPts val="800"/>
-              </a:spcAft>
-              <a:buSzPct val="100000"/>
-              <a:buChar char="•"/>
-            </a:pPr>
-            <a:r>
-              <a:rPr lang="en-US" sz="1200" dirty="0">
-                <a:solidFill>
-                  <a:srgbClr val="63676E"/>
-                </a:solidFill>
-                <a:latin typeface="Calibri" pitchFamily="34" charset="0"/>
-                <a:ea typeface="Calibri" pitchFamily="34" charset="-122"/>
-                <a:cs typeface="Calibri" pitchFamily="34" charset="-120"/>
-              </a:rPr>
-              <a:t>6 Schwachstellen erkannt &amp; verbessert</a:t>
-            </a:r>
-            <a:endParaRPr lang="en-US" sz="1200" dirty="0"/>
-          </a:p>
-          <a:p>
-            <a:pPr marL="177800" indent="-177800">
-              <a:buSzPct val="100000"/>
-              <a:buChar char="•"/>
-            </a:pPr>
-            <a:r>
-              <a:rPr lang="en-US" sz="1200" dirty="0">
-                <a:solidFill>
-                  <a:srgbClr val="63676E"/>
-                </a:solidFill>
-                <a:latin typeface="Calibri" pitchFamily="34" charset="0"/>
-                <a:ea typeface="Calibri" pitchFamily="34" charset="-122"/>
-                <a:cs typeface="Calibri" pitchFamily="34" charset="-120"/>
-              </a:rPr>
-              <a:t>Komplexität nach Refactoring deutlich gesenkt</a:t>
-            </a:r>
-            <a:endParaRPr lang="en-US" sz="1200" dirty="0"/>
-          </a:p>
-        </p:txBody>
-      </p:sp>
-      <p:sp>
-        <p:nvSpPr>
-          <p:cNvPr id="18" name="Text 15"/>
-          <p:cNvSpPr/>
-          <p:nvPr/>
-        </p:nvSpPr>
-        <p:spPr>
-          <a:xfrm>
-            <a:off x="548640" y="4069080"/>
-            <a:ext cx="8229600" cy="320040"/>
-          </a:xfrm>
-          <a:prstGeom prst="rect">
-            <a:avLst/>
-          </a:prstGeom>
-          <a:noFill/>
-          <a:ln/>
-        </p:spPr>
-        <p:txBody>
-          <a:bodyPr wrap="square" rtlCol="0" anchor="ctr"/>
-          <a:lstStyle/>
-          <a:p>
-            <a:pPr indent="0" marL="0">
-              <a:buNone/>
-            </a:pPr>
-            <a:r>
-              <a:rPr lang="en-US" sz="1400" b="1" dirty="0">
-                <a:solidFill>
-                  <a:srgbClr val="3E4856"/>
-                </a:solidFill>
-                <a:latin typeface="Trebuchet MS" pitchFamily="34" charset="0"/>
-                <a:ea typeface="Trebuchet MS" pitchFamily="34" charset="-122"/>
-                <a:cs typeface="Trebuchet MS" pitchFamily="34" charset="-120"/>
-              </a:rPr>
-              <a:t>Betrachtete Metrik-Familien</a:t>
-            </a:r>
-            <a:endParaRPr lang="en-US" sz="1400" dirty="0"/>
-          </a:p>
-        </p:txBody>
-      </p:sp>
-      <p:sp>
-        <p:nvSpPr>
-          <p:cNvPr id="19" name="Shape 16"/>
-          <p:cNvSpPr/>
-          <p:nvPr/>
-        </p:nvSpPr>
-        <p:spPr>
-          <a:xfrm>
-            <a:off x="548640" y="4480560"/>
-            <a:ext cx="2651760" cy="960120"/>
-          </a:xfrm>
-          <a:prstGeom prst="rect">
-            <a:avLst/>
-          </a:prstGeom>
-          <a:solidFill>
-            <a:srgbClr val="FFFFFF"/>
-          </a:solidFill>
-          <a:ln w="19050">
-            <a:solidFill>
-              <a:srgbClr val="E7E5E8"/>
-            </a:solidFill>
-            <a:prstDash val="solid"/>
-          </a:ln>
-        </p:spPr>
-      </p:sp>
-      <p:sp>
-        <p:nvSpPr>
-          <p:cNvPr id="20" name="Shape 17"/>
-          <p:cNvSpPr/>
-          <p:nvPr/>
-        </p:nvSpPr>
-        <p:spPr>
-          <a:xfrm>
-            <a:off x="548640" y="4480560"/>
-            <a:ext cx="2651760" cy="64008"/>
-          </a:xfrm>
-          <a:prstGeom prst="rect">
-            <a:avLst/>
-          </a:prstGeom>
-          <a:solidFill>
-            <a:srgbClr val="C5394A"/>
-          </a:solidFill>
-          <a:ln/>
-        </p:spPr>
-      </p:sp>
-      <p:sp>
-        <p:nvSpPr>
-          <p:cNvPr id="21" name="Shape 18"/>
-          <p:cNvSpPr/>
-          <p:nvPr/>
-        </p:nvSpPr>
-        <p:spPr>
-          <a:xfrm>
-            <a:off x="731520" y="4736592"/>
-            <a:ext cx="457200" cy="457200"/>
-          </a:xfrm>
-          <a:prstGeom prst="ellipse">
-            <a:avLst/>
-          </a:prstGeom>
-          <a:solidFill>
-            <a:srgbClr val="F8EAEC"/>
-          </a:solidFill>
-          <a:ln/>
-        </p:spPr>
-      </p:sp>
-      <p:pic>
-        <p:nvPicPr>
-          <p:cNvPr id="22" name="Image 1" descr="preencoded.png">    </p:cNvPr>
-          <p:cNvPicPr>
-            <a:picLocks noChangeAspect="1"/>
-          </p:cNvPicPr>
-          <p:nvPr/>
-        </p:nvPicPr>
-        <p:blipFill>
-          <a:blip r:embed="rId2"/>
-          <a:stretch>
-            <a:fillRect/>
-          </a:stretch>
-        </p:blipFill>
-        <p:spPr>
-          <a:xfrm>
-            <a:off x="841248" y="4846320"/>
-            <a:ext cx="237744" cy="237744"/>
-          </a:xfrm>
-          <a:prstGeom prst="rect">
-            <a:avLst/>
-          </a:prstGeom>
-        </p:spPr>
-      </p:pic>
-      <p:sp>
-        <p:nvSpPr>
-          <p:cNvPr id="23" name="Text 19"/>
-          <p:cNvSpPr/>
-          <p:nvPr/>
-        </p:nvSpPr>
-        <p:spPr>
-          <a:xfrm>
-            <a:off x="1325880" y="4617720"/>
-            <a:ext cx="1783080" cy="320040"/>
-          </a:xfrm>
-          <a:prstGeom prst="rect">
-            <a:avLst/>
-          </a:prstGeom>
-          <a:noFill/>
-          <a:ln/>
-        </p:spPr>
-        <p:txBody>
-          <a:bodyPr wrap="square" lIns="0" tIns="0" rIns="0" bIns="0" rtlCol="0" anchor="ctr"/>
-          <a:lstStyle/>
-          <a:p>
-            <a:pPr indent="0" marL="0">
-              <a:buNone/>
-            </a:pPr>
-            <a:r>
-              <a:rPr lang="en-US" sz="1350" b="1" dirty="0">
-                <a:solidFill>
-                  <a:srgbClr val="2A2D34"/>
-                </a:solidFill>
-                <a:latin typeface="Trebuchet MS" pitchFamily="34" charset="0"/>
-                <a:ea typeface="Trebuchet MS" pitchFamily="34" charset="-122"/>
-                <a:cs typeface="Trebuchet MS" pitchFamily="34" charset="-120"/>
-              </a:rPr>
-              <a:t>Größe</a:t>
-            </a:r>
-            <a:endParaRPr lang="en-US" sz="1350" dirty="0"/>
-          </a:p>
-        </p:txBody>
-      </p:sp>
-      <p:sp>
-        <p:nvSpPr>
-          <p:cNvPr id="24" name="Text 20"/>
-          <p:cNvSpPr/>
-          <p:nvPr/>
-        </p:nvSpPr>
-        <p:spPr>
-          <a:xfrm>
-            <a:off x="1325880" y="4937760"/>
-            <a:ext cx="1783080" cy="411480"/>
-          </a:xfrm>
-          <a:prstGeom prst="rect">
-            <a:avLst/>
-          </a:prstGeom>
-          <a:noFill/>
-          <a:ln/>
-        </p:spPr>
-        <p:txBody>
-          <a:bodyPr wrap="square" lIns="0" tIns="0" rIns="0" bIns="0" rtlCol="0" anchor="ctr"/>
-          <a:lstStyle/>
-          <a:p>
-            <a:pPr indent="0" marL="0">
-              <a:buNone/>
-            </a:pPr>
-            <a:r>
-              <a:rPr lang="en-US" sz="1000" dirty="0">
-                <a:solidFill>
-                  <a:srgbClr val="63676E"/>
-                </a:solidFill>
-                <a:latin typeface="Calibri" pitchFamily="34" charset="0"/>
-                <a:ea typeface="Calibri" pitchFamily="34" charset="-122"/>
-                <a:cs typeface="Calibri" pitchFamily="34" charset="-120"/>
-              </a:rPr>
-              <a:t>Function Points</a:t>
-            </a:r>
-            <a:endParaRPr lang="en-US" sz="1000" dirty="0"/>
-          </a:p>
-        </p:txBody>
-      </p:sp>
-      <p:sp>
-        <p:nvSpPr>
-          <p:cNvPr id="25" name="Shape 21"/>
-          <p:cNvSpPr/>
-          <p:nvPr/>
-        </p:nvSpPr>
-        <p:spPr>
-          <a:xfrm>
-            <a:off x="3346704" y="4480560"/>
-            <a:ext cx="2651760" cy="960120"/>
-          </a:xfrm>
-          <a:prstGeom prst="rect">
-            <a:avLst/>
-          </a:prstGeom>
-          <a:solidFill>
-            <a:srgbClr val="FFFFFF"/>
-          </a:solidFill>
-          <a:ln w="19050">
-            <a:solidFill>
-              <a:srgbClr val="E7E5E8"/>
-            </a:solidFill>
-            <a:prstDash val="solid"/>
-          </a:ln>
-        </p:spPr>
-      </p:sp>
-      <p:sp>
-        <p:nvSpPr>
-          <p:cNvPr id="26" name="Shape 22"/>
-          <p:cNvSpPr/>
-          <p:nvPr/>
-        </p:nvSpPr>
-        <p:spPr>
-          <a:xfrm>
-            <a:off x="3346704" y="4480560"/>
-            <a:ext cx="2651760" cy="64008"/>
-          </a:xfrm>
-          <a:prstGeom prst="rect">
-            <a:avLst/>
-          </a:prstGeom>
-          <a:solidFill>
-            <a:srgbClr val="3E4856"/>
-          </a:solidFill>
-          <a:ln/>
-        </p:spPr>
-      </p:sp>
-      <p:sp>
-        <p:nvSpPr>
-          <p:cNvPr id="27" name="Shape 23"/>
-          <p:cNvSpPr/>
-          <p:nvPr/>
-        </p:nvSpPr>
-        <p:spPr>
-          <a:xfrm>
-            <a:off x="3529584" y="4736592"/>
-            <a:ext cx="457200" cy="457200"/>
-          </a:xfrm>
-          <a:prstGeom prst="ellipse">
-            <a:avLst/>
-          </a:prstGeom>
-          <a:solidFill>
-            <a:srgbClr val="E8EAEE"/>
-          </a:solidFill>
-          <a:ln/>
-        </p:spPr>
-      </p:sp>
-      <p:pic>
-        <p:nvPicPr>
-          <p:cNvPr id="28" name="Image 2" descr="preencoded.png">    </p:cNvPr>
+          <p:cNvPr id="15" name="Image 0" descr="preencoded.png"/>
           <p:cNvPicPr>
             <a:picLocks noChangeAspect="1"/>
           </p:cNvPicPr>
@@ -6887,8 +6193,8 @@
         </p:blipFill>
         <p:spPr>
           <a:xfrm>
-            <a:off x="3639312" y="4846320"/>
-            <a:ext cx="237744" cy="237744"/>
+            <a:off x="6384341" y="1995221"/>
+            <a:ext cx="261518" cy="261518"/>
           </a:xfrm>
           <a:prstGeom prst="rect">
             <a:avLst/>
@@ -6897,14 +6203,14 @@
       </p:pic>
       <p:sp>
         <p:nvSpPr>
-          <p:cNvPr id="29" name="Text 24"/>
-          <p:cNvSpPr/>
-          <p:nvPr/>
-        </p:nvSpPr>
-        <p:spPr>
-          <a:xfrm>
-            <a:off x="4123944" y="4617720"/>
-            <a:ext cx="1783080" cy="320040"/>
+          <p:cNvPr id="16" name="Text 13"/>
+          <p:cNvSpPr/>
+          <p:nvPr/>
+        </p:nvSpPr>
+        <p:spPr>
+          <a:xfrm>
+            <a:off x="6903720" y="1892808"/>
+            <a:ext cx="4572000" cy="457200"/>
           </a:xfrm>
           <a:prstGeom prst="rect">
             <a:avLst/>
@@ -6916,11 +6222,11 @@
           <a:bodyPr wrap="square" lIns="0" tIns="0" rIns="0" bIns="0" rtlCol="0" anchor="ctr"/>
           <a:lstStyle/>
           <a:p>
-            <a:pPr indent="0" marL="0">
-              <a:buNone/>
-            </a:pPr>
-            <a:r>
-              <a:rPr lang="en-US" sz="1350" b="1" dirty="0">
+            <a:pPr marL="0" indent="0">
+              <a:buNone/>
+            </a:pPr>
+            <a:r>
+              <a:rPr lang="en-US" sz="1500" b="1" dirty="0">
                 <a:solidFill>
                   <a:srgbClr val="2A2D34"/>
                 </a:solidFill>
@@ -6928,38 +6234,42 @@
                 <a:ea typeface="Trebuchet MS" pitchFamily="34" charset="-122"/>
                 <a:cs typeface="Trebuchet MS" pitchFamily="34" charset="-120"/>
               </a:rPr>
-              <a:t>Qualität</a:t>
-            </a:r>
-            <a:endParaRPr lang="en-US" sz="1350" dirty="0"/>
-          </a:p>
-        </p:txBody>
-      </p:sp>
-      <p:sp>
-        <p:nvSpPr>
-          <p:cNvPr id="30" name="Text 25"/>
-          <p:cNvSpPr/>
-          <p:nvPr/>
-        </p:nvSpPr>
-        <p:spPr>
-          <a:xfrm>
-            <a:off x="4123944" y="4937760"/>
-            <a:ext cx="1783080" cy="411480"/>
-          </a:xfrm>
-          <a:prstGeom prst="rect">
-            <a:avLst/>
-          </a:prstGeom>
-          <a:noFill/>
-          <a:ln/>
-        </p:spPr>
-        <p:txBody>
-          <a:bodyPr wrap="square" lIns="0" tIns="0" rIns="0" bIns="0" rtlCol="0" anchor="ctr"/>
-          <a:lstStyle/>
-          <a:p>
-            <a:pPr indent="0" marL="0">
-              <a:buNone/>
-            </a:pPr>
-            <a:r>
-              <a:rPr lang="en-US" sz="1000" dirty="0">
+              <a:t>Code-Komplexität (PMD)</a:t>
+            </a:r>
+            <a:endParaRPr lang="en-US" sz="1500" dirty="0"/>
+          </a:p>
+        </p:txBody>
+      </p:sp>
+      <p:sp>
+        <p:nvSpPr>
+          <p:cNvPr id="17" name="Text 14"/>
+          <p:cNvSpPr/>
+          <p:nvPr/>
+        </p:nvSpPr>
+        <p:spPr>
+          <a:xfrm>
+            <a:off x="6309360" y="2514600"/>
+            <a:ext cx="5029200" cy="1234440"/>
+          </a:xfrm>
+          <a:prstGeom prst="rect">
+            <a:avLst/>
+          </a:prstGeom>
+          <a:noFill/>
+          <a:ln/>
+        </p:spPr>
+        <p:txBody>
+          <a:bodyPr wrap="square" rtlCol="0" anchor="ctr"/>
+          <a:lstStyle/>
+          <a:p>
+            <a:pPr marL="177800" indent="-177800">
+              <a:spcAft>
+                <a:spcPts val="800"/>
+              </a:spcAft>
+              <a:buSzPct val="100000"/>
+              <a:buChar char="•"/>
+            </a:pPr>
+            <a:r>
+              <a:rPr lang="en-US" sz="1200" dirty="0">
                 <a:solidFill>
                   <a:srgbClr val="63676E"/>
                 </a:solidFill>
@@ -6967,21 +6277,99 @@
                 <a:ea typeface="Calibri" pitchFamily="34" charset="-122"/>
                 <a:cs typeface="Calibri" pitchFamily="34" charset="-120"/>
               </a:rPr>
-              <a:t>Eindeutig &amp; vollständig</a:t>
-            </a:r>
-            <a:endParaRPr lang="en-US" sz="1000" dirty="0"/>
-          </a:p>
-        </p:txBody>
-      </p:sp>
-      <p:sp>
-        <p:nvSpPr>
-          <p:cNvPr id="31" name="Shape 26"/>
-          <p:cNvSpPr/>
-          <p:nvPr/>
-        </p:nvSpPr>
-        <p:spPr>
-          <a:xfrm>
-            <a:off x="6144768" y="4480560"/>
+              <a:t>Automatische Messung im Build bei jedem Push</a:t>
+            </a:r>
+            <a:endParaRPr lang="en-US" sz="1200" dirty="0"/>
+          </a:p>
+          <a:p>
+            <a:pPr marL="177800" indent="-177800">
+              <a:spcAft>
+                <a:spcPts val="800"/>
+              </a:spcAft>
+              <a:buSzPct val="100000"/>
+              <a:buChar char="•"/>
+            </a:pPr>
+            <a:r>
+              <a:rPr lang="en-US" sz="1200" dirty="0">
+                <a:solidFill>
+                  <a:srgbClr val="63676E"/>
+                </a:solidFill>
+                <a:latin typeface="Calibri" pitchFamily="34" charset="0"/>
+                <a:ea typeface="Calibri" pitchFamily="34" charset="-122"/>
+                <a:cs typeface="Calibri" pitchFamily="34" charset="-120"/>
+              </a:rPr>
+              <a:t>6 Schwachstellen erkannt &amp; verbessert</a:t>
+            </a:r>
+            <a:endParaRPr lang="en-US" sz="1200" dirty="0"/>
+          </a:p>
+          <a:p>
+            <a:pPr marL="177800" indent="-177800">
+              <a:buSzPct val="100000"/>
+              <a:buChar char="•"/>
+            </a:pPr>
+            <a:r>
+              <a:rPr lang="en-US" sz="1200" dirty="0">
+                <a:solidFill>
+                  <a:srgbClr val="63676E"/>
+                </a:solidFill>
+                <a:latin typeface="Calibri" pitchFamily="34" charset="0"/>
+                <a:ea typeface="Calibri" pitchFamily="34" charset="-122"/>
+                <a:cs typeface="Calibri" pitchFamily="34" charset="-120"/>
+              </a:rPr>
+              <a:t>Komplexität nach Refactoring deutlich gesenkt</a:t>
+            </a:r>
+            <a:endParaRPr lang="en-US" sz="1200" dirty="0"/>
+          </a:p>
+        </p:txBody>
+      </p:sp>
+      <p:sp>
+        <p:nvSpPr>
+          <p:cNvPr id="18" name="Text 15"/>
+          <p:cNvSpPr/>
+          <p:nvPr/>
+        </p:nvSpPr>
+        <p:spPr>
+          <a:xfrm>
+            <a:off x="548640" y="4069080"/>
+            <a:ext cx="8229600" cy="320040"/>
+          </a:xfrm>
+          <a:prstGeom prst="rect">
+            <a:avLst/>
+          </a:prstGeom>
+          <a:noFill/>
+          <a:ln/>
+        </p:spPr>
+        <p:txBody>
+          <a:bodyPr wrap="square" rtlCol="0" anchor="ctr"/>
+          <a:lstStyle/>
+          <a:p>
+            <a:pPr marL="0" indent="0">
+              <a:buNone/>
+            </a:pPr>
+            <a:r>
+              <a:rPr lang="en-US" sz="1400" b="1" dirty="0">
+                <a:solidFill>
+                  <a:srgbClr val="3E4856"/>
+                </a:solidFill>
+                <a:latin typeface="Trebuchet MS" pitchFamily="34" charset="0"/>
+                <a:ea typeface="Trebuchet MS" pitchFamily="34" charset="-122"/>
+                <a:cs typeface="Trebuchet MS" pitchFamily="34" charset="-120"/>
+              </a:rPr>
+              <a:t>Betrachtete Metrik-Familien</a:t>
+            </a:r>
+            <a:endParaRPr lang="en-US" sz="1400" dirty="0"/>
+          </a:p>
+        </p:txBody>
+      </p:sp>
+      <p:sp>
+        <p:nvSpPr>
+          <p:cNvPr id="19" name="Shape 16"/>
+          <p:cNvSpPr/>
+          <p:nvPr/>
+        </p:nvSpPr>
+        <p:spPr>
+          <a:xfrm>
+            <a:off x="548640" y="4480560"/>
             <a:ext cx="2651760" cy="960120"/>
           </a:xfrm>
           <a:prstGeom prst="rect">
@@ -7000,13 +6388,13 @@
       </p:sp>
       <p:sp>
         <p:nvSpPr>
-          <p:cNvPr id="32" name="Shape 27"/>
-          <p:cNvSpPr/>
-          <p:nvPr/>
-        </p:nvSpPr>
-        <p:spPr>
-          <a:xfrm>
-            <a:off x="6144768" y="4480560"/>
+          <p:cNvPr id="20" name="Shape 17"/>
+          <p:cNvSpPr/>
+          <p:nvPr/>
+        </p:nvSpPr>
+        <p:spPr>
+          <a:xfrm>
+            <a:off x="548640" y="4480560"/>
             <a:ext cx="2651760" cy="64008"/>
           </a:xfrm>
           <a:prstGeom prst="rect">
@@ -7020,13 +6408,13 @@
       </p:sp>
       <p:sp>
         <p:nvSpPr>
-          <p:cNvPr id="33" name="Shape 28"/>
-          <p:cNvSpPr/>
-          <p:nvPr/>
-        </p:nvSpPr>
-        <p:spPr>
-          <a:xfrm>
-            <a:off x="6327648" y="4736592"/>
+          <p:cNvPr id="21" name="Shape 18"/>
+          <p:cNvSpPr/>
+          <p:nvPr/>
+        </p:nvSpPr>
+        <p:spPr>
+          <a:xfrm>
+            <a:off x="731520" y="4736592"/>
             <a:ext cx="457200" cy="457200"/>
           </a:xfrm>
           <a:prstGeom prst="ellipse">
@@ -7040,7 +6428,7 @@
       </p:sp>
       <p:pic>
         <p:nvPicPr>
-          <p:cNvPr id="34" name="Image 3" descr="preencoded.png">    </p:cNvPr>
+          <p:cNvPr id="22" name="Image 1" descr="preencoded.png"/>
           <p:cNvPicPr>
             <a:picLocks noChangeAspect="1"/>
           </p:cNvPicPr>
@@ -7054,7 +6442,7 @@
         </p:blipFill>
         <p:spPr>
           <a:xfrm>
-            <a:off x="6437376" y="4846320"/>
+            <a:off x="841248" y="4846320"/>
             <a:ext cx="237744" cy="237744"/>
           </a:xfrm>
           <a:prstGeom prst="rect">
@@ -7064,13 +6452,13 @@
       </p:pic>
       <p:sp>
         <p:nvSpPr>
-          <p:cNvPr id="35" name="Text 29"/>
-          <p:cNvSpPr/>
-          <p:nvPr/>
-        </p:nvSpPr>
-        <p:spPr>
-          <a:xfrm>
-            <a:off x="6922008" y="4617720"/>
+          <p:cNvPr id="23" name="Text 19"/>
+          <p:cNvSpPr/>
+          <p:nvPr/>
+        </p:nvSpPr>
+        <p:spPr>
+          <a:xfrm>
+            <a:off x="1325880" y="4617720"/>
             <a:ext cx="1783080" cy="320040"/>
           </a:xfrm>
           <a:prstGeom prst="rect">
@@ -7083,7 +6471,7 @@
           <a:bodyPr wrap="square" lIns="0" tIns="0" rIns="0" bIns="0" rtlCol="0" anchor="ctr"/>
           <a:lstStyle/>
           <a:p>
-            <a:pPr indent="0" marL="0">
+            <a:pPr marL="0" indent="0">
               <a:buNone/>
             </a:pPr>
             <a:r>
@@ -7095,7 +6483,7 @@
                 <a:ea typeface="Trebuchet MS" pitchFamily="34" charset="-122"/>
                 <a:cs typeface="Trebuchet MS" pitchFamily="34" charset="-120"/>
               </a:rPr>
-              <a:t>Stabilität</a:t>
+              <a:t>Größe</a:t>
             </a:r>
             <a:endParaRPr lang="en-US" sz="1350" dirty="0"/>
           </a:p>
@@ -7103,13 +6491,13 @@
       </p:sp>
       <p:sp>
         <p:nvSpPr>
-          <p:cNvPr id="36" name="Text 30"/>
-          <p:cNvSpPr/>
-          <p:nvPr/>
-        </p:nvSpPr>
-        <p:spPr>
-          <a:xfrm>
-            <a:off x="6922008" y="4937760"/>
+          <p:cNvPr id="24" name="Text 20"/>
+          <p:cNvSpPr/>
+          <p:nvPr/>
+        </p:nvSpPr>
+        <p:spPr>
+          <a:xfrm>
+            <a:off x="1325880" y="4937760"/>
             <a:ext cx="1783080" cy="411480"/>
           </a:xfrm>
           <a:prstGeom prst="rect">
@@ -7122,7 +6510,7 @@
           <a:bodyPr wrap="square" lIns="0" tIns="0" rIns="0" bIns="0" rtlCol="0" anchor="ctr"/>
           <a:lstStyle/>
           <a:p>
-            <a:pPr indent="0" marL="0">
+            <a:pPr marL="0" indent="0">
               <a:buNone/>
             </a:pPr>
             <a:r>
@@ -7134,7 +6522,7 @@
                 <a:ea typeface="Calibri" pitchFamily="34" charset="-122"/>
                 <a:cs typeface="Calibri" pitchFamily="34" charset="-120"/>
               </a:rPr>
-              <a:t>Wie oft ändert es sich</a:t>
+              <a:t>Function Points</a:t>
             </a:r>
             <a:endParaRPr lang="en-US" sz="1000" dirty="0"/>
           </a:p>
@@ -7142,13 +6530,13 @@
       </p:sp>
       <p:sp>
         <p:nvSpPr>
-          <p:cNvPr id="37" name="Shape 31"/>
-          <p:cNvSpPr/>
-          <p:nvPr/>
-        </p:nvSpPr>
-        <p:spPr>
-          <a:xfrm>
-            <a:off x="8942832" y="4480560"/>
+          <p:cNvPr id="25" name="Shape 21"/>
+          <p:cNvSpPr/>
+          <p:nvPr/>
+        </p:nvSpPr>
+        <p:spPr>
+          <a:xfrm>
+            <a:off x="3346704" y="4480560"/>
             <a:ext cx="2651760" cy="960120"/>
           </a:xfrm>
           <a:prstGeom prst="rect">
@@ -7167,13 +6555,13 @@
       </p:sp>
       <p:sp>
         <p:nvSpPr>
-          <p:cNvPr id="38" name="Shape 32"/>
-          <p:cNvSpPr/>
-          <p:nvPr/>
-        </p:nvSpPr>
-        <p:spPr>
-          <a:xfrm>
-            <a:off x="8942832" y="4480560"/>
+          <p:cNvPr id="26" name="Shape 22"/>
+          <p:cNvSpPr/>
+          <p:nvPr/>
+        </p:nvSpPr>
+        <p:spPr>
+          <a:xfrm>
+            <a:off x="3346704" y="4480560"/>
             <a:ext cx="2651760" cy="64008"/>
           </a:xfrm>
           <a:prstGeom prst="rect">
@@ -7187,13 +6575,13 @@
       </p:sp>
       <p:sp>
         <p:nvSpPr>
-          <p:cNvPr id="39" name="Shape 33"/>
-          <p:cNvSpPr/>
-          <p:nvPr/>
-        </p:nvSpPr>
-        <p:spPr>
-          <a:xfrm>
-            <a:off x="9125712" y="4736592"/>
+          <p:cNvPr id="27" name="Shape 23"/>
+          <p:cNvSpPr/>
+          <p:nvPr/>
+        </p:nvSpPr>
+        <p:spPr>
+          <a:xfrm>
+            <a:off x="3529584" y="4736592"/>
             <a:ext cx="457200" cy="457200"/>
           </a:xfrm>
           <a:prstGeom prst="ellipse">
@@ -7207,7 +6595,7 @@
       </p:sp>
       <p:pic>
         <p:nvPicPr>
-          <p:cNvPr id="40" name="Image 4" descr="preencoded.png">    </p:cNvPr>
+          <p:cNvPr id="28" name="Image 2" descr="preencoded.png"/>
           <p:cNvPicPr>
             <a:picLocks noChangeAspect="1"/>
           </p:cNvPicPr>
@@ -7221,7 +6609,7 @@
         </p:blipFill>
         <p:spPr>
           <a:xfrm>
-            <a:off x="9235440" y="4846320"/>
+            <a:off x="3639312" y="4846320"/>
             <a:ext cx="237744" cy="237744"/>
           </a:xfrm>
           <a:prstGeom prst="rect">
@@ -7231,13 +6619,13 @@
       </p:pic>
       <p:sp>
         <p:nvSpPr>
-          <p:cNvPr id="41" name="Text 34"/>
-          <p:cNvSpPr/>
-          <p:nvPr/>
-        </p:nvSpPr>
-        <p:spPr>
-          <a:xfrm>
-            <a:off x="9720072" y="4617720"/>
+          <p:cNvPr id="29" name="Text 24"/>
+          <p:cNvSpPr/>
+          <p:nvPr/>
+        </p:nvSpPr>
+        <p:spPr>
+          <a:xfrm>
+            <a:off x="4123944" y="4617720"/>
             <a:ext cx="1783080" cy="320040"/>
           </a:xfrm>
           <a:prstGeom prst="rect">
@@ -7250,7 +6638,7 @@
           <a:bodyPr wrap="square" lIns="0" tIns="0" rIns="0" bIns="0" rtlCol="0" anchor="ctr"/>
           <a:lstStyle/>
           <a:p>
-            <a:pPr indent="0" marL="0">
+            <a:pPr marL="0" indent="0">
               <a:buNone/>
             </a:pPr>
             <a:r>
@@ -7262,6 +6650,340 @@
                 <a:ea typeface="Trebuchet MS" pitchFamily="34" charset="-122"/>
                 <a:cs typeface="Trebuchet MS" pitchFamily="34" charset="-120"/>
               </a:rPr>
+              <a:t>Qualität</a:t>
+            </a:r>
+            <a:endParaRPr lang="en-US" sz="1350" dirty="0"/>
+          </a:p>
+        </p:txBody>
+      </p:sp>
+      <p:sp>
+        <p:nvSpPr>
+          <p:cNvPr id="30" name="Text 25"/>
+          <p:cNvSpPr/>
+          <p:nvPr/>
+        </p:nvSpPr>
+        <p:spPr>
+          <a:xfrm>
+            <a:off x="4123944" y="4937760"/>
+            <a:ext cx="1783080" cy="411480"/>
+          </a:xfrm>
+          <a:prstGeom prst="rect">
+            <a:avLst/>
+          </a:prstGeom>
+          <a:noFill/>
+          <a:ln/>
+        </p:spPr>
+        <p:txBody>
+          <a:bodyPr wrap="square" lIns="0" tIns="0" rIns="0" bIns="0" rtlCol="0" anchor="ctr"/>
+          <a:lstStyle/>
+          <a:p>
+            <a:pPr marL="0" indent="0">
+              <a:buNone/>
+            </a:pPr>
+            <a:r>
+              <a:rPr lang="en-US" sz="1000" dirty="0">
+                <a:solidFill>
+                  <a:srgbClr val="63676E"/>
+                </a:solidFill>
+                <a:latin typeface="Calibri" pitchFamily="34" charset="0"/>
+                <a:ea typeface="Calibri" pitchFamily="34" charset="-122"/>
+                <a:cs typeface="Calibri" pitchFamily="34" charset="-120"/>
+              </a:rPr>
+              <a:t>Eindeutig &amp; vollständig</a:t>
+            </a:r>
+            <a:endParaRPr lang="en-US" sz="1000" dirty="0"/>
+          </a:p>
+        </p:txBody>
+      </p:sp>
+      <p:sp>
+        <p:nvSpPr>
+          <p:cNvPr id="31" name="Shape 26"/>
+          <p:cNvSpPr/>
+          <p:nvPr/>
+        </p:nvSpPr>
+        <p:spPr>
+          <a:xfrm>
+            <a:off x="6144768" y="4480560"/>
+            <a:ext cx="2651760" cy="960120"/>
+          </a:xfrm>
+          <a:prstGeom prst="rect">
+            <a:avLst/>
+          </a:prstGeom>
+          <a:solidFill>
+            <a:srgbClr val="FFFFFF"/>
+          </a:solidFill>
+          <a:ln w="19050">
+            <a:solidFill>
+              <a:srgbClr val="E7E5E8"/>
+            </a:solidFill>
+            <a:prstDash val="solid"/>
+          </a:ln>
+        </p:spPr>
+      </p:sp>
+      <p:sp>
+        <p:nvSpPr>
+          <p:cNvPr id="32" name="Shape 27"/>
+          <p:cNvSpPr/>
+          <p:nvPr/>
+        </p:nvSpPr>
+        <p:spPr>
+          <a:xfrm>
+            <a:off x="6144768" y="4480560"/>
+            <a:ext cx="2651760" cy="64008"/>
+          </a:xfrm>
+          <a:prstGeom prst="rect">
+            <a:avLst/>
+          </a:prstGeom>
+          <a:solidFill>
+            <a:srgbClr val="C5394A"/>
+          </a:solidFill>
+          <a:ln/>
+        </p:spPr>
+      </p:sp>
+      <p:sp>
+        <p:nvSpPr>
+          <p:cNvPr id="33" name="Shape 28"/>
+          <p:cNvSpPr/>
+          <p:nvPr/>
+        </p:nvSpPr>
+        <p:spPr>
+          <a:xfrm>
+            <a:off x="6327648" y="4736592"/>
+            <a:ext cx="457200" cy="457200"/>
+          </a:xfrm>
+          <a:prstGeom prst="ellipse">
+            <a:avLst/>
+          </a:prstGeom>
+          <a:solidFill>
+            <a:srgbClr val="F8EAEC"/>
+          </a:solidFill>
+          <a:ln/>
+        </p:spPr>
+      </p:sp>
+      <p:pic>
+        <p:nvPicPr>
+          <p:cNvPr id="34" name="Image 3" descr="preencoded.png"/>
+          <p:cNvPicPr>
+            <a:picLocks noChangeAspect="1"/>
+          </p:cNvPicPr>
+          <p:nvPr/>
+        </p:nvPicPr>
+        <p:blipFill>
+          <a:blip r:embed="rId6"/>
+          <a:stretch>
+            <a:fillRect/>
+          </a:stretch>
+        </p:blipFill>
+        <p:spPr>
+          <a:xfrm>
+            <a:off x="6437376" y="4846320"/>
+            <a:ext cx="237744" cy="237744"/>
+          </a:xfrm>
+          <a:prstGeom prst="rect">
+            <a:avLst/>
+          </a:prstGeom>
+        </p:spPr>
+      </p:pic>
+      <p:sp>
+        <p:nvSpPr>
+          <p:cNvPr id="35" name="Text 29"/>
+          <p:cNvSpPr/>
+          <p:nvPr/>
+        </p:nvSpPr>
+        <p:spPr>
+          <a:xfrm>
+            <a:off x="6922008" y="4617720"/>
+            <a:ext cx="1783080" cy="320040"/>
+          </a:xfrm>
+          <a:prstGeom prst="rect">
+            <a:avLst/>
+          </a:prstGeom>
+          <a:noFill/>
+          <a:ln/>
+        </p:spPr>
+        <p:txBody>
+          <a:bodyPr wrap="square" lIns="0" tIns="0" rIns="0" bIns="0" rtlCol="0" anchor="ctr"/>
+          <a:lstStyle/>
+          <a:p>
+            <a:pPr marL="0" indent="0">
+              <a:buNone/>
+            </a:pPr>
+            <a:r>
+              <a:rPr lang="en-US" sz="1350" b="1" dirty="0">
+                <a:solidFill>
+                  <a:srgbClr val="2A2D34"/>
+                </a:solidFill>
+                <a:latin typeface="Trebuchet MS" pitchFamily="34" charset="0"/>
+                <a:ea typeface="Trebuchet MS" pitchFamily="34" charset="-122"/>
+                <a:cs typeface="Trebuchet MS" pitchFamily="34" charset="-120"/>
+              </a:rPr>
+              <a:t>Stabilität</a:t>
+            </a:r>
+            <a:endParaRPr lang="en-US" sz="1350" dirty="0"/>
+          </a:p>
+        </p:txBody>
+      </p:sp>
+      <p:sp>
+        <p:nvSpPr>
+          <p:cNvPr id="36" name="Text 30"/>
+          <p:cNvSpPr/>
+          <p:nvPr/>
+        </p:nvSpPr>
+        <p:spPr>
+          <a:xfrm>
+            <a:off x="6922008" y="4937760"/>
+            <a:ext cx="1783080" cy="411480"/>
+          </a:xfrm>
+          <a:prstGeom prst="rect">
+            <a:avLst/>
+          </a:prstGeom>
+          <a:noFill/>
+          <a:ln/>
+        </p:spPr>
+        <p:txBody>
+          <a:bodyPr wrap="square" lIns="0" tIns="0" rIns="0" bIns="0" rtlCol="0" anchor="ctr"/>
+          <a:lstStyle/>
+          <a:p>
+            <a:pPr marL="0" indent="0">
+              <a:buNone/>
+            </a:pPr>
+            <a:r>
+              <a:rPr lang="en-US" sz="1000" dirty="0">
+                <a:solidFill>
+                  <a:srgbClr val="63676E"/>
+                </a:solidFill>
+                <a:latin typeface="Calibri" pitchFamily="34" charset="0"/>
+                <a:ea typeface="Calibri" pitchFamily="34" charset="-122"/>
+                <a:cs typeface="Calibri" pitchFamily="34" charset="-120"/>
+              </a:rPr>
+              <a:t>Wie oft ändert es sich</a:t>
+            </a:r>
+            <a:endParaRPr lang="en-US" sz="1000" dirty="0"/>
+          </a:p>
+        </p:txBody>
+      </p:sp>
+      <p:sp>
+        <p:nvSpPr>
+          <p:cNvPr id="37" name="Shape 31"/>
+          <p:cNvSpPr/>
+          <p:nvPr/>
+        </p:nvSpPr>
+        <p:spPr>
+          <a:xfrm>
+            <a:off x="8942832" y="4480560"/>
+            <a:ext cx="2651760" cy="960120"/>
+          </a:xfrm>
+          <a:prstGeom prst="rect">
+            <a:avLst/>
+          </a:prstGeom>
+          <a:solidFill>
+            <a:srgbClr val="FFFFFF"/>
+          </a:solidFill>
+          <a:ln w="19050">
+            <a:solidFill>
+              <a:srgbClr val="E7E5E8"/>
+            </a:solidFill>
+            <a:prstDash val="solid"/>
+          </a:ln>
+        </p:spPr>
+      </p:sp>
+      <p:sp>
+        <p:nvSpPr>
+          <p:cNvPr id="38" name="Shape 32"/>
+          <p:cNvSpPr/>
+          <p:nvPr/>
+        </p:nvSpPr>
+        <p:spPr>
+          <a:xfrm>
+            <a:off x="8942832" y="4480560"/>
+            <a:ext cx="2651760" cy="64008"/>
+          </a:xfrm>
+          <a:prstGeom prst="rect">
+            <a:avLst/>
+          </a:prstGeom>
+          <a:solidFill>
+            <a:srgbClr val="3E4856"/>
+          </a:solidFill>
+          <a:ln/>
+        </p:spPr>
+      </p:sp>
+      <p:sp>
+        <p:nvSpPr>
+          <p:cNvPr id="39" name="Shape 33"/>
+          <p:cNvSpPr/>
+          <p:nvPr/>
+        </p:nvSpPr>
+        <p:spPr>
+          <a:xfrm>
+            <a:off x="9125712" y="4736592"/>
+            <a:ext cx="457200" cy="457200"/>
+          </a:xfrm>
+          <a:prstGeom prst="ellipse">
+            <a:avLst/>
+          </a:prstGeom>
+          <a:solidFill>
+            <a:srgbClr val="E8EAEE"/>
+          </a:solidFill>
+          <a:ln/>
+        </p:spPr>
+      </p:sp>
+      <p:pic>
+        <p:nvPicPr>
+          <p:cNvPr id="40" name="Image 4" descr="preencoded.png"/>
+          <p:cNvPicPr>
+            <a:picLocks noChangeAspect="1"/>
+          </p:cNvPicPr>
+          <p:nvPr/>
+        </p:nvPicPr>
+        <p:blipFill>
+          <a:blip r:embed="rId7"/>
+          <a:stretch>
+            <a:fillRect/>
+          </a:stretch>
+        </p:blipFill>
+        <p:spPr>
+          <a:xfrm>
+            <a:off x="9235440" y="4846320"/>
+            <a:ext cx="237744" cy="237744"/>
+          </a:xfrm>
+          <a:prstGeom prst="rect">
+            <a:avLst/>
+          </a:prstGeom>
+        </p:spPr>
+      </p:pic>
+      <p:sp>
+        <p:nvSpPr>
+          <p:cNvPr id="41" name="Text 34"/>
+          <p:cNvSpPr/>
+          <p:nvPr/>
+        </p:nvSpPr>
+        <p:spPr>
+          <a:xfrm>
+            <a:off x="9720072" y="4617720"/>
+            <a:ext cx="1783080" cy="320040"/>
+          </a:xfrm>
+          <a:prstGeom prst="rect">
+            <a:avLst/>
+          </a:prstGeom>
+          <a:noFill/>
+          <a:ln/>
+        </p:spPr>
+        <p:txBody>
+          <a:bodyPr wrap="square" lIns="0" tIns="0" rIns="0" bIns="0" rtlCol="0" anchor="ctr"/>
+          <a:lstStyle/>
+          <a:p>
+            <a:pPr marL="0" indent="0">
+              <a:buNone/>
+            </a:pPr>
+            <a:r>
+              <a:rPr lang="en-US" sz="1350" b="1" dirty="0">
+                <a:solidFill>
+                  <a:srgbClr val="2A2D34"/>
+                </a:solidFill>
+                <a:latin typeface="Trebuchet MS" pitchFamily="34" charset="0"/>
+                <a:ea typeface="Trebuchet MS" pitchFamily="34" charset="-122"/>
+                <a:cs typeface="Trebuchet MS" pitchFamily="34" charset="-120"/>
+              </a:rPr>
               <a:t>Prozess</a:t>
             </a:r>
             <a:endParaRPr lang="en-US" sz="1350" dirty="0"/>
@@ -7289,7 +7011,7 @@
           <a:bodyPr wrap="square" lIns="0" tIns="0" rIns="0" bIns="0" rtlCol="0" anchor="ctr"/>
           <a:lstStyle/>
           <a:p>
-            <a:pPr indent="0" marL="0">
+            <a:pPr marL="0" indent="0">
               <a:buNone/>
             </a:pPr>
             <a:r>
@@ -7323,6 +7045,7 @@
         <a:solidFill>
           <a:srgbClr val="FFFFFF"/>
         </a:solidFill>
+        <a:effectLst/>
       </p:bgPr>
     </p:bg>
     <p:spTree>
@@ -7400,7 +7123,7 @@
           <a:bodyPr wrap="square" lIns="0" tIns="0" rIns="0" bIns="0" rtlCol="0" anchor="ctr"/>
           <a:lstStyle/>
           <a:p>
-            <a:pPr algn="l" indent="0" marL="0">
+            <a:pPr marL="0" indent="0" algn="l">
               <a:buNone/>
             </a:pPr>
             <a:r>
@@ -7439,7 +7162,7 @@
           <a:bodyPr wrap="square" lIns="0" tIns="0" rIns="0" bIns="0" rtlCol="0" anchor="ctr"/>
           <a:lstStyle/>
           <a:p>
-            <a:pPr algn="r" indent="0" marL="0">
+            <a:pPr marL="0" indent="0" algn="r">
               <a:buNone/>
             </a:pPr>
             <a:r>
@@ -7478,11 +7201,11 @@
           <a:bodyPr wrap="square" lIns="0" tIns="0" rIns="0" bIns="0" rtlCol="0" anchor="ctr"/>
           <a:lstStyle/>
           <a:p>
-            <a:pPr algn="r" indent="0" marL="0">
-              <a:buNone/>
-            </a:pPr>
-            <a:r>
-              <a:rPr lang="en-US" sz="900" b="1" spc="100" kern="0" dirty="0">
+            <a:pPr marL="0" indent="0" algn="r">
+              <a:buNone/>
+            </a:pPr>
+            <a:r>
+              <a:rPr lang="en-US" sz="900" b="1" kern="0" spc="100" dirty="0">
                 <a:solidFill>
                   <a:srgbClr val="C5394A"/>
                 </a:solidFill>
@@ -7517,11 +7240,11 @@
           <a:bodyPr wrap="square" lIns="0" tIns="0" rIns="0" bIns="0" rtlCol="0" anchor="ctr"/>
           <a:lstStyle/>
           <a:p>
-            <a:pPr indent="0" marL="0">
-              <a:buNone/>
-            </a:pPr>
-            <a:r>
-              <a:rPr lang="en-US" sz="1200" b="1" spc="200" kern="0" dirty="0">
+            <a:pPr marL="0" indent="0">
+              <a:buNone/>
+            </a:pPr>
+            <a:r>
+              <a:rPr lang="en-US" sz="1200" b="1" kern="0" spc="200" dirty="0">
                 <a:solidFill>
                   <a:srgbClr val="C5394A"/>
                 </a:solidFill>
@@ -7556,7 +7279,7 @@
           <a:bodyPr wrap="square" lIns="0" tIns="0" rIns="0" bIns="0" rtlCol="0" anchor="ctr"/>
           <a:lstStyle/>
           <a:p>
-            <a:pPr indent="0" marL="0">
+            <a:pPr marL="0" indent="0">
               <a:buNone/>
             </a:pPr>
             <a:r>
@@ -7595,7 +7318,7 @@
           <a:bodyPr wrap="square" rtlCol="0" anchor="ctr"/>
           <a:lstStyle/>
           <a:p>
-            <a:pPr indent="0" marL="0">
+            <a:pPr marL="0" indent="0">
               <a:buNone/>
             </a:pPr>
             <a:r>
@@ -7637,7 +7360,7 @@
             <a:prstDash val="solid"/>
           </a:ln>
           <a:effectLst>
-            <a:outerShdw sx="100000" sy="100000" kx="0" ky="0" algn="bl" rotWithShape="0" blurRad="101600" dist="38100" dir="5400000">
+            <a:outerShdw blurRad="101600" dist="38100" dir="5400000" algn="bl" rotWithShape="0">
               <a:srgbClr val="000000">
                 <a:alpha val="8000"/>
               </a:srgbClr>
@@ -7667,14 +7390,14 @@
       </p:sp>
       <p:pic>
         <p:nvPicPr>
-          <p:cNvPr id="12" name="Image 0" descr="preencoded.png">    </p:cNvPr>
+          <p:cNvPr id="12" name="Image 0" descr="preencoded.png"/>
           <p:cNvPicPr>
             <a:picLocks noChangeAspect="1"/>
           </p:cNvPicPr>
           <p:nvPr/>
         </p:nvPicPr>
         <p:blipFill>
-          <a:blip r:embed="rId1"/>
+          <a:blip r:embed="rId3"/>
           <a:stretch>
             <a:fillRect/>
           </a:stretch>
@@ -7710,7 +7433,7 @@
           <a:bodyPr wrap="square" lIns="0" tIns="0" rIns="0" bIns="0" rtlCol="0" anchor="ctr"/>
           <a:lstStyle/>
           <a:p>
-            <a:pPr indent="0" marL="0">
+            <a:pPr marL="0" indent="0">
               <a:buNone/>
             </a:pPr>
             <a:r>
@@ -7776,7 +7499,7 @@
             <a:prstDash val="solid"/>
           </a:ln>
           <a:effectLst>
-            <a:outerShdw sx="100000" sy="100000" kx="0" ky="0" algn="bl" rotWithShape="0" blurRad="101600" dist="38100" dir="5400000">
+            <a:outerShdw blurRad="101600" dist="38100" dir="5400000" algn="bl" rotWithShape="0">
               <a:srgbClr val="000000">
                 <a:alpha val="8000"/>
               </a:srgbClr>
@@ -7806,14 +7529,14 @@
       </p:sp>
       <p:pic>
         <p:nvPicPr>
-          <p:cNvPr id="17" name="Image 1" descr="preencoded.png">    </p:cNvPr>
+          <p:cNvPr id="17" name="Image 1" descr="preencoded.png"/>
           <p:cNvPicPr>
             <a:picLocks noChangeAspect="1"/>
           </p:cNvPicPr>
           <p:nvPr/>
         </p:nvPicPr>
         <p:blipFill>
-          <a:blip r:embed="rId2"/>
+          <a:blip r:embed="rId4"/>
           <a:stretch>
             <a:fillRect/>
           </a:stretch>
@@ -7849,7 +7572,7 @@
           <a:bodyPr wrap="square" lIns="0" tIns="0" rIns="0" bIns="0" rtlCol="0" anchor="ctr"/>
           <a:lstStyle/>
           <a:p>
-            <a:pPr indent="0" marL="0">
+            <a:pPr marL="0" indent="0">
               <a:buNone/>
             </a:pPr>
             <a:r>
@@ -7915,7 +7638,7 @@
             <a:prstDash val="solid"/>
           </a:ln>
           <a:effectLst>
-            <a:outerShdw sx="100000" sy="100000" kx="0" ky="0" algn="bl" rotWithShape="0" blurRad="101600" dist="38100" dir="5400000">
+            <a:outerShdw blurRad="101600" dist="38100" dir="5400000" algn="bl" rotWithShape="0">
               <a:srgbClr val="000000">
                 <a:alpha val="8000"/>
               </a:srgbClr>
@@ -7945,14 +7668,14 @@
       </p:sp>
       <p:pic>
         <p:nvPicPr>
-          <p:cNvPr id="22" name="Image 2" descr="preencoded.png">    </p:cNvPr>
+          <p:cNvPr id="22" name="Image 2" descr="preencoded.png"/>
           <p:cNvPicPr>
             <a:picLocks noChangeAspect="1"/>
           </p:cNvPicPr>
           <p:nvPr/>
         </p:nvPicPr>
         <p:blipFill>
-          <a:blip r:embed="rId3"/>
+          <a:blip r:embed="rId5"/>
           <a:stretch>
             <a:fillRect/>
           </a:stretch>
@@ -7988,7 +7711,7 @@
           <a:bodyPr wrap="square" lIns="0" tIns="0" rIns="0" bIns="0" rtlCol="0" anchor="ctr"/>
           <a:lstStyle/>
           <a:p>
-            <a:pPr indent="0" marL="0">
+            <a:pPr marL="0" indent="0">
               <a:buNone/>
             </a:pPr>
             <a:r>
@@ -8054,7 +7777,7 @@
             <a:prstDash val="solid"/>
           </a:ln>
           <a:effectLst>
-            <a:outerShdw sx="100000" sy="100000" kx="0" ky="0" algn="bl" rotWithShape="0" blurRad="101600" dist="38100" dir="5400000">
+            <a:outerShdw blurRad="101600" dist="38100" dir="5400000" algn="bl" rotWithShape="0">
               <a:srgbClr val="000000">
                 <a:alpha val="8000"/>
               </a:srgbClr>
@@ -8084,14 +7807,14 @@
       </p:sp>
       <p:pic>
         <p:nvPicPr>
-          <p:cNvPr id="27" name="Image 3" descr="preencoded.png">    </p:cNvPr>
+          <p:cNvPr id="27" name="Image 3" descr="preencoded.png"/>
           <p:cNvPicPr>
             <a:picLocks noChangeAspect="1"/>
           </p:cNvPicPr>
           <p:nvPr/>
         </p:nvPicPr>
         <p:blipFill>
-          <a:blip r:embed="rId4"/>
+          <a:blip r:embed="rId6"/>
           <a:stretch>
             <a:fillRect/>
           </a:stretch>
@@ -8127,7 +7850,7 @@
           <a:bodyPr wrap="square" lIns="0" tIns="0" rIns="0" bIns="0" rtlCol="0" anchor="ctr"/>
           <a:lstStyle/>
           <a:p>
-            <a:pPr indent="0" marL="0">
+            <a:pPr marL="0" indent="0">
               <a:buNone/>
             </a:pPr>
             <a:r>
@@ -8193,7 +7916,7 @@
             <a:prstDash val="solid"/>
           </a:ln>
           <a:effectLst>
-            <a:outerShdw sx="100000" sy="100000" kx="0" ky="0" algn="bl" rotWithShape="0" blurRad="101600" dist="38100" dir="5400000">
+            <a:outerShdw blurRad="101600" dist="38100" dir="5400000" algn="bl" rotWithShape="0">
               <a:srgbClr val="000000">
                 <a:alpha val="8000"/>
               </a:srgbClr>
@@ -8223,14 +7946,14 @@
       </p:sp>
       <p:pic>
         <p:nvPicPr>
-          <p:cNvPr id="32" name="Image 4" descr="preencoded.png">    </p:cNvPr>
+          <p:cNvPr id="32" name="Image 4" descr="preencoded.png"/>
           <p:cNvPicPr>
             <a:picLocks noChangeAspect="1"/>
           </p:cNvPicPr>
           <p:nvPr/>
         </p:nvPicPr>
         <p:blipFill>
-          <a:blip r:embed="rId5"/>
+          <a:blip r:embed="rId7"/>
           <a:stretch>
             <a:fillRect/>
           </a:stretch>
@@ -8266,7 +7989,7 @@
           <a:bodyPr wrap="square" lIns="0" tIns="0" rIns="0" bIns="0" rtlCol="0" anchor="ctr"/>
           <a:lstStyle/>
           <a:p>
-            <a:pPr indent="0" marL="0">
+            <a:pPr marL="0" indent="0">
               <a:buNone/>
             </a:pPr>
             <a:r>
@@ -8308,7 +8031,7 @@
             <a:prstDash val="solid"/>
           </a:ln>
           <a:effectLst>
-            <a:outerShdw sx="100000" sy="100000" kx="0" ky="0" algn="bl" rotWithShape="0" blurRad="101600" dist="38100" dir="5400000">
+            <a:outerShdw blurRad="101600" dist="38100" dir="5400000" algn="bl" rotWithShape="0">
               <a:srgbClr val="000000">
                 <a:alpha val="8000"/>
               </a:srgbClr>
@@ -8358,14 +8081,14 @@
       </p:sp>
       <p:pic>
         <p:nvPicPr>
-          <p:cNvPr id="37" name="Image 5" descr="preencoded.png">    </p:cNvPr>
+          <p:cNvPr id="37" name="Image 5" descr="preencoded.png"/>
           <p:cNvPicPr>
             <a:picLocks noChangeAspect="1"/>
           </p:cNvPicPr>
           <p:nvPr/>
         </p:nvPicPr>
         <p:blipFill>
-          <a:blip r:embed="rId6"/>
+          <a:blip r:embed="rId8"/>
           <a:stretch>
             <a:fillRect/>
           </a:stretch>
@@ -8401,7 +8124,7 @@
           <a:bodyPr wrap="square" lIns="0" tIns="0" rIns="0" bIns="0" rtlCol="0" anchor="ctr"/>
           <a:lstStyle/>
           <a:p>
-            <a:pPr indent="0" marL="0">
+            <a:pPr marL="0" indent="0">
               <a:buNone/>
             </a:pPr>
             <a:r>
@@ -8549,7 +8272,7 @@
             <a:prstDash val="solid"/>
           </a:ln>
           <a:effectLst>
-            <a:outerShdw sx="100000" sy="100000" kx="0" ky="0" algn="bl" rotWithShape="0" blurRad="101600" dist="38100" dir="5400000">
+            <a:outerShdw blurRad="101600" dist="38100" dir="5400000" algn="bl" rotWithShape="0">
               <a:srgbClr val="000000">
                 <a:alpha val="8000"/>
               </a:srgbClr>
@@ -8599,14 +8322,14 @@
       </p:sp>
       <p:pic>
         <p:nvPicPr>
-          <p:cNvPr id="43" name="Image 6" descr="preencoded.png">    </p:cNvPr>
+          <p:cNvPr id="43" name="Image 6" descr="preencoded.png"/>
           <p:cNvPicPr>
             <a:picLocks noChangeAspect="1"/>
           </p:cNvPicPr>
           <p:nvPr/>
         </p:nvPicPr>
         <p:blipFill>
-          <a:blip r:embed="rId7"/>
+          <a:blip r:embed="rId9"/>
           <a:stretch>
             <a:fillRect/>
           </a:stretch>
@@ -8642,7 +8365,7 @@
           <a:bodyPr wrap="square" lIns="0" tIns="0" rIns="0" bIns="0" rtlCol="0" anchor="ctr"/>
           <a:lstStyle/>
           <a:p>
-            <a:pPr indent="0" marL="0">
+            <a:pPr marL="0" indent="0">
               <a:buNone/>
             </a:pPr>
             <a:r>
@@ -8782,6 +8505,7 @@
         <a:solidFill>
           <a:srgbClr val="FFFFFF"/>
         </a:solidFill>
+        <a:effectLst/>
       </p:bgPr>
     </p:bg>
     <p:spTree>
@@ -8859,7 +8583,7 @@
           <a:bodyPr wrap="square" lIns="0" tIns="0" rIns="0" bIns="0" rtlCol="0" anchor="ctr"/>
           <a:lstStyle/>
           <a:p>
-            <a:pPr algn="l" indent="0" marL="0">
+            <a:pPr marL="0" indent="0" algn="l">
               <a:buNone/>
             </a:pPr>
             <a:r>
@@ -8898,7 +8622,7 @@
           <a:bodyPr wrap="square" lIns="0" tIns="0" rIns="0" bIns="0" rtlCol="0" anchor="ctr"/>
           <a:lstStyle/>
           <a:p>
-            <a:pPr algn="r" indent="0" marL="0">
+            <a:pPr marL="0" indent="0" algn="r">
               <a:buNone/>
             </a:pPr>
             <a:r>
@@ -8937,11 +8661,11 @@
           <a:bodyPr wrap="square" lIns="0" tIns="0" rIns="0" bIns="0" rtlCol="0" anchor="ctr"/>
           <a:lstStyle/>
           <a:p>
-            <a:pPr algn="r" indent="0" marL="0">
-              <a:buNone/>
-            </a:pPr>
-            <a:r>
-              <a:rPr lang="en-US" sz="900" b="1" spc="100" kern="0" dirty="0">
+            <a:pPr marL="0" indent="0" algn="r">
+              <a:buNone/>
+            </a:pPr>
+            <a:r>
+              <a:rPr lang="en-US" sz="900" b="1" kern="0" spc="100" dirty="0">
                 <a:solidFill>
                   <a:srgbClr val="C5394A"/>
                 </a:solidFill>
@@ -8976,11 +8700,11 @@
           <a:bodyPr wrap="square" lIns="0" tIns="0" rIns="0" bIns="0" rtlCol="0" anchor="ctr"/>
           <a:lstStyle/>
           <a:p>
-            <a:pPr indent="0" marL="0">
-              <a:buNone/>
-            </a:pPr>
-            <a:r>
-              <a:rPr lang="en-US" sz="1200" b="1" spc="200" kern="0" dirty="0">
+            <a:pPr marL="0" indent="0">
+              <a:buNone/>
+            </a:pPr>
+            <a:r>
+              <a:rPr lang="en-US" sz="1200" b="1" kern="0" spc="200" dirty="0">
                 <a:solidFill>
                   <a:srgbClr val="C5394A"/>
                 </a:solidFill>
@@ -9015,7 +8739,7 @@
           <a:bodyPr wrap="square" lIns="0" tIns="0" rIns="0" bIns="0" rtlCol="0" anchor="ctr"/>
           <a:lstStyle/>
           <a:p>
-            <a:pPr indent="0" marL="0">
+            <a:pPr marL="0" indent="0">
               <a:buNone/>
             </a:pPr>
             <a:r>
@@ -9054,7 +8778,7 @@
           <a:bodyPr wrap="square" rtlCol="0" anchor="ctr"/>
           <a:lstStyle/>
           <a:p>
-            <a:pPr indent="0" marL="0">
+            <a:pPr marL="0" indent="0">
               <a:buNone/>
             </a:pPr>
             <a:r>
@@ -9074,7 +8798,7 @@
       </p:sp>
       <p:graphicFrame>
         <p:nvGraphicFramePr>
-          <p:cNvPr id="10" name="Chart 0" descr=""/>
+          <p:cNvPr id="10" name="Chart 0"/>
           <p:cNvGraphicFramePr/>
           <p:nvPr/>
         </p:nvGraphicFramePr>
@@ -9082,9 +8806,9 @@
           <a:off x="457200" y="1965960"/>
           <a:ext cx="5669280" cy="3200400"/>
         </p:xfrm>
-        <a:graphic xmlns:a="http://schemas.openxmlformats.org/drawingml/2006/main">
+        <a:graphic>
           <a:graphicData uri="http://schemas.openxmlformats.org/drawingml/2006/chart">
-            <c:chart xmlns:c="http://schemas.openxmlformats.org/drawingml/2006/chart" r:id="rId1"/>
+            <c:chart xmlns:c="http://schemas.openxmlformats.org/drawingml/2006/chart" xmlns:r="http://schemas.openxmlformats.org/officeDocument/2006/relationships" r:id="rId3"/>
           </a:graphicData>
         </a:graphic>
       </p:graphicFrame>
@@ -9112,7 +8836,7 @@
             <a:prstDash val="solid"/>
           </a:ln>
           <a:effectLst>
-            <a:outerShdw sx="100000" sy="100000" kx="0" ky="0" algn="bl" rotWithShape="0" blurRad="101600" dist="38100" dir="5400000">
+            <a:outerShdw blurRad="101600" dist="38100" dir="5400000" algn="bl" rotWithShape="0">
               <a:srgbClr val="000000">
                 <a:alpha val="8000"/>
               </a:srgbClr>
@@ -9142,14 +8866,14 @@
       </p:sp>
       <p:pic>
         <p:nvPicPr>
-          <p:cNvPr id="13" name="Image 0" descr="preencoded.png">    </p:cNvPr>
+          <p:cNvPr id="13" name="Image 0" descr="preencoded.png"/>
           <p:cNvPicPr>
             <a:picLocks noChangeAspect="1"/>
           </p:cNvPicPr>
           <p:nvPr/>
         </p:nvPicPr>
         <p:blipFill>
-          <a:blip r:embed="rId2"/>
+          <a:blip r:embed="rId4"/>
           <a:stretch>
             <a:fillRect/>
           </a:stretch>
@@ -9185,7 +8909,7 @@
           <a:bodyPr wrap="square" lIns="0" tIns="0" rIns="0" bIns="0" rtlCol="0" anchor="ctr"/>
           <a:lstStyle/>
           <a:p>
-            <a:pPr indent="0" marL="0">
+            <a:pPr marL="0" indent="0">
               <a:buNone/>
             </a:pPr>
             <a:r>
@@ -9325,7 +9049,7 @@
           </a:solidFill>
           <a:ln/>
           <a:effectLst>
-            <a:outerShdw sx="100000" sy="100000" kx="0" ky="0" algn="bl" rotWithShape="0" blurRad="101600" dist="38100" dir="5400000">
+            <a:outerShdw blurRad="101600" dist="38100" dir="5400000" algn="bl" rotWithShape="0">
               <a:srgbClr val="000000">
                 <a:alpha val="8000"/>
               </a:srgbClr>
@@ -9355,14 +9079,14 @@
       </p:sp>
       <p:pic>
         <p:nvPicPr>
-          <p:cNvPr id="18" name="Image 1" descr="preencoded.png">    </p:cNvPr>
+          <p:cNvPr id="18" name="Image 1" descr="preencoded.png"/>
           <p:cNvPicPr>
             <a:picLocks noChangeAspect="1"/>
           </p:cNvPicPr>
           <p:nvPr/>
         </p:nvPicPr>
         <p:blipFill>
-          <a:blip r:embed="rId3"/>
+          <a:blip r:embed="rId5"/>
           <a:stretch>
             <a:fillRect/>
           </a:stretch>
@@ -9398,7 +9122,7 @@
           <a:bodyPr wrap="square" lIns="0" tIns="0" rIns="0" bIns="0" rtlCol="0" anchor="ctr"/>
           <a:lstStyle/>
           <a:p>
-            <a:pPr indent="0" marL="0">
+            <a:pPr marL="0" indent="0">
               <a:buNone/>
             </a:pPr>
             <a:r>
@@ -9519,7 +9243,7 @@
           <a:bodyPr wrap="square" lIns="0" tIns="0" rIns="0" bIns="0" rtlCol="0" anchor="ctr"/>
           <a:lstStyle/>
           <a:p>
-            <a:pPr indent="0" marL="0">
+            <a:pPr marL="0" indent="0">
               <a:buNone/>
             </a:pPr>
             <a:r>
@@ -9553,6 +9277,7 @@
         <a:solidFill>
           <a:srgbClr val="FFFFFF"/>
         </a:solidFill>
+        <a:effectLst/>
       </p:bgPr>
     </p:bg>
     <p:spTree>
@@ -9630,7 +9355,7 @@
           <a:bodyPr wrap="square" lIns="0" tIns="0" rIns="0" bIns="0" rtlCol="0" anchor="ctr"/>
           <a:lstStyle/>
           <a:p>
-            <a:pPr algn="l" indent="0" marL="0">
+            <a:pPr marL="0" indent="0" algn="l">
               <a:buNone/>
             </a:pPr>
             <a:r>
@@ -9669,7 +9394,7 @@
           <a:bodyPr wrap="square" lIns="0" tIns="0" rIns="0" bIns="0" rtlCol="0" anchor="ctr"/>
           <a:lstStyle/>
           <a:p>
-            <a:pPr algn="r" indent="0" marL="0">
+            <a:pPr marL="0" indent="0" algn="r">
               <a:buNone/>
             </a:pPr>
             <a:r>
@@ -9708,11 +9433,11 @@
           <a:bodyPr wrap="square" lIns="0" tIns="0" rIns="0" bIns="0" rtlCol="0" anchor="ctr"/>
           <a:lstStyle/>
           <a:p>
-            <a:pPr algn="r" indent="0" marL="0">
-              <a:buNone/>
-            </a:pPr>
-            <a:r>
-              <a:rPr lang="en-US" sz="900" b="1" spc="100" kern="0" dirty="0">
+            <a:pPr marL="0" indent="0" algn="r">
+              <a:buNone/>
+            </a:pPr>
+            <a:r>
+              <a:rPr lang="en-US" sz="900" b="1" kern="0" spc="100" dirty="0">
                 <a:solidFill>
                   <a:srgbClr val="C5394A"/>
                 </a:solidFill>
@@ -9747,11 +9472,11 @@
           <a:bodyPr wrap="square" lIns="0" tIns="0" rIns="0" bIns="0" rtlCol="0" anchor="ctr"/>
           <a:lstStyle/>
           <a:p>
-            <a:pPr indent="0" marL="0">
-              <a:buNone/>
-            </a:pPr>
-            <a:r>
-              <a:rPr lang="en-US" sz="1200" b="1" spc="200" kern="0" dirty="0">
+            <a:pPr marL="0" indent="0">
+              <a:buNone/>
+            </a:pPr>
+            <a:r>
+              <a:rPr lang="en-US" sz="1200" b="1" kern="0" spc="200" dirty="0">
                 <a:solidFill>
                   <a:srgbClr val="C5394A"/>
                 </a:solidFill>
@@ -9786,7 +9511,7 @@
           <a:bodyPr wrap="square" lIns="0" tIns="0" rIns="0" bIns="0" rtlCol="0" anchor="ctr"/>
           <a:lstStyle/>
           <a:p>
-            <a:pPr indent="0" marL="0">
+            <a:pPr marL="0" indent="0">
               <a:buNone/>
             </a:pPr>
             <a:r>
@@ -9846,251 +9571,7 @@
       </p:sp>
       <p:pic>
         <p:nvPicPr>
-          <p:cNvPr id="11" name="Image 0" descr="preencoded.png">    </p:cNvPr>
-          <p:cNvPicPr>
-            <a:picLocks noChangeAspect="1"/>
-          </p:cNvPicPr>
-          <p:nvPr/>
-        </p:nvPicPr>
-        <p:blipFill>
-          <a:blip r:embed="rId1"/>
-          <a:stretch>
-            <a:fillRect/>
-          </a:stretch>
-        </p:blipFill>
-        <p:spPr>
-          <a:xfrm>
-            <a:off x="9427464" y="3118104"/>
-            <a:ext cx="713232" cy="713232"/>
-          </a:xfrm>
-          <a:prstGeom prst="rect">
-            <a:avLst/>
-          </a:prstGeom>
-        </p:spPr>
-      </p:pic>
-      <p:sp>
-        <p:nvSpPr>
-          <p:cNvPr id="12" name="Text 9"/>
-          <p:cNvSpPr/>
-          <p:nvPr/>
-        </p:nvSpPr>
-        <p:spPr>
-          <a:xfrm>
-            <a:off x="7955280" y="4297680"/>
-            <a:ext cx="3657600" cy="457200"/>
-          </a:xfrm>
-          <a:prstGeom prst="rect">
-            <a:avLst/>
-          </a:prstGeom>
-          <a:noFill/>
-          <a:ln/>
-        </p:spPr>
-        <p:txBody>
-          <a:bodyPr wrap="square" lIns="0" tIns="0" rIns="0" bIns="0" rtlCol="0" anchor="ctr"/>
-          <a:lstStyle/>
-          <a:p>
-            <a:pPr algn="ctr" indent="0" marL="0">
-              <a:buNone/>
-            </a:pPr>
-            <a:r>
-              <a:rPr lang="en-US" sz="2000" b="1" dirty="0">
-                <a:solidFill>
-                  <a:srgbClr val="3E4856"/>
-                </a:solidFill>
-                <a:latin typeface="Courier New" pitchFamily="34" charset="0"/>
-                <a:ea typeface="Courier New" pitchFamily="34" charset="-122"/>
-                <a:cs typeface="Courier New" pitchFamily="34" charset="-120"/>
-              </a:rPr>
-              <a:t>./start.sh</a:t>
-            </a:r>
-            <a:endParaRPr lang="en-US" sz="2000" dirty="0"/>
-          </a:p>
-        </p:txBody>
-      </p:sp>
-      <p:sp>
-        <p:nvSpPr>
-          <p:cNvPr id="13" name="Text 10"/>
-          <p:cNvSpPr/>
-          <p:nvPr/>
-        </p:nvSpPr>
-        <p:spPr>
-          <a:xfrm>
-            <a:off x="7955280" y="4754880"/>
-            <a:ext cx="3657600" cy="365760"/>
-          </a:xfrm>
-          <a:prstGeom prst="rect">
-            <a:avLst/>
-          </a:prstGeom>
-          <a:noFill/>
-          <a:ln/>
-        </p:spPr>
-        <p:txBody>
-          <a:bodyPr wrap="square" lIns="0" tIns="0" rIns="0" bIns="0" rtlCol="0" anchor="ctr"/>
-          <a:lstStyle/>
-          <a:p>
-            <a:pPr algn="ctr" indent="0" marL="0">
-              <a:buNone/>
-            </a:pPr>
-            <a:r>
-              <a:rPr lang="en-US" sz="1100" i="1" dirty="0">
-                <a:solidFill>
-                  <a:srgbClr val="63676E"/>
-                </a:solidFill>
-                <a:latin typeface="Calibri" pitchFamily="34" charset="0"/>
-                <a:ea typeface="Calibri" pitchFamily="34" charset="-122"/>
-                <a:cs typeface="Calibri" pitchFamily="34" charset="-120"/>
-              </a:rPr>
-              <a:t>Docker + Logik + Oberfläche in einem Befehl</a:t>
-            </a:r>
-            <a:endParaRPr lang="en-US" sz="1100" dirty="0"/>
-          </a:p>
-        </p:txBody>
-      </p:sp>
-      <p:sp>
-        <p:nvSpPr>
-          <p:cNvPr id="14" name="Shape 11"/>
-          <p:cNvSpPr/>
-          <p:nvPr/>
-        </p:nvSpPr>
-        <p:spPr>
-          <a:xfrm>
-            <a:off x="548640" y="1801368"/>
-            <a:ext cx="566928" cy="566928"/>
-          </a:xfrm>
-          <a:prstGeom prst="ellipse">
-            <a:avLst/>
-          </a:prstGeom>
-          <a:solidFill>
-            <a:srgbClr val="C5394A"/>
-          </a:solidFill>
-          <a:ln/>
-        </p:spPr>
-      </p:sp>
-      <p:pic>
-        <p:nvPicPr>
-          <p:cNvPr id="15" name="Image 1" descr="preencoded.png">    </p:cNvPr>
-          <p:cNvPicPr>
-            <a:picLocks noChangeAspect="1"/>
-          </p:cNvPicPr>
-          <p:nvPr/>
-        </p:nvPicPr>
-        <p:blipFill>
-          <a:blip r:embed="rId2"/>
-          <a:stretch>
-            <a:fillRect/>
-          </a:stretch>
-        </p:blipFill>
-        <p:spPr>
-          <a:xfrm>
-            <a:off x="684703" y="1937431"/>
-            <a:ext cx="294803" cy="294803"/>
-          </a:xfrm>
-          <a:prstGeom prst="rect">
-            <a:avLst/>
-          </a:prstGeom>
-        </p:spPr>
-      </p:pic>
-      <p:sp>
-        <p:nvSpPr>
-          <p:cNvPr id="16" name="Text 12"/>
-          <p:cNvSpPr/>
-          <p:nvPr/>
-        </p:nvSpPr>
-        <p:spPr>
-          <a:xfrm>
-            <a:off x="1325880" y="1746504"/>
-            <a:ext cx="6309360" cy="347472"/>
-          </a:xfrm>
-          <a:prstGeom prst="rect">
-            <a:avLst/>
-          </a:prstGeom>
-          <a:noFill/>
-          <a:ln/>
-        </p:spPr>
-        <p:txBody>
-          <a:bodyPr wrap="square" lIns="0" tIns="0" rIns="0" bIns="0" rtlCol="0" anchor="ctr"/>
-          <a:lstStyle/>
-          <a:p>
-            <a:pPr indent="0" marL="0">
-              <a:buNone/>
-            </a:pPr>
-            <a:r>
-              <a:rPr lang="en-US" sz="1600" b="1" dirty="0">
-                <a:solidFill>
-                  <a:srgbClr val="2A2D34"/>
-                </a:solidFill>
-                <a:latin typeface="Trebuchet MS" pitchFamily="34" charset="0"/>
-                <a:ea typeface="Trebuchet MS" pitchFamily="34" charset="-122"/>
-                <a:cs typeface="Trebuchet MS" pitchFamily="34" charset="-120"/>
-              </a:rPr>
-              <a:t>1.  Registrierung &amp; Login</a:t>
-            </a:r>
-            <a:endParaRPr lang="en-US" sz="1600" dirty="0"/>
-          </a:p>
-        </p:txBody>
-      </p:sp>
-      <p:sp>
-        <p:nvSpPr>
-          <p:cNvPr id="17" name="Text 13"/>
-          <p:cNvSpPr/>
-          <p:nvPr/>
-        </p:nvSpPr>
-        <p:spPr>
-          <a:xfrm>
-            <a:off x="1325880" y="2075688"/>
-            <a:ext cx="6309360" cy="310896"/>
-          </a:xfrm>
-          <a:prstGeom prst="rect">
-            <a:avLst/>
-          </a:prstGeom>
-          <a:noFill/>
-          <a:ln/>
-        </p:spPr>
-        <p:txBody>
-          <a:bodyPr wrap="square" lIns="0" tIns="0" rIns="0" bIns="0" rtlCol="0" anchor="ctr"/>
-          <a:lstStyle/>
-          <a:p>
-            <a:pPr indent="0" marL="0">
-              <a:buNone/>
-            </a:pPr>
-            <a:r>
-              <a:rPr lang="en-US" sz="1200" dirty="0">
-                <a:solidFill>
-                  <a:srgbClr val="63676E"/>
-                </a:solidFill>
-                <a:latin typeface="Calibri" pitchFamily="34" charset="0"/>
-                <a:ea typeface="Calibri" pitchFamily="34" charset="-122"/>
-                <a:cs typeface="Calibri" pitchFamily="34" charset="-120"/>
-              </a:rPr>
-              <a:t>Konto anlegen und einsteigen</a:t>
-            </a:r>
-            <a:endParaRPr lang="en-US" sz="1200" dirty="0"/>
-          </a:p>
-        </p:txBody>
-      </p:sp>
-      <p:sp>
-        <p:nvSpPr>
-          <p:cNvPr id="18" name="Shape 14"/>
-          <p:cNvSpPr/>
-          <p:nvPr/>
-        </p:nvSpPr>
-        <p:spPr>
-          <a:xfrm>
-            <a:off x="548640" y="2587752"/>
-            <a:ext cx="566928" cy="566928"/>
-          </a:xfrm>
-          <a:prstGeom prst="ellipse">
-            <a:avLst/>
-          </a:prstGeom>
-          <a:solidFill>
-            <a:srgbClr val="3E4856"/>
-          </a:solidFill>
-          <a:ln/>
-        </p:spPr>
-      </p:sp>
-      <p:pic>
-        <p:nvPicPr>
-          <p:cNvPr id="19" name="Image 2" descr="preencoded.png">    </p:cNvPr>
+          <p:cNvPr id="11" name="Image 0" descr="preencoded.png"/>
           <p:cNvPicPr>
             <a:picLocks noChangeAspect="1"/>
           </p:cNvPicPr>
@@ -10104,8 +9585,8 @@
         </p:blipFill>
         <p:spPr>
           <a:xfrm>
-            <a:off x="684703" y="2723815"/>
-            <a:ext cx="294803" cy="294803"/>
+            <a:off x="9427464" y="3118104"/>
+            <a:ext cx="713232" cy="713232"/>
           </a:xfrm>
           <a:prstGeom prst="rect">
             <a:avLst/>
@@ -10114,14 +9595,14 @@
       </p:pic>
       <p:sp>
         <p:nvSpPr>
-          <p:cNvPr id="20" name="Text 15"/>
-          <p:cNvSpPr/>
-          <p:nvPr/>
-        </p:nvSpPr>
-        <p:spPr>
-          <a:xfrm>
-            <a:off x="1325880" y="2532888"/>
-            <a:ext cx="6309360" cy="347472"/>
+          <p:cNvPr id="12" name="Text 9"/>
+          <p:cNvSpPr/>
+          <p:nvPr/>
+        </p:nvSpPr>
+        <p:spPr>
+          <a:xfrm>
+            <a:off x="7955280" y="4297680"/>
+            <a:ext cx="3657600" cy="457200"/>
           </a:xfrm>
           <a:prstGeom prst="rect">
             <a:avLst/>
@@ -10133,34 +9614,34 @@
           <a:bodyPr wrap="square" lIns="0" tIns="0" rIns="0" bIns="0" rtlCol="0" anchor="ctr"/>
           <a:lstStyle/>
           <a:p>
-            <a:pPr indent="0" marL="0">
-              <a:buNone/>
-            </a:pPr>
-            <a:r>
-              <a:rPr lang="en-US" sz="1600" b="1" dirty="0">
-                <a:solidFill>
-                  <a:srgbClr val="2A2D34"/>
-                </a:solidFill>
-                <a:latin typeface="Trebuchet MS" pitchFamily="34" charset="0"/>
-                <a:ea typeface="Trebuchet MS" pitchFamily="34" charset="-122"/>
-                <a:cs typeface="Trebuchet MS" pitchFamily="34" charset="-120"/>
-              </a:rPr>
-              <a:t>2.  Beitrag erstellen</a:t>
-            </a:r>
-            <a:endParaRPr lang="en-US" sz="1600" dirty="0"/>
-          </a:p>
-        </p:txBody>
-      </p:sp>
-      <p:sp>
-        <p:nvSpPr>
-          <p:cNvPr id="21" name="Text 16"/>
-          <p:cNvSpPr/>
-          <p:nvPr/>
-        </p:nvSpPr>
-        <p:spPr>
-          <a:xfrm>
-            <a:off x="1325880" y="2862072"/>
-            <a:ext cx="6309360" cy="310896"/>
+            <a:pPr marL="0" indent="0" algn="ctr">
+              <a:buNone/>
+            </a:pPr>
+            <a:r>
+              <a:rPr lang="en-US" sz="2000" b="1" dirty="0">
+                <a:solidFill>
+                  <a:srgbClr val="3E4856"/>
+                </a:solidFill>
+                <a:latin typeface="Courier New" pitchFamily="34" charset="0"/>
+                <a:ea typeface="Courier New" pitchFamily="34" charset="-122"/>
+                <a:cs typeface="Courier New" pitchFamily="34" charset="-120"/>
+              </a:rPr>
+              <a:t>./start.sh</a:t>
+            </a:r>
+            <a:endParaRPr lang="en-US" sz="2000" dirty="0"/>
+          </a:p>
+        </p:txBody>
+      </p:sp>
+      <p:sp>
+        <p:nvSpPr>
+          <p:cNvPr id="13" name="Text 10"/>
+          <p:cNvSpPr/>
+          <p:nvPr/>
+        </p:nvSpPr>
+        <p:spPr>
+          <a:xfrm>
+            <a:off x="7955280" y="4754880"/>
+            <a:ext cx="3657600" cy="365760"/>
           </a:xfrm>
           <a:prstGeom prst="rect">
             <a:avLst/>
@@ -10172,11 +9653,11 @@
           <a:bodyPr wrap="square" lIns="0" tIns="0" rIns="0" bIns="0" rtlCol="0" anchor="ctr"/>
           <a:lstStyle/>
           <a:p>
-            <a:pPr indent="0" marL="0">
-              <a:buNone/>
-            </a:pPr>
-            <a:r>
-              <a:rPr lang="en-US" sz="1200" dirty="0">
+            <a:pPr marL="0" indent="0" algn="ctr">
+              <a:buNone/>
+            </a:pPr>
+            <a:r>
+              <a:rPr lang="en-US" sz="1100" i="1" dirty="0">
                 <a:solidFill>
                   <a:srgbClr val="63676E"/>
                 </a:solidFill>
@@ -10184,21 +9665,21 @@
                 <a:ea typeface="Calibri" pitchFamily="34" charset="-122"/>
                 <a:cs typeface="Calibri" pitchFamily="34" charset="-120"/>
               </a:rPr>
-              <a:t>Text + Bild – sofort im Feed</a:t>
-            </a:r>
-            <a:endParaRPr lang="en-US" sz="1200" dirty="0"/>
-          </a:p>
-        </p:txBody>
-      </p:sp>
-      <p:sp>
-        <p:nvSpPr>
-          <p:cNvPr id="22" name="Shape 17"/>
-          <p:cNvSpPr/>
-          <p:nvPr/>
-        </p:nvSpPr>
-        <p:spPr>
-          <a:xfrm>
-            <a:off x="548640" y="3374136"/>
+              <a:t>Docker + Logik + Oberfläche in einem Befehl</a:t>
+            </a:r>
+            <a:endParaRPr lang="en-US" sz="1100" dirty="0"/>
+          </a:p>
+        </p:txBody>
+      </p:sp>
+      <p:sp>
+        <p:nvSpPr>
+          <p:cNvPr id="14" name="Shape 11"/>
+          <p:cNvSpPr/>
+          <p:nvPr/>
+        </p:nvSpPr>
+        <p:spPr>
+          <a:xfrm>
+            <a:off x="548640" y="1801368"/>
             <a:ext cx="566928" cy="566928"/>
           </a:xfrm>
           <a:prstGeom prst="ellipse">
@@ -10212,7 +9693,7 @@
       </p:sp>
       <p:pic>
         <p:nvPicPr>
-          <p:cNvPr id="23" name="Image 3" descr="preencoded.png">    </p:cNvPr>
+          <p:cNvPr id="15" name="Image 1" descr="preencoded.png"/>
           <p:cNvPicPr>
             <a:picLocks noChangeAspect="1"/>
           </p:cNvPicPr>
@@ -10226,7 +9707,7 @@
         </p:blipFill>
         <p:spPr>
           <a:xfrm>
-            <a:off x="684703" y="3510199"/>
+            <a:off x="684703" y="1937431"/>
             <a:ext cx="294803" cy="294803"/>
           </a:xfrm>
           <a:prstGeom prst="rect">
@@ -10236,13 +9717,13 @@
       </p:pic>
       <p:sp>
         <p:nvSpPr>
-          <p:cNvPr id="24" name="Text 18"/>
-          <p:cNvSpPr/>
-          <p:nvPr/>
-        </p:nvSpPr>
-        <p:spPr>
-          <a:xfrm>
-            <a:off x="1325880" y="3319272"/>
+          <p:cNvPr id="16" name="Text 12"/>
+          <p:cNvSpPr/>
+          <p:nvPr/>
+        </p:nvSpPr>
+        <p:spPr>
+          <a:xfrm>
+            <a:off x="1325880" y="1746504"/>
             <a:ext cx="6309360" cy="347472"/>
           </a:xfrm>
           <a:prstGeom prst="rect">
@@ -10255,7 +9736,7 @@
           <a:bodyPr wrap="square" lIns="0" tIns="0" rIns="0" bIns="0" rtlCol="0" anchor="ctr"/>
           <a:lstStyle/>
           <a:p>
-            <a:pPr indent="0" marL="0">
+            <a:pPr marL="0" indent="0">
               <a:buNone/>
             </a:pPr>
             <a:r>
@@ -10267,7 +9748,7 @@
                 <a:ea typeface="Trebuchet MS" pitchFamily="34" charset="-122"/>
                 <a:cs typeface="Trebuchet MS" pitchFamily="34" charset="-120"/>
               </a:rPr>
-              <a:t>3.  Like &amp; Kommentar</a:t>
+              <a:t>1.  Registrierung &amp; Login</a:t>
             </a:r>
             <a:endParaRPr lang="en-US" sz="1600" dirty="0"/>
           </a:p>
@@ -10275,13 +9756,13 @@
       </p:sp>
       <p:sp>
         <p:nvSpPr>
-          <p:cNvPr id="25" name="Text 19"/>
-          <p:cNvSpPr/>
-          <p:nvPr/>
-        </p:nvSpPr>
-        <p:spPr>
-          <a:xfrm>
-            <a:off x="1325880" y="3648456"/>
+          <p:cNvPr id="17" name="Text 13"/>
+          <p:cNvSpPr/>
+          <p:nvPr/>
+        </p:nvSpPr>
+        <p:spPr>
+          <a:xfrm>
+            <a:off x="1325880" y="2075688"/>
             <a:ext cx="6309360" cy="310896"/>
           </a:xfrm>
           <a:prstGeom prst="rect">
@@ -10294,7 +9775,7 @@
           <a:bodyPr wrap="square" lIns="0" tIns="0" rIns="0" bIns="0" rtlCol="0" anchor="ctr"/>
           <a:lstStyle/>
           <a:p>
-            <a:pPr indent="0" marL="0">
+            <a:pPr marL="0" indent="0">
               <a:buNone/>
             </a:pPr>
             <a:r>
@@ -10306,7 +9787,7 @@
                 <a:ea typeface="Calibri" pitchFamily="34" charset="-122"/>
                 <a:cs typeface="Calibri" pitchFamily="34" charset="-120"/>
               </a:rPr>
-              <a:t>Reaktionen in Echtzeit</a:t>
+              <a:t>Konto anlegen und einsteigen</a:t>
             </a:r>
             <a:endParaRPr lang="en-US" sz="1200" dirty="0"/>
           </a:p>
@@ -10314,13 +9795,13 @@
       </p:sp>
       <p:sp>
         <p:nvSpPr>
-          <p:cNvPr id="26" name="Shape 20"/>
-          <p:cNvSpPr/>
-          <p:nvPr/>
-        </p:nvSpPr>
-        <p:spPr>
-          <a:xfrm>
-            <a:off x="548640" y="4160520"/>
+          <p:cNvPr id="18" name="Shape 14"/>
+          <p:cNvSpPr/>
+          <p:nvPr/>
+        </p:nvSpPr>
+        <p:spPr>
+          <a:xfrm>
+            <a:off x="548640" y="2587752"/>
             <a:ext cx="566928" cy="566928"/>
           </a:xfrm>
           <a:prstGeom prst="ellipse">
@@ -10334,21 +9815,21 @@
       </p:sp>
       <p:pic>
         <p:nvPicPr>
-          <p:cNvPr id="27" name="Image 4" descr="preencoded.png">    </p:cNvPr>
+          <p:cNvPr id="19" name="Image 2" descr="preencoded.png"/>
           <p:cNvPicPr>
             <a:picLocks noChangeAspect="1"/>
           </p:cNvPicPr>
           <p:nvPr/>
         </p:nvPicPr>
         <p:blipFill>
-          <a:blip r:embed="rId5"/>
+          <a:blip r:embed="rId4"/>
           <a:stretch>
             <a:fillRect/>
           </a:stretch>
         </p:blipFill>
         <p:spPr>
           <a:xfrm>
-            <a:off x="684703" y="4296583"/>
+            <a:off x="684703" y="2723815"/>
             <a:ext cx="294803" cy="294803"/>
           </a:xfrm>
           <a:prstGeom prst="rect">
@@ -10358,13 +9839,13 @@
       </p:pic>
       <p:sp>
         <p:nvSpPr>
-          <p:cNvPr id="28" name="Text 21"/>
-          <p:cNvSpPr/>
-          <p:nvPr/>
-        </p:nvSpPr>
-        <p:spPr>
-          <a:xfrm>
-            <a:off x="1325880" y="4105656"/>
+          <p:cNvPr id="20" name="Text 15"/>
+          <p:cNvSpPr/>
+          <p:nvPr/>
+        </p:nvSpPr>
+        <p:spPr>
+          <a:xfrm>
+            <a:off x="1325880" y="2532888"/>
             <a:ext cx="6309360" cy="347472"/>
           </a:xfrm>
           <a:prstGeom prst="rect">
@@ -10377,7 +9858,7 @@
           <a:bodyPr wrap="square" lIns="0" tIns="0" rIns="0" bIns="0" rtlCol="0" anchor="ctr"/>
           <a:lstStyle/>
           <a:p>
-            <a:pPr indent="0" marL="0">
+            <a:pPr marL="0" indent="0">
               <a:buNone/>
             </a:pPr>
             <a:r>
@@ -10389,7 +9870,7 @@
                 <a:ea typeface="Trebuchet MS" pitchFamily="34" charset="-122"/>
                 <a:cs typeface="Trebuchet MS" pitchFamily="34" charset="-120"/>
               </a:rPr>
-              <a:t>4.  Folgen &amp; Feed-Tabs</a:t>
+              <a:t>2.  Beitrag erstellen</a:t>
             </a:r>
             <a:endParaRPr lang="en-US" sz="1600" dirty="0"/>
           </a:p>
@@ -10397,13 +9878,13 @@
       </p:sp>
       <p:sp>
         <p:nvSpPr>
-          <p:cNvPr id="29" name="Text 22"/>
-          <p:cNvSpPr/>
-          <p:nvPr/>
-        </p:nvSpPr>
-        <p:spPr>
-          <a:xfrm>
-            <a:off x="1325880" y="4434840"/>
+          <p:cNvPr id="21" name="Text 16"/>
+          <p:cNvSpPr/>
+          <p:nvPr/>
+        </p:nvSpPr>
+        <p:spPr>
+          <a:xfrm>
+            <a:off x="1325880" y="2862072"/>
             <a:ext cx="6309360" cy="310896"/>
           </a:xfrm>
           <a:prstGeom prst="rect">
@@ -10416,7 +9897,7 @@
           <a:bodyPr wrap="square" lIns="0" tIns="0" rIns="0" bIns="0" rtlCol="0" anchor="ctr"/>
           <a:lstStyle/>
           <a:p>
-            <a:pPr indent="0" marL="0">
+            <a:pPr marL="0" indent="0">
               <a:buNone/>
             </a:pPr>
             <a:r>
@@ -10428,7 +9909,7 @@
                 <a:ea typeface="Calibri" pitchFamily="34" charset="-122"/>
                 <a:cs typeface="Calibri" pitchFamily="34" charset="-120"/>
               </a:rPr>
-              <a:t>Gefolgte-Feed gezielt anzeigen</a:t>
+              <a:t>Text + Bild – sofort im Feed</a:t>
             </a:r>
             <a:endParaRPr lang="en-US" sz="1200" dirty="0"/>
           </a:p>
@@ -10436,13 +9917,13 @@
       </p:sp>
       <p:sp>
         <p:nvSpPr>
-          <p:cNvPr id="30" name="Shape 23"/>
-          <p:cNvSpPr/>
-          <p:nvPr/>
-        </p:nvSpPr>
-        <p:spPr>
-          <a:xfrm>
-            <a:off x="548640" y="4946904"/>
+          <p:cNvPr id="22" name="Shape 17"/>
+          <p:cNvSpPr/>
+          <p:nvPr/>
+        </p:nvSpPr>
+        <p:spPr>
+          <a:xfrm>
+            <a:off x="548640" y="3374136"/>
             <a:ext cx="566928" cy="566928"/>
           </a:xfrm>
           <a:prstGeom prst="ellipse">
@@ -10456,21 +9937,21 @@
       </p:sp>
       <p:pic>
         <p:nvPicPr>
-          <p:cNvPr id="31" name="Image 5" descr="preencoded.png">    </p:cNvPr>
+          <p:cNvPr id="23" name="Image 3" descr="preencoded.png"/>
           <p:cNvPicPr>
             <a:picLocks noChangeAspect="1"/>
           </p:cNvPicPr>
           <p:nvPr/>
         </p:nvPicPr>
         <p:blipFill>
-          <a:blip r:embed="rId6"/>
+          <a:blip r:embed="rId4"/>
           <a:stretch>
             <a:fillRect/>
           </a:stretch>
         </p:blipFill>
         <p:spPr>
           <a:xfrm>
-            <a:off x="684703" y="5082967"/>
+            <a:off x="684703" y="3510199"/>
             <a:ext cx="294803" cy="294803"/>
           </a:xfrm>
           <a:prstGeom prst="rect">
@@ -10480,13 +9961,13 @@
       </p:pic>
       <p:sp>
         <p:nvSpPr>
-          <p:cNvPr id="32" name="Text 24"/>
-          <p:cNvSpPr/>
-          <p:nvPr/>
-        </p:nvSpPr>
-        <p:spPr>
-          <a:xfrm>
-            <a:off x="1325880" y="4892040"/>
+          <p:cNvPr id="24" name="Text 18"/>
+          <p:cNvSpPr/>
+          <p:nvPr/>
+        </p:nvSpPr>
+        <p:spPr>
+          <a:xfrm>
+            <a:off x="1325880" y="3319272"/>
             <a:ext cx="6309360" cy="347472"/>
           </a:xfrm>
           <a:prstGeom prst="rect">
@@ -10499,7 +9980,7 @@
           <a:bodyPr wrap="square" lIns="0" tIns="0" rIns="0" bIns="0" rtlCol="0" anchor="ctr"/>
           <a:lstStyle/>
           <a:p>
-            <a:pPr indent="0" marL="0">
+            <a:pPr marL="0" indent="0">
               <a:buNone/>
             </a:pPr>
             <a:r>
@@ -10511,6 +9992,250 @@
                 <a:ea typeface="Trebuchet MS" pitchFamily="34" charset="-122"/>
                 <a:cs typeface="Trebuchet MS" pitchFamily="34" charset="-120"/>
               </a:rPr>
+              <a:t>3.  Like &amp; Kommentar</a:t>
+            </a:r>
+            <a:endParaRPr lang="en-US" sz="1600" dirty="0"/>
+          </a:p>
+        </p:txBody>
+      </p:sp>
+      <p:sp>
+        <p:nvSpPr>
+          <p:cNvPr id="25" name="Text 19"/>
+          <p:cNvSpPr/>
+          <p:nvPr/>
+        </p:nvSpPr>
+        <p:spPr>
+          <a:xfrm>
+            <a:off x="1325880" y="3648456"/>
+            <a:ext cx="6309360" cy="310896"/>
+          </a:xfrm>
+          <a:prstGeom prst="rect">
+            <a:avLst/>
+          </a:prstGeom>
+          <a:noFill/>
+          <a:ln/>
+        </p:spPr>
+        <p:txBody>
+          <a:bodyPr wrap="square" lIns="0" tIns="0" rIns="0" bIns="0" rtlCol="0" anchor="ctr"/>
+          <a:lstStyle/>
+          <a:p>
+            <a:pPr marL="0" indent="0">
+              <a:buNone/>
+            </a:pPr>
+            <a:r>
+              <a:rPr lang="en-US" sz="1200" dirty="0">
+                <a:solidFill>
+                  <a:srgbClr val="63676E"/>
+                </a:solidFill>
+                <a:latin typeface="Calibri" pitchFamily="34" charset="0"/>
+                <a:ea typeface="Calibri" pitchFamily="34" charset="-122"/>
+                <a:cs typeface="Calibri" pitchFamily="34" charset="-120"/>
+              </a:rPr>
+              <a:t>Reaktionen in Echtzeit</a:t>
+            </a:r>
+            <a:endParaRPr lang="en-US" sz="1200" dirty="0"/>
+          </a:p>
+        </p:txBody>
+      </p:sp>
+      <p:sp>
+        <p:nvSpPr>
+          <p:cNvPr id="26" name="Shape 20"/>
+          <p:cNvSpPr/>
+          <p:nvPr/>
+        </p:nvSpPr>
+        <p:spPr>
+          <a:xfrm>
+            <a:off x="548640" y="4160520"/>
+            <a:ext cx="566928" cy="566928"/>
+          </a:xfrm>
+          <a:prstGeom prst="ellipse">
+            <a:avLst/>
+          </a:prstGeom>
+          <a:solidFill>
+            <a:srgbClr val="3E4856"/>
+          </a:solidFill>
+          <a:ln/>
+        </p:spPr>
+      </p:sp>
+      <p:pic>
+        <p:nvPicPr>
+          <p:cNvPr id="27" name="Image 4" descr="preencoded.png"/>
+          <p:cNvPicPr>
+            <a:picLocks noChangeAspect="1"/>
+          </p:cNvPicPr>
+          <p:nvPr/>
+        </p:nvPicPr>
+        <p:blipFill>
+          <a:blip r:embed="rId4"/>
+          <a:stretch>
+            <a:fillRect/>
+          </a:stretch>
+        </p:blipFill>
+        <p:spPr>
+          <a:xfrm>
+            <a:off x="684703" y="4296583"/>
+            <a:ext cx="294803" cy="294803"/>
+          </a:xfrm>
+          <a:prstGeom prst="rect">
+            <a:avLst/>
+          </a:prstGeom>
+        </p:spPr>
+      </p:pic>
+      <p:sp>
+        <p:nvSpPr>
+          <p:cNvPr id="28" name="Text 21"/>
+          <p:cNvSpPr/>
+          <p:nvPr/>
+        </p:nvSpPr>
+        <p:spPr>
+          <a:xfrm>
+            <a:off x="1325880" y="4105656"/>
+            <a:ext cx="6309360" cy="347472"/>
+          </a:xfrm>
+          <a:prstGeom prst="rect">
+            <a:avLst/>
+          </a:prstGeom>
+          <a:noFill/>
+          <a:ln/>
+        </p:spPr>
+        <p:txBody>
+          <a:bodyPr wrap="square" lIns="0" tIns="0" rIns="0" bIns="0" rtlCol="0" anchor="ctr"/>
+          <a:lstStyle/>
+          <a:p>
+            <a:pPr marL="0" indent="0">
+              <a:buNone/>
+            </a:pPr>
+            <a:r>
+              <a:rPr lang="en-US" sz="1600" b="1" dirty="0">
+                <a:solidFill>
+                  <a:srgbClr val="2A2D34"/>
+                </a:solidFill>
+                <a:latin typeface="Trebuchet MS" pitchFamily="34" charset="0"/>
+                <a:ea typeface="Trebuchet MS" pitchFamily="34" charset="-122"/>
+                <a:cs typeface="Trebuchet MS" pitchFamily="34" charset="-120"/>
+              </a:rPr>
+              <a:t>4.  Folgen &amp; Feed-Tabs</a:t>
+            </a:r>
+            <a:endParaRPr lang="en-US" sz="1600" dirty="0"/>
+          </a:p>
+        </p:txBody>
+      </p:sp>
+      <p:sp>
+        <p:nvSpPr>
+          <p:cNvPr id="29" name="Text 22"/>
+          <p:cNvSpPr/>
+          <p:nvPr/>
+        </p:nvSpPr>
+        <p:spPr>
+          <a:xfrm>
+            <a:off x="1325880" y="4434840"/>
+            <a:ext cx="6309360" cy="310896"/>
+          </a:xfrm>
+          <a:prstGeom prst="rect">
+            <a:avLst/>
+          </a:prstGeom>
+          <a:noFill/>
+          <a:ln/>
+        </p:spPr>
+        <p:txBody>
+          <a:bodyPr wrap="square" lIns="0" tIns="0" rIns="0" bIns="0" rtlCol="0" anchor="ctr"/>
+          <a:lstStyle/>
+          <a:p>
+            <a:pPr marL="0" indent="0">
+              <a:buNone/>
+            </a:pPr>
+            <a:r>
+              <a:rPr lang="en-US" sz="1200" dirty="0">
+                <a:solidFill>
+                  <a:srgbClr val="63676E"/>
+                </a:solidFill>
+                <a:latin typeface="Calibri" pitchFamily="34" charset="0"/>
+                <a:ea typeface="Calibri" pitchFamily="34" charset="-122"/>
+                <a:cs typeface="Calibri" pitchFamily="34" charset="-120"/>
+              </a:rPr>
+              <a:t>Gefolgte-Feed gezielt anzeigen</a:t>
+            </a:r>
+            <a:endParaRPr lang="en-US" sz="1200" dirty="0"/>
+          </a:p>
+        </p:txBody>
+      </p:sp>
+      <p:sp>
+        <p:nvSpPr>
+          <p:cNvPr id="30" name="Shape 23"/>
+          <p:cNvSpPr/>
+          <p:nvPr/>
+        </p:nvSpPr>
+        <p:spPr>
+          <a:xfrm>
+            <a:off x="548640" y="4946904"/>
+            <a:ext cx="566928" cy="566928"/>
+          </a:xfrm>
+          <a:prstGeom prst="ellipse">
+            <a:avLst/>
+          </a:prstGeom>
+          <a:solidFill>
+            <a:srgbClr val="C5394A"/>
+          </a:solidFill>
+          <a:ln/>
+        </p:spPr>
+      </p:sp>
+      <p:pic>
+        <p:nvPicPr>
+          <p:cNvPr id="31" name="Image 5" descr="preencoded.png"/>
+          <p:cNvPicPr>
+            <a:picLocks noChangeAspect="1"/>
+          </p:cNvPicPr>
+          <p:nvPr/>
+        </p:nvPicPr>
+        <p:blipFill>
+          <a:blip r:embed="rId4"/>
+          <a:stretch>
+            <a:fillRect/>
+          </a:stretch>
+        </p:blipFill>
+        <p:spPr>
+          <a:xfrm>
+            <a:off x="684703" y="5082967"/>
+            <a:ext cx="294803" cy="294803"/>
+          </a:xfrm>
+          <a:prstGeom prst="rect">
+            <a:avLst/>
+          </a:prstGeom>
+        </p:spPr>
+      </p:pic>
+      <p:sp>
+        <p:nvSpPr>
+          <p:cNvPr id="32" name="Text 24"/>
+          <p:cNvSpPr/>
+          <p:nvPr/>
+        </p:nvSpPr>
+        <p:spPr>
+          <a:xfrm>
+            <a:off x="1325880" y="4892040"/>
+            <a:ext cx="6309360" cy="347472"/>
+          </a:xfrm>
+          <a:prstGeom prst="rect">
+            <a:avLst/>
+          </a:prstGeom>
+          <a:noFill/>
+          <a:ln/>
+        </p:spPr>
+        <p:txBody>
+          <a:bodyPr wrap="square" lIns="0" tIns="0" rIns="0" bIns="0" rtlCol="0" anchor="ctr"/>
+          <a:lstStyle/>
+          <a:p>
+            <a:pPr marL="0" indent="0">
+              <a:buNone/>
+            </a:pPr>
+            <a:r>
+              <a:rPr lang="en-US" sz="1600" b="1" dirty="0">
+                <a:solidFill>
+                  <a:srgbClr val="2A2D34"/>
+                </a:solidFill>
+                <a:latin typeface="Trebuchet MS" pitchFamily="34" charset="0"/>
+                <a:ea typeface="Trebuchet MS" pitchFamily="34" charset="-122"/>
+                <a:cs typeface="Trebuchet MS" pitchFamily="34" charset="-120"/>
+              </a:rPr>
               <a:t>5.  Profil &amp; Bio</a:t>
             </a:r>
             <a:endParaRPr lang="en-US" sz="1600" dirty="0"/>
@@ -10538,7 +10263,7 @@
           <a:bodyPr wrap="square" lIns="0" tIns="0" rIns="0" bIns="0" rtlCol="0" anchor="ctr"/>
           <a:lstStyle/>
           <a:p>
-            <a:pPr indent="0" marL="0">
+            <a:pPr marL="0" indent="0">
               <a:buNone/>
             </a:pPr>
             <a:r>
@@ -10572,6 +10297,7 @@
         <a:solidFill>
           <a:srgbClr val="C5394A"/>
         </a:solidFill>
+        <a:effectLst/>
       </p:bgPr>
     </p:bg>
     <p:spTree>
@@ -10617,7 +10343,7 @@
         <p:spPr>
           <a:xfrm>
             <a:off x="8860536" y="2020824"/>
-            <a:ext cx="987552" cy="-658368"/>
+            <a:ext cx="987552" cy="0"/>
           </a:xfrm>
           <a:prstGeom prst="line">
             <a:avLst/>
@@ -10686,7 +10412,7 @@
         <p:spPr>
           <a:xfrm>
             <a:off x="9957816" y="2734056"/>
-            <a:ext cx="1042416" cy="-768096"/>
+            <a:ext cx="1042416" cy="0"/>
           </a:xfrm>
           <a:prstGeom prst="line">
             <a:avLst/>
@@ -10755,7 +10481,7 @@
         <p:spPr>
           <a:xfrm>
             <a:off x="10725912" y="3227832"/>
-            <a:ext cx="1097280" cy="-603504"/>
+            <a:ext cx="1097280" cy="0"/>
           </a:xfrm>
           <a:prstGeom prst="line">
             <a:avLst/>
@@ -10898,7 +10624,7 @@
         <p:spPr>
           <a:xfrm>
             <a:off x="9500616" y="4782312"/>
-            <a:ext cx="740664" cy="-493776"/>
+            <a:ext cx="740664" cy="0"/>
           </a:xfrm>
           <a:prstGeom prst="line">
             <a:avLst/>
@@ -10967,7 +10693,7 @@
         <p:spPr>
           <a:xfrm>
             <a:off x="10323576" y="5317236"/>
-            <a:ext cx="781812" cy="-576072"/>
+            <a:ext cx="781812" cy="0"/>
           </a:xfrm>
           <a:prstGeom prst="line">
             <a:avLst/>
@@ -11036,7 +10762,7 @@
         <p:spPr>
           <a:xfrm>
             <a:off x="10899648" y="5687568"/>
-            <a:ext cx="822960" cy="-452628"/>
+            <a:ext cx="822960" cy="0"/>
           </a:xfrm>
           <a:prstGeom prst="line">
             <a:avLst/>
@@ -11191,11 +10917,11 @@
           <a:bodyPr wrap="square" rtlCol="0" anchor="ctr"/>
           <a:lstStyle/>
           <a:p>
-            <a:pPr indent="0" marL="0">
-              <a:buNone/>
-            </a:pPr>
-            <a:r>
-              <a:rPr lang="en-US" sz="1600" b="1" spc="300" kern="0" dirty="0">
+            <a:pPr marL="0" indent="0">
+              <a:buNone/>
+            </a:pPr>
+            <a:r>
+              <a:rPr lang="en-US" sz="1600" b="1" kern="0" spc="300" dirty="0">
                 <a:solidFill>
                   <a:srgbClr val="F8EAEC"/>
                 </a:solidFill>
@@ -11230,7 +10956,7 @@
           <a:bodyPr wrap="square" rtlCol="0" anchor="ctr"/>
           <a:lstStyle/>
           <a:p>
-            <a:pPr indent="0" marL="0">
+            <a:pPr marL="0" indent="0">
               <a:buNone/>
             </a:pPr>
             <a:r>
@@ -11289,7 +11015,7 @@
           <a:bodyPr wrap="square" rtlCol="0" anchor="ctr"/>
           <a:lstStyle/>
           <a:p>
-            <a:pPr indent="0" marL="0">
+            <a:pPr marL="0" indent="0">
               <a:buNone/>
             </a:pPr>
             <a:r>
@@ -11323,6 +11049,7 @@
         <a:solidFill>
           <a:srgbClr val="FFFFFF"/>
         </a:solidFill>
+        <a:effectLst/>
       </p:bgPr>
     </p:bg>
     <p:spTree>
@@ -11400,7 +11127,7 @@
           <a:bodyPr wrap="square" lIns="0" tIns="0" rIns="0" bIns="0" rtlCol="0" anchor="ctr"/>
           <a:lstStyle/>
           <a:p>
-            <a:pPr algn="l" indent="0" marL="0">
+            <a:pPr marL="0" indent="0" algn="l">
               <a:buNone/>
             </a:pPr>
             <a:r>
@@ -11439,7 +11166,7 @@
           <a:bodyPr wrap="square" lIns="0" tIns="0" rIns="0" bIns="0" rtlCol="0" anchor="ctr"/>
           <a:lstStyle/>
           <a:p>
-            <a:pPr algn="r" indent="0" marL="0">
+            <a:pPr marL="0" indent="0" algn="r">
               <a:buNone/>
             </a:pPr>
             <a:r>
@@ -11478,11 +11205,11 @@
           <a:bodyPr wrap="square" lIns="0" tIns="0" rIns="0" bIns="0" rtlCol="0" anchor="ctr"/>
           <a:lstStyle/>
           <a:p>
-            <a:pPr algn="r" indent="0" marL="0">
-              <a:buNone/>
-            </a:pPr>
-            <a:r>
-              <a:rPr lang="en-US" sz="900" b="1" spc="100" kern="0" dirty="0">
+            <a:pPr marL="0" indent="0" algn="r">
+              <a:buNone/>
+            </a:pPr>
+            <a:r>
+              <a:rPr lang="en-US" sz="900" b="1" kern="0" spc="100" dirty="0">
                 <a:solidFill>
                   <a:srgbClr val="C5394A"/>
                 </a:solidFill>
@@ -11517,11 +11244,11 @@
           <a:bodyPr wrap="square" lIns="0" tIns="0" rIns="0" bIns="0" rtlCol="0" anchor="ctr"/>
           <a:lstStyle/>
           <a:p>
-            <a:pPr indent="0" marL="0">
-              <a:buNone/>
-            </a:pPr>
-            <a:r>
-              <a:rPr lang="en-US" sz="1200" b="1" spc="200" kern="0" dirty="0">
+            <a:pPr marL="0" indent="0">
+              <a:buNone/>
+            </a:pPr>
+            <a:r>
+              <a:rPr lang="en-US" sz="1200" b="1" kern="0" spc="200" dirty="0">
                 <a:solidFill>
                   <a:srgbClr val="C5394A"/>
                 </a:solidFill>
@@ -11556,7 +11283,7 @@
           <a:bodyPr wrap="square" lIns="0" tIns="0" rIns="0" bIns="0" rtlCol="0" anchor="ctr"/>
           <a:lstStyle/>
           <a:p>
-            <a:pPr indent="0" marL="0">
+            <a:pPr marL="0" indent="0">
               <a:buNone/>
             </a:pPr>
             <a:r>
@@ -11598,7 +11325,7 @@
             <a:prstDash val="solid"/>
           </a:ln>
           <a:effectLst>
-            <a:outerShdw sx="100000" sy="100000" kx="0" ky="0" algn="bl" rotWithShape="0" blurRad="101600" dist="38100" dir="5400000">
+            <a:outerShdw blurRad="101600" dist="38100" dir="5400000" algn="bl" rotWithShape="0">
               <a:srgbClr val="000000">
                 <a:alpha val="8000"/>
               </a:srgbClr>
@@ -11648,14 +11375,14 @@
       </p:sp>
       <p:pic>
         <p:nvPicPr>
-          <p:cNvPr id="12" name="Image 0" descr="preencoded.png">    </p:cNvPr>
+          <p:cNvPr id="12" name="Image 0" descr="preencoded.png"/>
           <p:cNvPicPr>
             <a:picLocks noChangeAspect="1"/>
           </p:cNvPicPr>
           <p:nvPr/>
         </p:nvPicPr>
         <p:blipFill>
-          <a:blip r:embed="rId1"/>
+          <a:blip r:embed="rId3"/>
           <a:stretch>
             <a:fillRect/>
           </a:stretch>
@@ -11691,7 +11418,7 @@
           <a:bodyPr wrap="square" lIns="0" tIns="0" rIns="0" bIns="0" rtlCol="0" anchor="ctr"/>
           <a:lstStyle/>
           <a:p>
-            <a:pPr indent="0" marL="0">
+            <a:pPr marL="0" indent="0">
               <a:buNone/>
             </a:pPr>
             <a:r>
@@ -11730,7 +11457,7 @@
           <a:bodyPr wrap="square" lIns="0" tIns="0" rIns="0" bIns="0" rtlCol="0" anchor="ctr"/>
           <a:lstStyle/>
           <a:p>
-            <a:pPr indent="0" marL="0">
+            <a:pPr marL="0" indent="0">
               <a:buNone/>
             </a:pPr>
             <a:r>
@@ -11769,7 +11496,7 @@
           <a:bodyPr wrap="square" lIns="0" tIns="0" rIns="0" bIns="0" rtlCol="0" anchor="ctr"/>
           <a:lstStyle/>
           <a:p>
-            <a:pPr indent="0" marL="0">
+            <a:pPr marL="0" indent="0">
               <a:buNone/>
             </a:pPr>
             <a:r>
@@ -11811,7 +11538,7 @@
             <a:prstDash val="solid"/>
           </a:ln>
           <a:effectLst>
-            <a:outerShdw sx="100000" sy="100000" kx="0" ky="0" algn="bl" rotWithShape="0" blurRad="101600" dist="38100" dir="5400000">
+            <a:outerShdw blurRad="101600" dist="38100" dir="5400000" algn="bl" rotWithShape="0">
               <a:srgbClr val="000000">
                 <a:alpha val="8000"/>
               </a:srgbClr>
@@ -11861,14 +11588,14 @@
       </p:sp>
       <p:pic>
         <p:nvPicPr>
-          <p:cNvPr id="19" name="Image 1" descr="preencoded.png">    </p:cNvPr>
+          <p:cNvPr id="19" name="Image 1" descr="preencoded.png"/>
           <p:cNvPicPr>
             <a:picLocks noChangeAspect="1"/>
           </p:cNvPicPr>
           <p:nvPr/>
         </p:nvPicPr>
         <p:blipFill>
-          <a:blip r:embed="rId2"/>
+          <a:blip r:embed="rId4"/>
           <a:stretch>
             <a:fillRect/>
           </a:stretch>
@@ -11904,7 +11631,7 @@
           <a:bodyPr wrap="square" lIns="0" tIns="0" rIns="0" bIns="0" rtlCol="0" anchor="ctr"/>
           <a:lstStyle/>
           <a:p>
-            <a:pPr indent="0" marL="0">
+            <a:pPr marL="0" indent="0">
               <a:buNone/>
             </a:pPr>
             <a:r>
@@ -11943,7 +11670,7 @@
           <a:bodyPr wrap="square" lIns="0" tIns="0" rIns="0" bIns="0" rtlCol="0" anchor="ctr"/>
           <a:lstStyle/>
           <a:p>
-            <a:pPr indent="0" marL="0">
+            <a:pPr marL="0" indent="0">
               <a:buNone/>
             </a:pPr>
             <a:r>
@@ -11955,7 +11682,18 @@
                 <a:ea typeface="Trebuchet MS" pitchFamily="34" charset="-122"/>
                 <a:cs typeface="Trebuchet MS" pitchFamily="34" charset="-120"/>
               </a:rPr>
-              <a:t>Die App in Aktion</a:t>
+              <a:t>Die App </a:t>
+            </a:r>
+            <a:r>
+              <a:rPr lang="en-US" sz="1700" b="1" dirty="0" err="1">
+                <a:solidFill>
+                  <a:srgbClr val="2A2D34"/>
+                </a:solidFill>
+                <a:latin typeface="Trebuchet MS" pitchFamily="34" charset="0"/>
+                <a:ea typeface="Trebuchet MS" pitchFamily="34" charset="-122"/>
+                <a:cs typeface="Trebuchet MS" pitchFamily="34" charset="-120"/>
+              </a:rPr>
+              <a:t>Funktionen</a:t>
             </a:r>
             <a:endParaRPr lang="en-US" sz="1700" dirty="0"/>
           </a:p>
@@ -11982,7 +11720,7 @@
           <a:bodyPr wrap="square" lIns="0" tIns="0" rIns="0" bIns="0" rtlCol="0" anchor="ctr"/>
           <a:lstStyle/>
           <a:p>
-            <a:pPr indent="0" marL="0">
+            <a:pPr marL="0" indent="0">
               <a:buNone/>
             </a:pPr>
             <a:r>
@@ -11994,7 +11732,84 @@
                 <a:ea typeface="Calibri" pitchFamily="34" charset="-122"/>
                 <a:cs typeface="Calibri" pitchFamily="34" charset="-120"/>
               </a:rPr>
-              <a:t>Funktionen &amp; Nutzung</a:t>
+              <a:t>Was man </a:t>
+            </a:r>
+            <a:r>
+              <a:rPr lang="en-US" sz="1150" dirty="0" err="1">
+                <a:solidFill>
+                  <a:srgbClr val="63676E"/>
+                </a:solidFill>
+                <a:latin typeface="Calibri" pitchFamily="34" charset="0"/>
+                <a:ea typeface="Calibri" pitchFamily="34" charset="-122"/>
+                <a:cs typeface="Calibri" pitchFamily="34" charset="-120"/>
+              </a:rPr>
+              <a:t>alles</a:t>
+            </a:r>
+            <a:r>
+              <a:rPr lang="en-US" sz="1150" dirty="0">
+                <a:solidFill>
+                  <a:srgbClr val="63676E"/>
+                </a:solidFill>
+                <a:latin typeface="Calibri" pitchFamily="34" charset="0"/>
+                <a:ea typeface="Calibri" pitchFamily="34" charset="-122"/>
+                <a:cs typeface="Calibri" pitchFamily="34" charset="-120"/>
+              </a:rPr>
+              <a:t> </a:t>
+            </a:r>
+            <a:r>
+              <a:rPr lang="en-US" sz="1150" dirty="0" err="1">
+                <a:solidFill>
+                  <a:srgbClr val="63676E"/>
+                </a:solidFill>
+                <a:latin typeface="Calibri" pitchFamily="34" charset="0"/>
+                <a:ea typeface="Calibri" pitchFamily="34" charset="-122"/>
+                <a:cs typeface="Calibri" pitchFamily="34" charset="-120"/>
+              </a:rPr>
+              <a:t>mit</a:t>
+            </a:r>
+            <a:r>
+              <a:rPr lang="en-US" sz="1150" dirty="0">
+                <a:solidFill>
+                  <a:srgbClr val="63676E"/>
+                </a:solidFill>
+                <a:latin typeface="Calibri" pitchFamily="34" charset="0"/>
+                <a:ea typeface="Calibri" pitchFamily="34" charset="-122"/>
+                <a:cs typeface="Calibri" pitchFamily="34" charset="-120"/>
+              </a:rPr>
+              <a:t> </a:t>
+            </a:r>
+            <a:r>
+              <a:rPr lang="en-US" sz="1150" dirty="0" err="1">
+                <a:solidFill>
+                  <a:srgbClr val="63676E"/>
+                </a:solidFill>
+                <a:latin typeface="Calibri" pitchFamily="34" charset="0"/>
+                <a:ea typeface="Calibri" pitchFamily="34" charset="-122"/>
+                <a:cs typeface="Calibri" pitchFamily="34" charset="-120"/>
+              </a:rPr>
+              <a:t>DualNet</a:t>
+            </a:r>
+            <a:r>
+              <a:rPr lang="en-US" sz="1150" dirty="0">
+                <a:solidFill>
+                  <a:srgbClr val="63676E"/>
+                </a:solidFill>
+                <a:latin typeface="Calibri" pitchFamily="34" charset="0"/>
+                <a:ea typeface="Calibri" pitchFamily="34" charset="-122"/>
+                <a:cs typeface="Calibri" pitchFamily="34" charset="-120"/>
+              </a:rPr>
+              <a:t> tun </a:t>
+            </a:r>
+            <a:r>
+              <a:rPr lang="en-US" sz="1150" dirty="0" err="1">
+                <a:solidFill>
+                  <a:srgbClr val="63676E"/>
+                </a:solidFill>
+                <a:latin typeface="Calibri" pitchFamily="34" charset="0"/>
+                <a:ea typeface="Calibri" pitchFamily="34" charset="-122"/>
+                <a:cs typeface="Calibri" pitchFamily="34" charset="-120"/>
+              </a:rPr>
+              <a:t>kann</a:t>
             </a:r>
             <a:endParaRPr lang="en-US" sz="1150" dirty="0"/>
           </a:p>
@@ -12024,7 +11839,7 @@
             <a:prstDash val="solid"/>
           </a:ln>
           <a:effectLst>
-            <a:outerShdw sx="100000" sy="100000" kx="0" ky="0" algn="bl" rotWithShape="0" blurRad="101600" dist="38100" dir="5400000">
+            <a:outerShdw blurRad="101600" dist="38100" dir="5400000" algn="bl" rotWithShape="0">
               <a:srgbClr val="000000">
                 <a:alpha val="8000"/>
               </a:srgbClr>
@@ -12074,14 +11889,14 @@
       </p:sp>
       <p:pic>
         <p:nvPicPr>
-          <p:cNvPr id="26" name="Image 2" descr="preencoded.png">    </p:cNvPr>
+          <p:cNvPr id="26" name="Image 2" descr="preencoded.png"/>
           <p:cNvPicPr>
             <a:picLocks noChangeAspect="1"/>
           </p:cNvPicPr>
           <p:nvPr/>
         </p:nvPicPr>
         <p:blipFill>
-          <a:blip r:embed="rId3"/>
+          <a:blip r:embed="rId5"/>
           <a:stretch>
             <a:fillRect/>
           </a:stretch>
@@ -12117,7 +11932,7 @@
           <a:bodyPr wrap="square" lIns="0" tIns="0" rIns="0" bIns="0" rtlCol="0" anchor="ctr"/>
           <a:lstStyle/>
           <a:p>
-            <a:pPr indent="0" marL="0">
+            <a:pPr marL="0" indent="0">
               <a:buNone/>
             </a:pPr>
             <a:r>
@@ -12156,7 +11971,7 @@
           <a:bodyPr wrap="square" lIns="0" tIns="0" rIns="0" bIns="0" rtlCol="0" anchor="ctr"/>
           <a:lstStyle/>
           <a:p>
-            <a:pPr indent="0" marL="0">
+            <a:pPr marL="0" indent="0">
               <a:buNone/>
             </a:pPr>
             <a:r>
@@ -12195,7 +12010,7 @@
           <a:bodyPr wrap="square" lIns="0" tIns="0" rIns="0" bIns="0" rtlCol="0" anchor="ctr"/>
           <a:lstStyle/>
           <a:p>
-            <a:pPr indent="0" marL="0">
+            <a:pPr marL="0" indent="0">
               <a:buNone/>
             </a:pPr>
             <a:r>
@@ -12237,7 +12052,7 @@
             <a:prstDash val="solid"/>
           </a:ln>
           <a:effectLst>
-            <a:outerShdw sx="100000" sy="100000" kx="0" ky="0" algn="bl" rotWithShape="0" blurRad="101600" dist="38100" dir="5400000">
+            <a:outerShdw blurRad="101600" dist="38100" dir="5400000" algn="bl" rotWithShape="0">
               <a:srgbClr val="000000">
                 <a:alpha val="8000"/>
               </a:srgbClr>
@@ -12287,14 +12102,14 @@
       </p:sp>
       <p:pic>
         <p:nvPicPr>
-          <p:cNvPr id="33" name="Image 3" descr="preencoded.png">    </p:cNvPr>
+          <p:cNvPr id="33" name="Image 3" descr="preencoded.png"/>
           <p:cNvPicPr>
             <a:picLocks noChangeAspect="1"/>
           </p:cNvPicPr>
           <p:nvPr/>
         </p:nvPicPr>
         <p:blipFill>
-          <a:blip r:embed="rId4"/>
+          <a:blip r:embed="rId6"/>
           <a:stretch>
             <a:fillRect/>
           </a:stretch>
@@ -12330,7 +12145,7 @@
           <a:bodyPr wrap="square" lIns="0" tIns="0" rIns="0" bIns="0" rtlCol="0" anchor="ctr"/>
           <a:lstStyle/>
           <a:p>
-            <a:pPr indent="0" marL="0">
+            <a:pPr marL="0" indent="0">
               <a:buNone/>
             </a:pPr>
             <a:r>
@@ -12369,7 +12184,7 @@
           <a:bodyPr wrap="square" lIns="0" tIns="0" rIns="0" bIns="0" rtlCol="0" anchor="ctr"/>
           <a:lstStyle/>
           <a:p>
-            <a:pPr indent="0" marL="0">
+            <a:pPr marL="0" indent="0">
               <a:buNone/>
             </a:pPr>
             <a:r>
@@ -12408,7 +12223,7 @@
           <a:bodyPr wrap="square" lIns="0" tIns="0" rIns="0" bIns="0" rtlCol="0" anchor="ctr"/>
           <a:lstStyle/>
           <a:p>
-            <a:pPr indent="0" marL="0">
+            <a:pPr marL="0" indent="0">
               <a:buNone/>
             </a:pPr>
             <a:r>
@@ -12450,7 +12265,7 @@
             <a:prstDash val="solid"/>
           </a:ln>
           <a:effectLst>
-            <a:outerShdw sx="100000" sy="100000" kx="0" ky="0" algn="bl" rotWithShape="0" blurRad="101600" dist="38100" dir="5400000">
+            <a:outerShdw blurRad="101600" dist="38100" dir="5400000" algn="bl" rotWithShape="0">
               <a:srgbClr val="000000">
                 <a:alpha val="8000"/>
               </a:srgbClr>
@@ -12500,14 +12315,14 @@
       </p:sp>
       <p:pic>
         <p:nvPicPr>
-          <p:cNvPr id="40" name="Image 4" descr="preencoded.png">    </p:cNvPr>
+          <p:cNvPr id="40" name="Image 4" descr="preencoded.png"/>
           <p:cNvPicPr>
             <a:picLocks noChangeAspect="1"/>
           </p:cNvPicPr>
           <p:nvPr/>
         </p:nvPicPr>
         <p:blipFill>
-          <a:blip r:embed="rId5"/>
+          <a:blip r:embed="rId7"/>
           <a:stretch>
             <a:fillRect/>
           </a:stretch>
@@ -12543,7 +12358,7 @@
           <a:bodyPr wrap="square" lIns="0" tIns="0" rIns="0" bIns="0" rtlCol="0" anchor="ctr"/>
           <a:lstStyle/>
           <a:p>
-            <a:pPr indent="0" marL="0">
+            <a:pPr marL="0" indent="0">
               <a:buNone/>
             </a:pPr>
             <a:r>
@@ -12582,7 +12397,7 @@
           <a:bodyPr wrap="square" lIns="0" tIns="0" rIns="0" bIns="0" rtlCol="0" anchor="ctr"/>
           <a:lstStyle/>
           <a:p>
-            <a:pPr indent="0" marL="0">
+            <a:pPr marL="0" indent="0">
               <a:buNone/>
             </a:pPr>
             <a:r>
@@ -12621,7 +12436,7 @@
           <a:bodyPr wrap="square" lIns="0" tIns="0" rIns="0" bIns="0" rtlCol="0" anchor="ctr"/>
           <a:lstStyle/>
           <a:p>
-            <a:pPr indent="0" marL="0">
+            <a:pPr marL="0" indent="0">
               <a:buNone/>
             </a:pPr>
             <a:r>
@@ -12663,7 +12478,7 @@
             <a:prstDash val="solid"/>
           </a:ln>
           <a:effectLst>
-            <a:outerShdw sx="100000" sy="100000" kx="0" ky="0" algn="bl" rotWithShape="0" blurRad="101600" dist="38100" dir="5400000">
+            <a:outerShdw blurRad="101600" dist="38100" dir="5400000" algn="bl" rotWithShape="0">
               <a:srgbClr val="000000">
                 <a:alpha val="8000"/>
               </a:srgbClr>
@@ -12713,14 +12528,14 @@
       </p:sp>
       <p:pic>
         <p:nvPicPr>
-          <p:cNvPr id="47" name="Image 5" descr="preencoded.png">    </p:cNvPr>
+          <p:cNvPr id="47" name="Image 5" descr="preencoded.png"/>
           <p:cNvPicPr>
             <a:picLocks noChangeAspect="1"/>
           </p:cNvPicPr>
           <p:nvPr/>
         </p:nvPicPr>
         <p:blipFill>
-          <a:blip r:embed="rId6"/>
+          <a:blip r:embed="rId8"/>
           <a:stretch>
             <a:fillRect/>
           </a:stretch>
@@ -12756,7 +12571,7 @@
           <a:bodyPr wrap="square" lIns="0" tIns="0" rIns="0" bIns="0" rtlCol="0" anchor="ctr"/>
           <a:lstStyle/>
           <a:p>
-            <a:pPr indent="0" marL="0">
+            <a:pPr marL="0" indent="0">
               <a:buNone/>
             </a:pPr>
             <a:r>
@@ -12795,7 +12610,7 @@
           <a:bodyPr wrap="square" lIns="0" tIns="0" rIns="0" bIns="0" rtlCol="0" anchor="ctr"/>
           <a:lstStyle/>
           <a:p>
-            <a:pPr indent="0" marL="0">
+            <a:pPr marL="0" indent="0">
               <a:buNone/>
             </a:pPr>
             <a:r>
@@ -12834,7 +12649,7 @@
           <a:bodyPr wrap="square" lIns="0" tIns="0" rIns="0" bIns="0" rtlCol="0" anchor="ctr"/>
           <a:lstStyle/>
           <a:p>
-            <a:pPr indent="0" marL="0">
+            <a:pPr marL="0" indent="0">
               <a:buNone/>
             </a:pPr>
             <a:r>
@@ -12868,6 +12683,7 @@
         <a:solidFill>
           <a:srgbClr val="FFFFFF"/>
         </a:solidFill>
+        <a:effectLst/>
       </p:bgPr>
     </p:bg>
     <p:spTree>
@@ -12945,7 +12761,7 @@
           <a:bodyPr wrap="square" lIns="0" tIns="0" rIns="0" bIns="0" rtlCol="0" anchor="ctr"/>
           <a:lstStyle/>
           <a:p>
-            <a:pPr algn="l" indent="0" marL="0">
+            <a:pPr marL="0" indent="0" algn="l">
               <a:buNone/>
             </a:pPr>
             <a:r>
@@ -12984,7 +12800,7 @@
           <a:bodyPr wrap="square" lIns="0" tIns="0" rIns="0" bIns="0" rtlCol="0" anchor="ctr"/>
           <a:lstStyle/>
           <a:p>
-            <a:pPr algn="r" indent="0" marL="0">
+            <a:pPr marL="0" indent="0" algn="r">
               <a:buNone/>
             </a:pPr>
             <a:r>
@@ -13023,11 +12839,11 @@
           <a:bodyPr wrap="square" lIns="0" tIns="0" rIns="0" bIns="0" rtlCol="0" anchor="ctr"/>
           <a:lstStyle/>
           <a:p>
-            <a:pPr algn="r" indent="0" marL="0">
-              <a:buNone/>
-            </a:pPr>
-            <a:r>
-              <a:rPr lang="en-US" sz="900" b="1" spc="100" kern="0" dirty="0">
+            <a:pPr marL="0" indent="0" algn="r">
+              <a:buNone/>
+            </a:pPr>
+            <a:r>
+              <a:rPr lang="en-US" sz="900" b="1" kern="0" spc="100" dirty="0">
                 <a:solidFill>
                   <a:srgbClr val="C5394A"/>
                 </a:solidFill>
@@ -13062,11 +12878,11 @@
           <a:bodyPr wrap="square" lIns="0" tIns="0" rIns="0" bIns="0" rtlCol="0" anchor="ctr"/>
           <a:lstStyle/>
           <a:p>
-            <a:pPr indent="0" marL="0">
-              <a:buNone/>
-            </a:pPr>
-            <a:r>
-              <a:rPr lang="en-US" sz="1200" b="1" spc="200" kern="0" dirty="0">
+            <a:pPr marL="0" indent="0">
+              <a:buNone/>
+            </a:pPr>
+            <a:r>
+              <a:rPr lang="en-US" sz="1200" b="1" kern="0" spc="200" dirty="0">
                 <a:solidFill>
                   <a:srgbClr val="C5394A"/>
                 </a:solidFill>
@@ -13101,7 +12917,7 @@
           <a:bodyPr wrap="square" lIns="0" tIns="0" rIns="0" bIns="0" rtlCol="0" anchor="ctr"/>
           <a:lstStyle/>
           <a:p>
-            <a:pPr indent="0" marL="0">
+            <a:pPr marL="0" indent="0">
               <a:buNone/>
             </a:pPr>
             <a:r>
@@ -13138,7 +12954,7 @@
           </a:solidFill>
           <a:ln/>
           <a:effectLst>
-            <a:outerShdw sx="100000" sy="100000" kx="0" ky="0" algn="bl" rotWithShape="0" blurRad="101600" dist="38100" dir="5400000">
+            <a:outerShdw blurRad="101600" dist="38100" dir="5400000" algn="bl" rotWithShape="0">
               <a:srgbClr val="000000">
                 <a:alpha val="8000"/>
               </a:srgbClr>
@@ -13167,7 +12983,7 @@
           <a:bodyPr wrap="square" lIns="0" tIns="0" rIns="0" bIns="0" rtlCol="0" anchor="ctr"/>
           <a:lstStyle/>
           <a:p>
-            <a:pPr indent="0" marL="0">
+            <a:pPr marL="0" indent="0">
               <a:buNone/>
             </a:pPr>
             <a:r>
@@ -13206,7 +13022,7 @@
           <a:bodyPr wrap="square" rtlCol="0" anchor="t"/>
           <a:lstStyle/>
           <a:p>
-            <a:pPr indent="0" marL="0">
+            <a:pPr marL="0" indent="0">
               <a:buNone/>
             </a:pPr>
             <a:r>
@@ -13272,7 +13088,7 @@
           <a:bodyPr wrap="square" lIns="0" tIns="0" rIns="0" bIns="0" rtlCol="0" anchor="ctr"/>
           <a:lstStyle/>
           <a:p>
-            <a:pPr algn="ctr" indent="0" marL="0">
+            <a:pPr marL="0" indent="0" algn="ctr">
               <a:buNone/>
             </a:pPr>
             <a:r>
@@ -13338,7 +13154,7 @@
           <a:bodyPr wrap="square" lIns="0" tIns="0" rIns="0" bIns="0" rtlCol="0" anchor="ctr"/>
           <a:lstStyle/>
           <a:p>
-            <a:pPr algn="ctr" indent="0" marL="0">
+            <a:pPr marL="0" indent="0" algn="ctr">
               <a:buNone/>
             </a:pPr>
             <a:r>
@@ -13404,7 +13220,7 @@
           <a:bodyPr wrap="square" lIns="0" tIns="0" rIns="0" bIns="0" rtlCol="0" anchor="ctr"/>
           <a:lstStyle/>
           <a:p>
-            <a:pPr algn="ctr" indent="0" marL="0">
+            <a:pPr marL="0" indent="0" algn="ctr">
               <a:buNone/>
             </a:pPr>
             <a:r>
@@ -13470,7 +13286,7 @@
           <a:bodyPr wrap="square" lIns="0" tIns="0" rIns="0" bIns="0" rtlCol="0" anchor="ctr"/>
           <a:lstStyle/>
           <a:p>
-            <a:pPr algn="ctr" indent="0" marL="0">
+            <a:pPr marL="0" indent="0" algn="ctr">
               <a:buNone/>
             </a:pPr>
             <a:r>
@@ -13536,7 +13352,7 @@
           <a:bodyPr wrap="square" lIns="0" tIns="0" rIns="0" bIns="0" rtlCol="0" anchor="ctr"/>
           <a:lstStyle/>
           <a:p>
-            <a:pPr algn="ctr" indent="0" marL="0">
+            <a:pPr marL="0" indent="0" algn="ctr">
               <a:buNone/>
             </a:pPr>
             <a:r>
@@ -13575,7 +13391,7 @@
           <a:bodyPr wrap="square" rtlCol="0" anchor="ctr"/>
           <a:lstStyle/>
           <a:p>
-            <a:pPr indent="0" marL="0">
+            <a:pPr marL="0" indent="0">
               <a:buNone/>
             </a:pPr>
             <a:r>
@@ -13612,7 +13428,7 @@
           </a:solidFill>
           <a:ln/>
           <a:effectLst>
-            <a:outerShdw sx="100000" sy="100000" kx="0" ky="0" algn="bl" rotWithShape="0" blurRad="101600" dist="38100" dir="5400000">
+            <a:outerShdw blurRad="101600" dist="38100" dir="5400000" algn="bl" rotWithShape="0">
               <a:srgbClr val="000000">
                 <a:alpha val="8000"/>
               </a:srgbClr>
@@ -13641,7 +13457,7 @@
           <a:bodyPr wrap="square" lIns="0" tIns="0" rIns="0" bIns="0" rtlCol="0" anchor="ctr"/>
           <a:lstStyle/>
           <a:p>
-            <a:pPr indent="0" marL="0">
+            <a:pPr marL="0" indent="0">
               <a:buNone/>
             </a:pPr>
             <a:r>
@@ -13668,7 +13484,7 @@
         <p:spPr>
           <a:xfrm>
             <a:off x="7763256" y="3291840"/>
-            <a:ext cx="1110996" cy="-740664"/>
+            <a:ext cx="1110996" cy="0"/>
           </a:xfrm>
           <a:prstGeom prst="line">
             <a:avLst/>
@@ -13737,7 +13553,7 @@
         <p:spPr>
           <a:xfrm>
             <a:off x="8997696" y="4094226"/>
-            <a:ext cx="1172718" cy="-864108"/>
+            <a:ext cx="1172718" cy="0"/>
           </a:xfrm>
           <a:prstGeom prst="line">
             <a:avLst/>
@@ -13806,7 +13622,7 @@
         <p:spPr>
           <a:xfrm>
             <a:off x="9861804" y="4649724"/>
-            <a:ext cx="1234440" cy="-678942"/>
+            <a:ext cx="1234440" cy="0"/>
           </a:xfrm>
           <a:prstGeom prst="line">
             <a:avLst/>
@@ -13962,95 +13778,7 @@
       </p:sp>
       <p:pic>
         <p:nvPicPr>
-          <p:cNvPr id="39" name="Image 0" descr="preencoded.png">    </p:cNvPr>
-          <p:cNvPicPr>
-            <a:picLocks noChangeAspect="1"/>
-          </p:cNvPicPr>
-          <p:nvPr/>
-        </p:nvPicPr>
-        <p:blipFill>
-          <a:blip r:embed="rId1"/>
-          <a:stretch>
-            <a:fillRect/>
-          </a:stretch>
-        </p:blipFill>
-        <p:spPr>
-          <a:xfrm>
-            <a:off x="7847381" y="2863901"/>
-            <a:ext cx="261518" cy="261518"/>
-          </a:xfrm>
-          <a:prstGeom prst="rect">
-            <a:avLst/>
-          </a:prstGeom>
-        </p:spPr>
-      </p:pic>
-      <p:sp>
-        <p:nvSpPr>
-          <p:cNvPr id="40" name="Shape 37"/>
-          <p:cNvSpPr/>
-          <p:nvPr/>
-        </p:nvSpPr>
-        <p:spPr>
-          <a:xfrm>
-            <a:off x="10149840" y="4617720"/>
-            <a:ext cx="502920" cy="502920"/>
-          </a:xfrm>
-          <a:prstGeom prst="ellipse">
-            <a:avLst/>
-          </a:prstGeom>
-          <a:solidFill>
-            <a:srgbClr val="C5394A"/>
-          </a:solidFill>
-          <a:ln/>
-        </p:spPr>
-      </p:sp>
-      <p:pic>
-        <p:nvPicPr>
-          <p:cNvPr id="41" name="Image 1" descr="preencoded.png">    </p:cNvPr>
-          <p:cNvPicPr>
-            <a:picLocks noChangeAspect="1"/>
-          </p:cNvPicPr>
-          <p:nvPr/>
-        </p:nvPicPr>
-        <p:blipFill>
-          <a:blip r:embed="rId2"/>
-          <a:stretch>
-            <a:fillRect/>
-          </a:stretch>
-        </p:blipFill>
-        <p:spPr>
-          <a:xfrm>
-            <a:off x="10270541" y="4738421"/>
-            <a:ext cx="261518" cy="261518"/>
-          </a:xfrm>
-          <a:prstGeom prst="rect">
-            <a:avLst/>
-          </a:prstGeom>
-        </p:spPr>
-      </p:pic>
-      <p:sp>
-        <p:nvSpPr>
-          <p:cNvPr id="42" name="Shape 38"/>
-          <p:cNvSpPr/>
-          <p:nvPr/>
-        </p:nvSpPr>
-        <p:spPr>
-          <a:xfrm>
-            <a:off x="9052560" y="3246120"/>
-            <a:ext cx="457200" cy="457200"/>
-          </a:xfrm>
-          <a:prstGeom prst="ellipse">
-            <a:avLst/>
-          </a:prstGeom>
-          <a:solidFill>
-            <a:srgbClr val="FFFFFF"/>
-          </a:solidFill>
-          <a:ln/>
-        </p:spPr>
-      </p:sp>
-      <p:pic>
-        <p:nvPicPr>
-          <p:cNvPr id="43" name="Image 2" descr="preencoded.png">    </p:cNvPr>
+          <p:cNvPr id="39" name="Image 0" descr="preencoded.png"/>
           <p:cNvPicPr>
             <a:picLocks noChangeAspect="1"/>
           </p:cNvPicPr>
@@ -14064,6 +13792,94 @@
         </p:blipFill>
         <p:spPr>
           <a:xfrm>
+            <a:off x="7847381" y="2863901"/>
+            <a:ext cx="261518" cy="261518"/>
+          </a:xfrm>
+          <a:prstGeom prst="rect">
+            <a:avLst/>
+          </a:prstGeom>
+        </p:spPr>
+      </p:pic>
+      <p:sp>
+        <p:nvSpPr>
+          <p:cNvPr id="40" name="Shape 37"/>
+          <p:cNvSpPr/>
+          <p:nvPr/>
+        </p:nvSpPr>
+        <p:spPr>
+          <a:xfrm>
+            <a:off x="10149840" y="4617720"/>
+            <a:ext cx="502920" cy="502920"/>
+          </a:xfrm>
+          <a:prstGeom prst="ellipse">
+            <a:avLst/>
+          </a:prstGeom>
+          <a:solidFill>
+            <a:srgbClr val="C5394A"/>
+          </a:solidFill>
+          <a:ln/>
+        </p:spPr>
+      </p:sp>
+      <p:pic>
+        <p:nvPicPr>
+          <p:cNvPr id="41" name="Image 1" descr="preencoded.png"/>
+          <p:cNvPicPr>
+            <a:picLocks noChangeAspect="1"/>
+          </p:cNvPicPr>
+          <p:nvPr/>
+        </p:nvPicPr>
+        <p:blipFill>
+          <a:blip r:embed="rId3"/>
+          <a:stretch>
+            <a:fillRect/>
+          </a:stretch>
+        </p:blipFill>
+        <p:spPr>
+          <a:xfrm>
+            <a:off x="10270541" y="4738421"/>
+            <a:ext cx="261518" cy="261518"/>
+          </a:xfrm>
+          <a:prstGeom prst="rect">
+            <a:avLst/>
+          </a:prstGeom>
+        </p:spPr>
+      </p:pic>
+      <p:sp>
+        <p:nvSpPr>
+          <p:cNvPr id="42" name="Shape 38"/>
+          <p:cNvSpPr/>
+          <p:nvPr/>
+        </p:nvSpPr>
+        <p:spPr>
+          <a:xfrm>
+            <a:off x="9052560" y="3246120"/>
+            <a:ext cx="457200" cy="457200"/>
+          </a:xfrm>
+          <a:prstGeom prst="ellipse">
+            <a:avLst/>
+          </a:prstGeom>
+          <a:solidFill>
+            <a:srgbClr val="FFFFFF"/>
+          </a:solidFill>
+          <a:ln/>
+        </p:spPr>
+      </p:sp>
+      <p:pic>
+        <p:nvPicPr>
+          <p:cNvPr id="43" name="Image 2" descr="preencoded.png"/>
+          <p:cNvPicPr>
+            <a:picLocks noChangeAspect="1"/>
+          </p:cNvPicPr>
+          <p:nvPr/>
+        </p:nvPicPr>
+        <p:blipFill>
+          <a:blip r:embed="rId4"/>
+          <a:stretch>
+            <a:fillRect/>
+          </a:stretch>
+        </p:blipFill>
+        <p:spPr>
+          <a:xfrm>
             <a:off x="9162288" y="3355848"/>
             <a:ext cx="237744" cy="237744"/>
           </a:xfrm>
@@ -14093,7 +13909,7 @@
           <a:bodyPr wrap="square" lIns="0" tIns="0" rIns="0" bIns="0" rtlCol="0" anchor="ctr"/>
           <a:lstStyle/>
           <a:p>
-            <a:pPr indent="0" marL="0">
+            <a:pPr marL="0" indent="0">
               <a:buNone/>
             </a:pPr>
             <a:r>
@@ -14127,6 +13943,7 @@
         <a:solidFill>
           <a:srgbClr val="FFFFFF"/>
         </a:solidFill>
+        <a:effectLst/>
       </p:bgPr>
     </p:bg>
     <p:spTree>
@@ -14204,7 +14021,7 @@
           <a:bodyPr wrap="square" lIns="0" tIns="0" rIns="0" bIns="0" rtlCol="0" anchor="ctr"/>
           <a:lstStyle/>
           <a:p>
-            <a:pPr algn="l" indent="0" marL="0">
+            <a:pPr marL="0" indent="0" algn="l">
               <a:buNone/>
             </a:pPr>
             <a:r>
@@ -14243,7 +14060,7 @@
           <a:bodyPr wrap="square" lIns="0" tIns="0" rIns="0" bIns="0" rtlCol="0" anchor="ctr"/>
           <a:lstStyle/>
           <a:p>
-            <a:pPr algn="r" indent="0" marL="0">
+            <a:pPr marL="0" indent="0" algn="r">
               <a:buNone/>
             </a:pPr>
             <a:r>
@@ -14282,11 +14099,11 @@
           <a:bodyPr wrap="square" lIns="0" tIns="0" rIns="0" bIns="0" rtlCol="0" anchor="ctr"/>
           <a:lstStyle/>
           <a:p>
-            <a:pPr algn="r" indent="0" marL="0">
-              <a:buNone/>
-            </a:pPr>
-            <a:r>
-              <a:rPr lang="en-US" sz="900" b="1" spc="100" kern="0" dirty="0">
+            <a:pPr marL="0" indent="0" algn="r">
+              <a:buNone/>
+            </a:pPr>
+            <a:r>
+              <a:rPr lang="en-US" sz="900" b="1" kern="0" spc="100" dirty="0">
                 <a:solidFill>
                   <a:srgbClr val="C5394A"/>
                 </a:solidFill>
@@ -14321,11 +14138,11 @@
           <a:bodyPr wrap="square" lIns="0" tIns="0" rIns="0" bIns="0" rtlCol="0" anchor="ctr"/>
           <a:lstStyle/>
           <a:p>
-            <a:pPr indent="0" marL="0">
-              <a:buNone/>
-            </a:pPr>
-            <a:r>
-              <a:rPr lang="en-US" sz="1200" b="1" spc="200" kern="0" dirty="0">
+            <a:pPr marL="0" indent="0">
+              <a:buNone/>
+            </a:pPr>
+            <a:r>
+              <a:rPr lang="en-US" sz="1200" b="1" kern="0" spc="200" dirty="0">
                 <a:solidFill>
                   <a:srgbClr val="C5394A"/>
                 </a:solidFill>
@@ -14333,7 +14150,7 @@
                 <a:ea typeface="Calibri" pitchFamily="34" charset="-122"/>
                 <a:cs typeface="Calibri" pitchFamily="34" charset="-120"/>
               </a:rPr>
-              <a:t>DIE APP IN AKTION</a:t>
+              <a:t>DIE APP FUNKTIONEN</a:t>
             </a:r>
             <a:endParaRPr lang="en-US" sz="1200" dirty="0"/>
           </a:p>
@@ -14360,7 +14177,7 @@
           <a:bodyPr wrap="square" lIns="0" tIns="0" rIns="0" bIns="0" rtlCol="0" anchor="ctr"/>
           <a:lstStyle/>
           <a:p>
-            <a:pPr indent="0" marL="0">
+            <a:pPr marL="0" indent="0">
               <a:buNone/>
             </a:pPr>
             <a:r>
@@ -14402,7 +14219,7 @@
             <a:prstDash val="solid"/>
           </a:ln>
           <a:effectLst>
-            <a:outerShdw sx="100000" sy="100000" kx="0" ky="0" algn="bl" rotWithShape="0" blurRad="101600" dist="38100" dir="5400000">
+            <a:outerShdw blurRad="101600" dist="38100" dir="5400000" algn="bl" rotWithShape="0">
               <a:srgbClr val="000000">
                 <a:alpha val="8000"/>
               </a:srgbClr>
@@ -14452,14 +14269,14 @@
       </p:sp>
       <p:pic>
         <p:nvPicPr>
-          <p:cNvPr id="12" name="Image 0" descr="preencoded.png">    </p:cNvPr>
+          <p:cNvPr id="12" name="Image 0" descr="preencoded.png"/>
           <p:cNvPicPr>
             <a:picLocks noChangeAspect="1"/>
           </p:cNvPicPr>
           <p:nvPr/>
         </p:nvPicPr>
         <p:blipFill>
-          <a:blip r:embed="rId1"/>
+          <a:blip r:embed="rId3"/>
           <a:stretch>
             <a:fillRect/>
           </a:stretch>
@@ -14495,7 +14312,7 @@
           <a:bodyPr wrap="square" lIns="0" tIns="0" rIns="0" bIns="0" rtlCol="0" anchor="ctr"/>
           <a:lstStyle/>
           <a:p>
-            <a:pPr indent="0" marL="0">
+            <a:pPr marL="0" indent="0">
               <a:buNone/>
             </a:pPr>
             <a:r>
@@ -14534,7 +14351,7 @@
           <a:bodyPr wrap="square" lIns="0" tIns="0" rIns="0" bIns="0" rtlCol="0" anchor="ctr"/>
           <a:lstStyle/>
           <a:p>
-            <a:pPr indent="0" marL="0">
+            <a:pPr marL="0" indent="0">
               <a:buNone/>
             </a:pPr>
             <a:r>
@@ -14576,7 +14393,7 @@
             <a:prstDash val="solid"/>
           </a:ln>
           <a:effectLst>
-            <a:outerShdw sx="100000" sy="100000" kx="0" ky="0" algn="bl" rotWithShape="0" blurRad="101600" dist="38100" dir="5400000">
+            <a:outerShdw blurRad="101600" dist="38100" dir="5400000" algn="bl" rotWithShape="0">
               <a:srgbClr val="000000">
                 <a:alpha val="8000"/>
               </a:srgbClr>
@@ -14626,14 +14443,14 @@
       </p:sp>
       <p:pic>
         <p:nvPicPr>
-          <p:cNvPr id="18" name="Image 1" descr="preencoded.png">    </p:cNvPr>
+          <p:cNvPr id="18" name="Image 1" descr="preencoded.png"/>
           <p:cNvPicPr>
             <a:picLocks noChangeAspect="1"/>
           </p:cNvPicPr>
           <p:nvPr/>
         </p:nvPicPr>
         <p:blipFill>
-          <a:blip r:embed="rId2"/>
+          <a:blip r:embed="rId4"/>
           <a:stretch>
             <a:fillRect/>
           </a:stretch>
@@ -14669,7 +14486,7 @@
           <a:bodyPr wrap="square" lIns="0" tIns="0" rIns="0" bIns="0" rtlCol="0" anchor="ctr"/>
           <a:lstStyle/>
           <a:p>
-            <a:pPr indent="0" marL="0">
+            <a:pPr marL="0" indent="0">
               <a:buNone/>
             </a:pPr>
             <a:r>
@@ -14708,7 +14525,7 @@
           <a:bodyPr wrap="square" lIns="0" tIns="0" rIns="0" bIns="0" rtlCol="0" anchor="ctr"/>
           <a:lstStyle/>
           <a:p>
-            <a:pPr indent="0" marL="0">
+            <a:pPr marL="0" indent="0">
               <a:buNone/>
             </a:pPr>
             <a:r>
@@ -14750,7 +14567,7 @@
             <a:prstDash val="solid"/>
           </a:ln>
           <a:effectLst>
-            <a:outerShdw sx="100000" sy="100000" kx="0" ky="0" algn="bl" rotWithShape="0" blurRad="101600" dist="38100" dir="5400000">
+            <a:outerShdw blurRad="101600" dist="38100" dir="5400000" algn="bl" rotWithShape="0">
               <a:srgbClr val="000000">
                 <a:alpha val="8000"/>
               </a:srgbClr>
@@ -14800,14 +14617,14 @@
       </p:sp>
       <p:pic>
         <p:nvPicPr>
-          <p:cNvPr id="24" name="Image 2" descr="preencoded.png">    </p:cNvPr>
+          <p:cNvPr id="24" name="Image 2" descr="preencoded.png"/>
           <p:cNvPicPr>
             <a:picLocks noChangeAspect="1"/>
           </p:cNvPicPr>
           <p:nvPr/>
         </p:nvPicPr>
         <p:blipFill>
-          <a:blip r:embed="rId3"/>
+          <a:blip r:embed="rId5"/>
           <a:stretch>
             <a:fillRect/>
           </a:stretch>
@@ -14843,7 +14660,7 @@
           <a:bodyPr wrap="square" lIns="0" tIns="0" rIns="0" bIns="0" rtlCol="0" anchor="ctr"/>
           <a:lstStyle/>
           <a:p>
-            <a:pPr indent="0" marL="0">
+            <a:pPr marL="0" indent="0">
               <a:buNone/>
             </a:pPr>
             <a:r>
@@ -14882,7 +14699,7 @@
           <a:bodyPr wrap="square" lIns="0" tIns="0" rIns="0" bIns="0" rtlCol="0" anchor="ctr"/>
           <a:lstStyle/>
           <a:p>
-            <a:pPr indent="0" marL="0">
+            <a:pPr marL="0" indent="0">
               <a:buNone/>
             </a:pPr>
             <a:r>
@@ -14924,7 +14741,7 @@
             <a:prstDash val="solid"/>
           </a:ln>
           <a:effectLst>
-            <a:outerShdw sx="100000" sy="100000" kx="0" ky="0" algn="bl" rotWithShape="0" blurRad="101600" dist="38100" dir="5400000">
+            <a:outerShdw blurRad="101600" dist="38100" dir="5400000" algn="bl" rotWithShape="0">
               <a:srgbClr val="000000">
                 <a:alpha val="8000"/>
               </a:srgbClr>
@@ -14974,14 +14791,14 @@
       </p:sp>
       <p:pic>
         <p:nvPicPr>
-          <p:cNvPr id="30" name="Image 3" descr="preencoded.png">    </p:cNvPr>
+          <p:cNvPr id="30" name="Image 3" descr="preencoded.png"/>
           <p:cNvPicPr>
             <a:picLocks noChangeAspect="1"/>
           </p:cNvPicPr>
           <p:nvPr/>
         </p:nvPicPr>
         <p:blipFill>
-          <a:blip r:embed="rId4"/>
+          <a:blip r:embed="rId6"/>
           <a:stretch>
             <a:fillRect/>
           </a:stretch>
@@ -15017,7 +14834,7 @@
           <a:bodyPr wrap="square" lIns="0" tIns="0" rIns="0" bIns="0" rtlCol="0" anchor="ctr"/>
           <a:lstStyle/>
           <a:p>
-            <a:pPr indent="0" marL="0">
+            <a:pPr marL="0" indent="0">
               <a:buNone/>
             </a:pPr>
             <a:r>
@@ -15056,7 +14873,7 @@
           <a:bodyPr wrap="square" lIns="0" tIns="0" rIns="0" bIns="0" rtlCol="0" anchor="ctr"/>
           <a:lstStyle/>
           <a:p>
-            <a:pPr indent="0" marL="0">
+            <a:pPr marL="0" indent="0">
               <a:buNone/>
             </a:pPr>
             <a:r>
@@ -15098,7 +14915,7 @@
             <a:prstDash val="solid"/>
           </a:ln>
           <a:effectLst>
-            <a:outerShdw sx="100000" sy="100000" kx="0" ky="0" algn="bl" rotWithShape="0" blurRad="101600" dist="38100" dir="5400000">
+            <a:outerShdw blurRad="101600" dist="38100" dir="5400000" algn="bl" rotWithShape="0">
               <a:srgbClr val="000000">
                 <a:alpha val="8000"/>
               </a:srgbClr>
@@ -15148,14 +14965,14 @@
       </p:sp>
       <p:pic>
         <p:nvPicPr>
-          <p:cNvPr id="36" name="Image 4" descr="preencoded.png">    </p:cNvPr>
+          <p:cNvPr id="36" name="Image 4" descr="preencoded.png"/>
           <p:cNvPicPr>
             <a:picLocks noChangeAspect="1"/>
           </p:cNvPicPr>
           <p:nvPr/>
         </p:nvPicPr>
         <p:blipFill>
-          <a:blip r:embed="rId5"/>
+          <a:blip r:embed="rId7"/>
           <a:stretch>
             <a:fillRect/>
           </a:stretch>
@@ -15191,7 +15008,7 @@
           <a:bodyPr wrap="square" lIns="0" tIns="0" rIns="0" bIns="0" rtlCol="0" anchor="ctr"/>
           <a:lstStyle/>
           <a:p>
-            <a:pPr indent="0" marL="0">
+            <a:pPr marL="0" indent="0">
               <a:buNone/>
             </a:pPr>
             <a:r>
@@ -15230,7 +15047,7 @@
           <a:bodyPr wrap="square" lIns="0" tIns="0" rIns="0" bIns="0" rtlCol="0" anchor="ctr"/>
           <a:lstStyle/>
           <a:p>
-            <a:pPr indent="0" marL="0">
+            <a:pPr marL="0" indent="0">
               <a:buNone/>
             </a:pPr>
             <a:r>
@@ -15272,7 +15089,7 @@
             <a:prstDash val="solid"/>
           </a:ln>
           <a:effectLst>
-            <a:outerShdw sx="100000" sy="100000" kx="0" ky="0" algn="bl" rotWithShape="0" blurRad="101600" dist="38100" dir="5400000">
+            <a:outerShdw blurRad="101600" dist="38100" dir="5400000" algn="bl" rotWithShape="0">
               <a:srgbClr val="000000">
                 <a:alpha val="8000"/>
               </a:srgbClr>
@@ -15322,14 +15139,14 @@
       </p:sp>
       <p:pic>
         <p:nvPicPr>
-          <p:cNvPr id="42" name="Image 5" descr="preencoded.png">    </p:cNvPr>
+          <p:cNvPr id="42" name="Image 5" descr="preencoded.png"/>
           <p:cNvPicPr>
             <a:picLocks noChangeAspect="1"/>
           </p:cNvPicPr>
           <p:nvPr/>
         </p:nvPicPr>
         <p:blipFill>
-          <a:blip r:embed="rId6"/>
+          <a:blip r:embed="rId8"/>
           <a:stretch>
             <a:fillRect/>
           </a:stretch>
@@ -15365,7 +15182,7 @@
           <a:bodyPr wrap="square" lIns="0" tIns="0" rIns="0" bIns="0" rtlCol="0" anchor="ctr"/>
           <a:lstStyle/>
           <a:p>
-            <a:pPr indent="0" marL="0">
+            <a:pPr marL="0" indent="0">
               <a:buNone/>
             </a:pPr>
             <a:r>
@@ -15404,7 +15221,7 @@
           <a:bodyPr wrap="square" lIns="0" tIns="0" rIns="0" bIns="0" rtlCol="0" anchor="ctr"/>
           <a:lstStyle/>
           <a:p>
-            <a:pPr indent="0" marL="0">
+            <a:pPr marL="0" indent="0">
               <a:buNone/>
             </a:pPr>
             <a:r>
@@ -15446,7 +15263,7 @@
             <a:prstDash val="solid"/>
           </a:ln>
           <a:effectLst>
-            <a:outerShdw sx="100000" sy="100000" kx="0" ky="0" algn="bl" rotWithShape="0" blurRad="101600" dist="38100" dir="5400000">
+            <a:outerShdw blurRad="101600" dist="38100" dir="5400000" algn="bl" rotWithShape="0">
               <a:srgbClr val="000000">
                 <a:alpha val="8000"/>
               </a:srgbClr>
@@ -15496,14 +15313,14 @@
       </p:sp>
       <p:pic>
         <p:nvPicPr>
-          <p:cNvPr id="48" name="Image 6" descr="preencoded.png">    </p:cNvPr>
+          <p:cNvPr id="48" name="Image 6" descr="preencoded.png"/>
           <p:cNvPicPr>
             <a:picLocks noChangeAspect="1"/>
           </p:cNvPicPr>
           <p:nvPr/>
         </p:nvPicPr>
         <p:blipFill>
-          <a:blip r:embed="rId7"/>
+          <a:blip r:embed="rId9"/>
           <a:stretch>
             <a:fillRect/>
           </a:stretch>
@@ -15539,7 +15356,7 @@
           <a:bodyPr wrap="square" lIns="0" tIns="0" rIns="0" bIns="0" rtlCol="0" anchor="ctr"/>
           <a:lstStyle/>
           <a:p>
-            <a:pPr indent="0" marL="0">
+            <a:pPr marL="0" indent="0">
               <a:buNone/>
             </a:pPr>
             <a:r>
@@ -15578,7 +15395,7 @@
           <a:bodyPr wrap="square" lIns="0" tIns="0" rIns="0" bIns="0" rtlCol="0" anchor="ctr"/>
           <a:lstStyle/>
           <a:p>
-            <a:pPr indent="0" marL="0">
+            <a:pPr marL="0" indent="0">
               <a:buNone/>
             </a:pPr>
             <a:r>
@@ -15620,7 +15437,7 @@
             <a:prstDash val="solid"/>
           </a:ln>
           <a:effectLst>
-            <a:outerShdw sx="100000" sy="100000" kx="0" ky="0" algn="bl" rotWithShape="0" blurRad="101600" dist="38100" dir="5400000">
+            <a:outerShdw blurRad="101600" dist="38100" dir="5400000" algn="bl" rotWithShape="0">
               <a:srgbClr val="000000">
                 <a:alpha val="8000"/>
               </a:srgbClr>
@@ -15670,14 +15487,14 @@
       </p:sp>
       <p:pic>
         <p:nvPicPr>
-          <p:cNvPr id="54" name="Image 7" descr="preencoded.png">    </p:cNvPr>
+          <p:cNvPr id="54" name="Image 7" descr="preencoded.png"/>
           <p:cNvPicPr>
             <a:picLocks noChangeAspect="1"/>
           </p:cNvPicPr>
           <p:nvPr/>
         </p:nvPicPr>
         <p:blipFill>
-          <a:blip r:embed="rId8"/>
+          <a:blip r:embed="rId10"/>
           <a:stretch>
             <a:fillRect/>
           </a:stretch>
@@ -15713,7 +15530,7 @@
           <a:bodyPr wrap="square" lIns="0" tIns="0" rIns="0" bIns="0" rtlCol="0" anchor="ctr"/>
           <a:lstStyle/>
           <a:p>
-            <a:pPr indent="0" marL="0">
+            <a:pPr marL="0" indent="0">
               <a:buNone/>
             </a:pPr>
             <a:r>
@@ -15752,7 +15569,7 @@
           <a:bodyPr wrap="square" lIns="0" tIns="0" rIns="0" bIns="0" rtlCol="0" anchor="ctr"/>
           <a:lstStyle/>
           <a:p>
-            <a:pPr indent="0" marL="0">
+            <a:pPr marL="0" indent="0">
               <a:buNone/>
             </a:pPr>
             <a:r>
@@ -15786,6 +15603,7 @@
         <a:solidFill>
           <a:srgbClr val="FFFFFF"/>
         </a:solidFill>
+        <a:effectLst/>
       </p:bgPr>
     </p:bg>
     <p:spTree>
@@ -15863,7 +15681,7 @@
           <a:bodyPr wrap="square" lIns="0" tIns="0" rIns="0" bIns="0" rtlCol="0" anchor="ctr"/>
           <a:lstStyle/>
           <a:p>
-            <a:pPr algn="l" indent="0" marL="0">
+            <a:pPr marL="0" indent="0" algn="l">
               <a:buNone/>
             </a:pPr>
             <a:r>
@@ -15902,7 +15720,7 @@
           <a:bodyPr wrap="square" lIns="0" tIns="0" rIns="0" bIns="0" rtlCol="0" anchor="ctr"/>
           <a:lstStyle/>
           <a:p>
-            <a:pPr algn="r" indent="0" marL="0">
+            <a:pPr marL="0" indent="0" algn="r">
               <a:buNone/>
             </a:pPr>
             <a:r>
@@ -15941,11 +15759,11 @@
           <a:bodyPr wrap="square" lIns="0" tIns="0" rIns="0" bIns="0" rtlCol="0" anchor="ctr"/>
           <a:lstStyle/>
           <a:p>
-            <a:pPr algn="r" indent="0" marL="0">
-              <a:buNone/>
-            </a:pPr>
-            <a:r>
-              <a:rPr lang="en-US" sz="900" b="1" spc="100" kern="0" dirty="0">
+            <a:pPr marL="0" indent="0" algn="r">
+              <a:buNone/>
+            </a:pPr>
+            <a:r>
+              <a:rPr lang="en-US" sz="900" b="1" kern="0" spc="100" dirty="0">
                 <a:solidFill>
                   <a:srgbClr val="C5394A"/>
                 </a:solidFill>
@@ -15980,11 +15798,11 @@
           <a:bodyPr wrap="square" lIns="0" tIns="0" rIns="0" bIns="0" rtlCol="0" anchor="ctr"/>
           <a:lstStyle/>
           <a:p>
-            <a:pPr indent="0" marL="0">
-              <a:buNone/>
-            </a:pPr>
-            <a:r>
-              <a:rPr lang="en-US" sz="1200" b="1" spc="200" kern="0" dirty="0">
+            <a:pPr marL="0" indent="0">
+              <a:buNone/>
+            </a:pPr>
+            <a:r>
+              <a:rPr lang="en-US" sz="1200" b="1" kern="0" spc="200" dirty="0">
                 <a:solidFill>
                   <a:srgbClr val="C5394A"/>
                 </a:solidFill>
@@ -16019,7 +15837,7 @@
           <a:bodyPr wrap="square" lIns="0" tIns="0" rIns="0" bIns="0" rtlCol="0" anchor="ctr"/>
           <a:lstStyle/>
           <a:p>
-            <a:pPr indent="0" marL="0">
+            <a:pPr marL="0" indent="0">
               <a:buNone/>
             </a:pPr>
             <a:r>
@@ -16056,7 +15874,7 @@
           </a:solidFill>
           <a:ln/>
           <a:effectLst>
-            <a:outerShdw sx="100000" sy="100000" kx="0" ky="0" algn="bl" rotWithShape="0" blurRad="101600" dist="38100" dir="5400000">
+            <a:outerShdw blurRad="101600" dist="38100" dir="5400000" algn="bl" rotWithShape="0">
               <a:srgbClr val="000000">
                 <a:alpha val="8000"/>
               </a:srgbClr>
@@ -16085,7 +15903,7 @@
           <a:bodyPr wrap="square" rtlCol="0" anchor="ctr"/>
           <a:lstStyle/>
           <a:p>
-            <a:pPr indent="0" marL="0">
+            <a:pPr marL="0" indent="0">
               <a:buNone/>
             </a:pPr>
             <a:r>
@@ -16124,7 +15942,7 @@
           <a:bodyPr wrap="square" rtlCol="0" anchor="ctr"/>
           <a:lstStyle/>
           <a:p>
-            <a:pPr indent="0" marL="0">
+            <a:pPr marL="0" indent="0">
               <a:buNone/>
             </a:pPr>
             <a:r>
@@ -16189,14 +16007,14 @@
       </p:sp>
       <p:pic>
         <p:nvPicPr>
-          <p:cNvPr id="14" name="Image 0" descr="preencoded.png">    </p:cNvPr>
+          <p:cNvPr id="14" name="Image 0" descr="preencoded.png"/>
           <p:cNvPicPr>
             <a:picLocks noChangeAspect="1"/>
           </p:cNvPicPr>
           <p:nvPr/>
         </p:nvPicPr>
         <p:blipFill>
-          <a:blip r:embed="rId1"/>
+          <a:blip r:embed="rId3"/>
           <a:stretch>
             <a:fillRect/>
           </a:stretch>
@@ -16232,7 +16050,7 @@
           <a:bodyPr wrap="square" lIns="0" tIns="0" rIns="0" bIns="0" rtlCol="0" anchor="ctr"/>
           <a:lstStyle/>
           <a:p>
-            <a:pPr indent="0" marL="0">
+            <a:pPr marL="0" indent="0">
               <a:buNone/>
             </a:pPr>
             <a:r>
@@ -16271,7 +16089,7 @@
           <a:bodyPr wrap="square" lIns="0" tIns="0" rIns="0" bIns="0" rtlCol="0" anchor="ctr"/>
           <a:lstStyle/>
           <a:p>
-            <a:pPr indent="0" marL="0">
+            <a:pPr marL="0" indent="0">
               <a:buNone/>
             </a:pPr>
             <a:r>
@@ -16336,14 +16154,14 @@
       </p:sp>
       <p:pic>
         <p:nvPicPr>
-          <p:cNvPr id="19" name="Image 1" descr="preencoded.png">    </p:cNvPr>
+          <p:cNvPr id="19" name="Image 1" descr="preencoded.png"/>
           <p:cNvPicPr>
             <a:picLocks noChangeAspect="1"/>
           </p:cNvPicPr>
           <p:nvPr/>
         </p:nvPicPr>
         <p:blipFill>
-          <a:blip r:embed="rId2"/>
+          <a:blip r:embed="rId4"/>
           <a:stretch>
             <a:fillRect/>
           </a:stretch>
@@ -16379,7 +16197,7 @@
           <a:bodyPr wrap="square" lIns="0" tIns="0" rIns="0" bIns="0" rtlCol="0" anchor="ctr"/>
           <a:lstStyle/>
           <a:p>
-            <a:pPr indent="0" marL="0">
+            <a:pPr marL="0" indent="0">
               <a:buNone/>
             </a:pPr>
             <a:r>
@@ -16418,7 +16236,7 @@
           <a:bodyPr wrap="square" lIns="0" tIns="0" rIns="0" bIns="0" rtlCol="0" anchor="ctr"/>
           <a:lstStyle/>
           <a:p>
-            <a:pPr indent="0" marL="0">
+            <a:pPr marL="0" indent="0">
               <a:buNone/>
             </a:pPr>
             <a:r>
@@ -16457,7 +16275,7 @@
           <a:bodyPr wrap="square" rtlCol="0" anchor="ctr"/>
           <a:lstStyle/>
           <a:p>
-            <a:pPr indent="0" marL="0">
+            <a:pPr marL="0" indent="0">
               <a:buNone/>
             </a:pPr>
             <a:r>
@@ -16521,7 +16339,7 @@
           <a:bodyPr wrap="square" lIns="0" tIns="0" rIns="0" bIns="0" rtlCol="0" anchor="ctr"/>
           <a:lstStyle/>
           <a:p>
-            <a:pPr algn="ctr" indent="0" marL="0">
+            <a:pPr marL="0" indent="0" algn="ctr">
               <a:buNone/>
             </a:pPr>
             <a:r>
@@ -16560,7 +16378,7 @@
           <a:bodyPr wrap="square" lIns="0" tIns="0" rIns="0" bIns="0" rtlCol="0" anchor="ctr"/>
           <a:lstStyle/>
           <a:p>
-            <a:pPr algn="ctr" indent="0" marL="0">
+            <a:pPr marL="0" indent="0" algn="ctr">
               <a:buNone/>
             </a:pPr>
             <a:r>
@@ -16624,7 +16442,7 @@
           <a:bodyPr wrap="square" lIns="0" tIns="0" rIns="0" bIns="0" rtlCol="0" anchor="ctr"/>
           <a:lstStyle/>
           <a:p>
-            <a:pPr algn="ctr" indent="0" marL="0">
+            <a:pPr marL="0" indent="0" algn="ctr">
               <a:buNone/>
             </a:pPr>
             <a:r>
@@ -16663,7 +16481,7 @@
           <a:bodyPr wrap="square" lIns="0" tIns="0" rIns="0" bIns="0" rtlCol="0" anchor="ctr"/>
           <a:lstStyle/>
           <a:p>
-            <a:pPr algn="ctr" indent="0" marL="0">
+            <a:pPr marL="0" indent="0" algn="ctr">
               <a:buNone/>
             </a:pPr>
             <a:r>
@@ -16727,7 +16545,7 @@
           <a:bodyPr wrap="square" lIns="0" tIns="0" rIns="0" bIns="0" rtlCol="0" anchor="ctr"/>
           <a:lstStyle/>
           <a:p>
-            <a:pPr algn="ctr" indent="0" marL="0">
+            <a:pPr marL="0" indent="0" algn="ctr">
               <a:buNone/>
             </a:pPr>
             <a:r>
@@ -16766,7 +16584,7 @@
           <a:bodyPr wrap="square" lIns="0" tIns="0" rIns="0" bIns="0" rtlCol="0" anchor="ctr"/>
           <a:lstStyle/>
           <a:p>
-            <a:pPr algn="ctr" indent="0" marL="0">
+            <a:pPr marL="0" indent="0" algn="ctr">
               <a:buNone/>
             </a:pPr>
             <a:r>
@@ -16830,7 +16648,7 @@
           <a:bodyPr wrap="square" lIns="0" tIns="0" rIns="0" bIns="0" rtlCol="0" anchor="ctr"/>
           <a:lstStyle/>
           <a:p>
-            <a:pPr algn="ctr" indent="0" marL="0">
+            <a:pPr marL="0" indent="0" algn="ctr">
               <a:buNone/>
             </a:pPr>
             <a:r>
@@ -16869,7 +16687,7 @@
           <a:bodyPr wrap="square" lIns="0" tIns="0" rIns="0" bIns="0" rtlCol="0" anchor="ctr"/>
           <a:lstStyle/>
           <a:p>
-            <a:pPr algn="ctr" indent="0" marL="0">
+            <a:pPr marL="0" indent="0" algn="ctr">
               <a:buNone/>
             </a:pPr>
             <a:r>
@@ -16933,7 +16751,7 @@
           <a:bodyPr wrap="square" lIns="0" tIns="0" rIns="0" bIns="0" rtlCol="0" anchor="ctr"/>
           <a:lstStyle/>
           <a:p>
-            <a:pPr algn="ctr" indent="0" marL="0">
+            <a:pPr marL="0" indent="0" algn="ctr">
               <a:buNone/>
             </a:pPr>
             <a:r>
@@ -16972,7 +16790,7 @@
           <a:bodyPr wrap="square" lIns="0" tIns="0" rIns="0" bIns="0" rtlCol="0" anchor="ctr"/>
           <a:lstStyle/>
           <a:p>
-            <a:pPr algn="ctr" indent="0" marL="0">
+            <a:pPr marL="0" indent="0" algn="ctr">
               <a:buNone/>
             </a:pPr>
             <a:r>
@@ -17036,7 +16854,7 @@
           <a:bodyPr wrap="square" lIns="0" tIns="0" rIns="0" bIns="0" rtlCol="0" anchor="ctr"/>
           <a:lstStyle/>
           <a:p>
-            <a:pPr algn="ctr" indent="0" marL="0">
+            <a:pPr marL="0" indent="0" algn="ctr">
               <a:buNone/>
             </a:pPr>
             <a:r>
@@ -17075,7 +16893,7 @@
           <a:bodyPr wrap="square" lIns="0" tIns="0" rIns="0" bIns="0" rtlCol="0" anchor="ctr"/>
           <a:lstStyle/>
           <a:p>
-            <a:pPr algn="ctr" indent="0" marL="0">
+            <a:pPr marL="0" indent="0" algn="ctr">
               <a:buNone/>
             </a:pPr>
             <a:r>
@@ -17139,7 +16957,7 @@
           <a:bodyPr wrap="square" lIns="0" tIns="0" rIns="0" bIns="0" rtlCol="0" anchor="ctr"/>
           <a:lstStyle/>
           <a:p>
-            <a:pPr algn="ctr" indent="0" marL="0">
+            <a:pPr marL="0" indent="0" algn="ctr">
               <a:buNone/>
             </a:pPr>
             <a:r>
@@ -17173,6 +16991,7 @@
         <a:solidFill>
           <a:srgbClr val="FFFFFF"/>
         </a:solidFill>
+        <a:effectLst/>
       </p:bgPr>
     </p:bg>
     <p:spTree>
@@ -17250,7 +17069,7 @@
           <a:bodyPr wrap="square" lIns="0" tIns="0" rIns="0" bIns="0" rtlCol="0" anchor="ctr"/>
           <a:lstStyle/>
           <a:p>
-            <a:pPr algn="l" indent="0" marL="0">
+            <a:pPr marL="0" indent="0" algn="l">
               <a:buNone/>
             </a:pPr>
             <a:r>
@@ -17289,7 +17108,7 @@
           <a:bodyPr wrap="square" lIns="0" tIns="0" rIns="0" bIns="0" rtlCol="0" anchor="ctr"/>
           <a:lstStyle/>
           <a:p>
-            <a:pPr algn="r" indent="0" marL="0">
+            <a:pPr marL="0" indent="0" algn="r">
               <a:buNone/>
             </a:pPr>
             <a:r>
@@ -17328,11 +17147,11 @@
           <a:bodyPr wrap="square" lIns="0" tIns="0" rIns="0" bIns="0" rtlCol="0" anchor="ctr"/>
           <a:lstStyle/>
           <a:p>
-            <a:pPr algn="r" indent="0" marL="0">
-              <a:buNone/>
-            </a:pPr>
-            <a:r>
-              <a:rPr lang="en-US" sz="900" b="1" spc="100" kern="0" dirty="0">
+            <a:pPr marL="0" indent="0" algn="r">
+              <a:buNone/>
+            </a:pPr>
+            <a:r>
+              <a:rPr lang="en-US" sz="900" b="1" kern="0" spc="100" dirty="0">
                 <a:solidFill>
                   <a:srgbClr val="C5394A"/>
                 </a:solidFill>
@@ -17367,11 +17186,11 @@
           <a:bodyPr wrap="square" lIns="0" tIns="0" rIns="0" bIns="0" rtlCol="0" anchor="ctr"/>
           <a:lstStyle/>
           <a:p>
-            <a:pPr indent="0" marL="0">
-              <a:buNone/>
-            </a:pPr>
-            <a:r>
-              <a:rPr lang="en-US" sz="1200" b="1" spc="200" kern="0" dirty="0">
+            <a:pPr marL="0" indent="0">
+              <a:buNone/>
+            </a:pPr>
+            <a:r>
+              <a:rPr lang="en-US" sz="1200" b="1" kern="0" spc="200" dirty="0">
                 <a:solidFill>
                   <a:srgbClr val="C5394A"/>
                 </a:solidFill>
@@ -17406,7 +17225,7 @@
           <a:bodyPr wrap="square" lIns="0" tIns="0" rIns="0" bIns="0" rtlCol="0" anchor="ctr"/>
           <a:lstStyle/>
           <a:p>
-            <a:pPr indent="0" marL="0">
+            <a:pPr marL="0" indent="0">
               <a:buNone/>
             </a:pPr>
             <a:r>
@@ -17469,14 +17288,14 @@
       </p:sp>
       <p:pic>
         <p:nvPicPr>
-          <p:cNvPr id="11" name="Image 0" descr="preencoded.png">    </p:cNvPr>
+          <p:cNvPr id="11" name="Image 0" descr="preencoded.png"/>
           <p:cNvPicPr>
             <a:picLocks noChangeAspect="1"/>
           </p:cNvPicPr>
           <p:nvPr/>
         </p:nvPicPr>
         <p:blipFill>
-          <a:blip r:embed="rId1"/>
+          <a:blip r:embed="rId3"/>
           <a:stretch>
             <a:fillRect/>
           </a:stretch>
@@ -17537,7 +17356,7 @@
           <a:bodyPr wrap="square" lIns="0" tIns="0" rIns="0" bIns="0" rtlCol="0" anchor="ctr"/>
           <a:lstStyle/>
           <a:p>
-            <a:pPr algn="ctr" indent="0" marL="0">
+            <a:pPr marL="0" indent="0" algn="ctr">
               <a:buNone/>
             </a:pPr>
             <a:r>
@@ -17579,7 +17398,7 @@
             <a:prstDash val="solid"/>
           </a:ln>
           <a:effectLst>
-            <a:outerShdw sx="100000" sy="100000" kx="0" ky="0" algn="bl" rotWithShape="0" blurRad="101600" dist="38100" dir="5400000">
+            <a:outerShdw blurRad="101600" dist="38100" dir="5400000" algn="bl" rotWithShape="0">
               <a:srgbClr val="000000">
                 <a:alpha val="8000"/>
               </a:srgbClr>
@@ -17628,7 +17447,7 @@
           <a:bodyPr wrap="square" lIns="0" tIns="0" rIns="0" bIns="0" rtlCol="0" anchor="ctr"/>
           <a:lstStyle/>
           <a:p>
-            <a:pPr algn="ctr" indent="0" marL="0">
+            <a:pPr marL="0" indent="0" algn="ctr">
               <a:buNone/>
             </a:pPr>
             <a:r>
@@ -17667,7 +17486,7 @@
           <a:bodyPr wrap="square" rtlCol="0" anchor="t"/>
           <a:lstStyle/>
           <a:p>
-            <a:pPr algn="ctr" indent="0" marL="0">
+            <a:pPr marL="0" indent="0" algn="ctr">
               <a:buNone/>
             </a:pPr>
             <a:r>
@@ -17707,14 +17526,14 @@
       </p:sp>
       <p:pic>
         <p:nvPicPr>
-          <p:cNvPr id="19" name="Image 1" descr="preencoded.png">    </p:cNvPr>
+          <p:cNvPr id="19" name="Image 1" descr="preencoded.png"/>
           <p:cNvPicPr>
             <a:picLocks noChangeAspect="1"/>
           </p:cNvPicPr>
           <p:nvPr/>
         </p:nvPicPr>
         <p:blipFill>
-          <a:blip r:embed="rId2"/>
+          <a:blip r:embed="rId4"/>
           <a:stretch>
             <a:fillRect/>
           </a:stretch>
@@ -17775,7 +17594,7 @@
           <a:bodyPr wrap="square" lIns="0" tIns="0" rIns="0" bIns="0" rtlCol="0" anchor="ctr"/>
           <a:lstStyle/>
           <a:p>
-            <a:pPr algn="ctr" indent="0" marL="0">
+            <a:pPr marL="0" indent="0" algn="ctr">
               <a:buNone/>
             </a:pPr>
             <a:r>
@@ -17817,7 +17636,7 @@
             <a:prstDash val="solid"/>
           </a:ln>
           <a:effectLst>
-            <a:outerShdw sx="100000" sy="100000" kx="0" ky="0" algn="bl" rotWithShape="0" blurRad="101600" dist="38100" dir="5400000">
+            <a:outerShdw blurRad="101600" dist="38100" dir="5400000" algn="bl" rotWithShape="0">
               <a:srgbClr val="000000">
                 <a:alpha val="8000"/>
               </a:srgbClr>
@@ -17866,7 +17685,7 @@
           <a:bodyPr wrap="square" lIns="0" tIns="0" rIns="0" bIns="0" rtlCol="0" anchor="ctr"/>
           <a:lstStyle/>
           <a:p>
-            <a:pPr algn="ctr" indent="0" marL="0">
+            <a:pPr marL="0" indent="0" algn="ctr">
               <a:buNone/>
             </a:pPr>
             <a:r>
@@ -17905,7 +17724,7 @@
           <a:bodyPr wrap="square" rtlCol="0" anchor="t"/>
           <a:lstStyle/>
           <a:p>
-            <a:pPr algn="ctr" indent="0" marL="0">
+            <a:pPr marL="0" indent="0" algn="ctr">
               <a:buNone/>
             </a:pPr>
             <a:r>
@@ -17945,14 +17764,14 @@
       </p:sp>
       <p:pic>
         <p:nvPicPr>
-          <p:cNvPr id="27" name="Image 2" descr="preencoded.png">    </p:cNvPr>
+          <p:cNvPr id="27" name="Image 2" descr="preencoded.png"/>
           <p:cNvPicPr>
             <a:picLocks noChangeAspect="1"/>
           </p:cNvPicPr>
           <p:nvPr/>
         </p:nvPicPr>
         <p:blipFill>
-          <a:blip r:embed="rId3"/>
+          <a:blip r:embed="rId5"/>
           <a:stretch>
             <a:fillRect/>
           </a:stretch>
@@ -18013,7 +17832,7 @@
           <a:bodyPr wrap="square" lIns="0" tIns="0" rIns="0" bIns="0" rtlCol="0" anchor="ctr"/>
           <a:lstStyle/>
           <a:p>
-            <a:pPr algn="ctr" indent="0" marL="0">
+            <a:pPr marL="0" indent="0" algn="ctr">
               <a:buNone/>
             </a:pPr>
             <a:r>
@@ -18055,7 +17874,7 @@
             <a:prstDash val="solid"/>
           </a:ln>
           <a:effectLst>
-            <a:outerShdw sx="100000" sy="100000" kx="0" ky="0" algn="bl" rotWithShape="0" blurRad="101600" dist="38100" dir="5400000">
+            <a:outerShdw blurRad="101600" dist="38100" dir="5400000" algn="bl" rotWithShape="0">
               <a:srgbClr val="000000">
                 <a:alpha val="8000"/>
               </a:srgbClr>
@@ -18104,7 +17923,7 @@
           <a:bodyPr wrap="square" lIns="0" tIns="0" rIns="0" bIns="0" rtlCol="0" anchor="ctr"/>
           <a:lstStyle/>
           <a:p>
-            <a:pPr algn="ctr" indent="0" marL="0">
+            <a:pPr marL="0" indent="0" algn="ctr">
               <a:buNone/>
             </a:pPr>
             <a:r>
@@ -18143,7 +17962,7 @@
           <a:bodyPr wrap="square" rtlCol="0" anchor="t"/>
           <a:lstStyle/>
           <a:p>
-            <a:pPr algn="ctr" indent="0" marL="0">
+            <a:pPr marL="0" indent="0" algn="ctr">
               <a:buNone/>
             </a:pPr>
             <a:r>
@@ -18183,14 +18002,14 @@
       </p:sp>
       <p:pic>
         <p:nvPicPr>
-          <p:cNvPr id="35" name="Image 3" descr="preencoded.png">    </p:cNvPr>
+          <p:cNvPr id="35" name="Image 3" descr="preencoded.png"/>
           <p:cNvPicPr>
             <a:picLocks noChangeAspect="1"/>
           </p:cNvPicPr>
           <p:nvPr/>
         </p:nvPicPr>
         <p:blipFill>
-          <a:blip r:embed="rId4"/>
+          <a:blip r:embed="rId6"/>
           <a:stretch>
             <a:fillRect/>
           </a:stretch>
@@ -18251,7 +18070,7 @@
           <a:bodyPr wrap="square" lIns="0" tIns="0" rIns="0" bIns="0" rtlCol="0" anchor="ctr"/>
           <a:lstStyle/>
           <a:p>
-            <a:pPr algn="ctr" indent="0" marL="0">
+            <a:pPr marL="0" indent="0" algn="ctr">
               <a:buNone/>
             </a:pPr>
             <a:r>
@@ -18293,7 +18112,7 @@
             <a:prstDash val="solid"/>
           </a:ln>
           <a:effectLst>
-            <a:outerShdw sx="100000" sy="100000" kx="0" ky="0" algn="bl" rotWithShape="0" blurRad="101600" dist="38100" dir="5400000">
+            <a:outerShdw blurRad="101600" dist="38100" dir="5400000" algn="bl" rotWithShape="0">
               <a:srgbClr val="000000">
                 <a:alpha val="8000"/>
               </a:srgbClr>
@@ -18342,7 +18161,7 @@
           <a:bodyPr wrap="square" lIns="0" tIns="0" rIns="0" bIns="0" rtlCol="0" anchor="ctr"/>
           <a:lstStyle/>
           <a:p>
-            <a:pPr algn="ctr" indent="0" marL="0">
+            <a:pPr marL="0" indent="0" algn="ctr">
               <a:buNone/>
             </a:pPr>
             <a:r>
@@ -18381,7 +18200,7 @@
           <a:bodyPr wrap="square" rtlCol="0" anchor="t"/>
           <a:lstStyle/>
           <a:p>
-            <a:pPr algn="ctr" indent="0" marL="0">
+            <a:pPr marL="0" indent="0" algn="ctr">
               <a:buNone/>
             </a:pPr>
             <a:r>
@@ -18415,6 +18234,7 @@
         <a:solidFill>
           <a:srgbClr val="FFFFFF"/>
         </a:solidFill>
+        <a:effectLst/>
       </p:bgPr>
     </p:bg>
     <p:spTree>
@@ -18492,7 +18312,7 @@
           <a:bodyPr wrap="square" lIns="0" tIns="0" rIns="0" bIns="0" rtlCol="0" anchor="ctr"/>
           <a:lstStyle/>
           <a:p>
-            <a:pPr algn="l" indent="0" marL="0">
+            <a:pPr marL="0" indent="0" algn="l">
               <a:buNone/>
             </a:pPr>
             <a:r>
@@ -18531,7 +18351,7 @@
           <a:bodyPr wrap="square" lIns="0" tIns="0" rIns="0" bIns="0" rtlCol="0" anchor="ctr"/>
           <a:lstStyle/>
           <a:p>
-            <a:pPr algn="r" indent="0" marL="0">
+            <a:pPr marL="0" indent="0" algn="r">
               <a:buNone/>
             </a:pPr>
             <a:r>
@@ -18570,11 +18390,11 @@
           <a:bodyPr wrap="square" lIns="0" tIns="0" rIns="0" bIns="0" rtlCol="0" anchor="ctr"/>
           <a:lstStyle/>
           <a:p>
-            <a:pPr algn="r" indent="0" marL="0">
-              <a:buNone/>
-            </a:pPr>
-            <a:r>
-              <a:rPr lang="en-US" sz="900" b="1" spc="100" kern="0" dirty="0">
+            <a:pPr marL="0" indent="0" algn="r">
+              <a:buNone/>
+            </a:pPr>
+            <a:r>
+              <a:rPr lang="en-US" sz="900" b="1" kern="0" spc="100" dirty="0">
                 <a:solidFill>
                   <a:srgbClr val="C5394A"/>
                 </a:solidFill>
@@ -18609,11 +18429,11 @@
           <a:bodyPr wrap="square" lIns="0" tIns="0" rIns="0" bIns="0" rtlCol="0" anchor="ctr"/>
           <a:lstStyle/>
           <a:p>
-            <a:pPr indent="0" marL="0">
-              <a:buNone/>
-            </a:pPr>
-            <a:r>
-              <a:rPr lang="en-US" sz="1200" b="1" spc="200" kern="0" dirty="0">
+            <a:pPr marL="0" indent="0">
+              <a:buNone/>
+            </a:pPr>
+            <a:r>
+              <a:rPr lang="en-US" sz="1200" b="1" kern="0" spc="200" dirty="0">
                 <a:solidFill>
                   <a:srgbClr val="C5394A"/>
                 </a:solidFill>
@@ -18648,7 +18468,7 @@
           <a:bodyPr wrap="square" lIns="0" tIns="0" rIns="0" bIns="0" rtlCol="0" anchor="ctr"/>
           <a:lstStyle/>
           <a:p>
-            <a:pPr indent="0" marL="0">
+            <a:pPr marL="0" indent="0">
               <a:buNone/>
             </a:pPr>
             <a:r>
@@ -18690,7 +18510,7 @@
             <a:prstDash val="solid"/>
           </a:ln>
           <a:effectLst>
-            <a:outerShdw sx="100000" sy="100000" kx="0" ky="0" algn="bl" rotWithShape="0" blurRad="101600" dist="38100" dir="5400000">
+            <a:outerShdw blurRad="101600" dist="38100" dir="5400000" algn="bl" rotWithShape="0">
               <a:srgbClr val="000000">
                 <a:alpha val="8000"/>
               </a:srgbClr>
@@ -18740,14 +18560,14 @@
       </p:sp>
       <p:pic>
         <p:nvPicPr>
-          <p:cNvPr id="12" name="Image 0" descr="preencoded.png">    </p:cNvPr>
+          <p:cNvPr id="12" name="Image 0" descr="preencoded.png"/>
           <p:cNvPicPr>
             <a:picLocks noChangeAspect="1"/>
           </p:cNvPicPr>
           <p:nvPr/>
         </p:nvPicPr>
         <p:blipFill>
-          <a:blip r:embed="rId1"/>
+          <a:blip r:embed="rId3"/>
           <a:stretch>
             <a:fillRect/>
           </a:stretch>
@@ -18783,7 +18603,7 @@
           <a:bodyPr wrap="square" lIns="0" tIns="0" rIns="0" bIns="0" rtlCol="0" anchor="ctr"/>
           <a:lstStyle/>
           <a:p>
-            <a:pPr algn="ctr" indent="0" marL="0">
+            <a:pPr marL="0" indent="0" algn="ctr">
               <a:buNone/>
             </a:pPr>
             <a:r>
@@ -18822,7 +18642,7 @@
           <a:bodyPr wrap="square" lIns="0" tIns="0" rIns="0" bIns="0" rtlCol="0" anchor="ctr"/>
           <a:lstStyle/>
           <a:p>
-            <a:pPr algn="ctr" indent="0" marL="0">
+            <a:pPr marL="0" indent="0" algn="ctr">
               <a:buNone/>
             </a:pPr>
             <a:r>
@@ -18861,7 +18681,7 @@
           <a:bodyPr wrap="square" rtlCol="0" anchor="ctr"/>
           <a:lstStyle/>
           <a:p>
-            <a:pPr algn="l" marL="152400" indent="-152400">
+            <a:pPr marL="152400" indent="-152400" algn="l">
               <a:spcAft>
                 <a:spcPts val="600"/>
               </a:spcAft>
@@ -18882,7 +18702,7 @@
             <a:endParaRPr lang="en-US" sz="1200" dirty="0"/>
           </a:p>
           <a:p>
-            <a:pPr algn="l" marL="152400" indent="-152400">
+            <a:pPr marL="152400" indent="-152400" algn="l">
               <a:spcAft>
                 <a:spcPts val="600"/>
               </a:spcAft>
@@ -18925,7 +18745,7 @@
           <a:bodyPr wrap="square" lIns="0" tIns="0" rIns="0" bIns="0" rtlCol="0" anchor="ctr"/>
           <a:lstStyle/>
           <a:p>
-            <a:pPr algn="ctr" indent="0" marL="0">
+            <a:pPr marL="0" indent="0" algn="ctr">
               <a:buNone/>
             </a:pPr>
             <a:r>
@@ -18989,7 +18809,7 @@
           <a:bodyPr wrap="square" lIns="0" tIns="0" rIns="0" bIns="0" rtlCol="0" anchor="ctr"/>
           <a:lstStyle/>
           <a:p>
-            <a:pPr algn="ctr" indent="0" marL="0">
+            <a:pPr marL="0" indent="0" algn="ctr">
               <a:buNone/>
             </a:pPr>
             <a:r>
@@ -19031,7 +18851,7 @@
             <a:prstDash val="solid"/>
           </a:ln>
           <a:effectLst>
-            <a:outerShdw sx="100000" sy="100000" kx="0" ky="0" algn="bl" rotWithShape="0" blurRad="101600" dist="38100" dir="5400000">
+            <a:outerShdw blurRad="101600" dist="38100" dir="5400000" algn="bl" rotWithShape="0">
               <a:srgbClr val="000000">
                 <a:alpha val="8000"/>
               </a:srgbClr>
@@ -19081,14 +18901,14 @@
       </p:sp>
       <p:pic>
         <p:nvPicPr>
-          <p:cNvPr id="22" name="Image 1" descr="preencoded.png">    </p:cNvPr>
+          <p:cNvPr id="22" name="Image 1" descr="preencoded.png"/>
           <p:cNvPicPr>
             <a:picLocks noChangeAspect="1"/>
           </p:cNvPicPr>
           <p:nvPr/>
         </p:nvPicPr>
         <p:blipFill>
-          <a:blip r:embed="rId2"/>
+          <a:blip r:embed="rId4"/>
           <a:stretch>
             <a:fillRect/>
           </a:stretch>
@@ -19124,7 +18944,7 @@
           <a:bodyPr wrap="square" lIns="0" tIns="0" rIns="0" bIns="0" rtlCol="0" anchor="ctr"/>
           <a:lstStyle/>
           <a:p>
-            <a:pPr algn="ctr" indent="0" marL="0">
+            <a:pPr marL="0" indent="0" algn="ctr">
               <a:buNone/>
             </a:pPr>
             <a:r>
@@ -19163,7 +18983,7 @@
           <a:bodyPr wrap="square" lIns="0" tIns="0" rIns="0" bIns="0" rtlCol="0" anchor="ctr"/>
           <a:lstStyle/>
           <a:p>
-            <a:pPr algn="ctr" indent="0" marL="0">
+            <a:pPr marL="0" indent="0" algn="ctr">
               <a:buNone/>
             </a:pPr>
             <a:r>
@@ -19202,7 +19022,7 @@
           <a:bodyPr wrap="square" rtlCol="0" anchor="ctr"/>
           <a:lstStyle/>
           <a:p>
-            <a:pPr algn="l" marL="152400" indent="-152400">
+            <a:pPr marL="152400" indent="-152400" algn="l">
               <a:spcAft>
                 <a:spcPts val="600"/>
               </a:spcAft>
@@ -19223,7 +19043,7 @@
             <a:endParaRPr lang="en-US" sz="1200" dirty="0"/>
           </a:p>
           <a:p>
-            <a:pPr algn="l" marL="152400" indent="-152400">
+            <a:pPr marL="152400" indent="-152400" algn="l">
               <a:spcAft>
                 <a:spcPts val="600"/>
               </a:spcAft>
@@ -19266,7 +19086,7 @@
           <a:bodyPr wrap="square" lIns="0" tIns="0" rIns="0" bIns="0" rtlCol="0" anchor="ctr"/>
           <a:lstStyle/>
           <a:p>
-            <a:pPr algn="ctr" indent="0" marL="0">
+            <a:pPr marL="0" indent="0" algn="ctr">
               <a:buNone/>
             </a:pPr>
             <a:r>
@@ -19330,7 +19150,7 @@
           <a:bodyPr wrap="square" lIns="0" tIns="0" rIns="0" bIns="0" rtlCol="0" anchor="ctr"/>
           <a:lstStyle/>
           <a:p>
-            <a:pPr algn="ctr" indent="0" marL="0">
+            <a:pPr marL="0" indent="0" algn="ctr">
               <a:buNone/>
             </a:pPr>
             <a:r>
@@ -19372,7 +19192,7 @@
             <a:prstDash val="solid"/>
           </a:ln>
           <a:effectLst>
-            <a:outerShdw sx="100000" sy="100000" kx="0" ky="0" algn="bl" rotWithShape="0" blurRad="101600" dist="38100" dir="5400000">
+            <a:outerShdw blurRad="101600" dist="38100" dir="5400000" algn="bl" rotWithShape="0">
               <a:srgbClr val="000000">
                 <a:alpha val="8000"/>
               </a:srgbClr>
@@ -19422,14 +19242,14 @@
       </p:sp>
       <p:pic>
         <p:nvPicPr>
-          <p:cNvPr id="32" name="Image 2" descr="preencoded.png">    </p:cNvPr>
+          <p:cNvPr id="32" name="Image 2" descr="preencoded.png"/>
           <p:cNvPicPr>
             <a:picLocks noChangeAspect="1"/>
           </p:cNvPicPr>
           <p:nvPr/>
         </p:nvPicPr>
         <p:blipFill>
-          <a:blip r:embed="rId3"/>
+          <a:blip r:embed="rId5"/>
           <a:stretch>
             <a:fillRect/>
           </a:stretch>
@@ -19465,7 +19285,7 @@
           <a:bodyPr wrap="square" lIns="0" tIns="0" rIns="0" bIns="0" rtlCol="0" anchor="ctr"/>
           <a:lstStyle/>
           <a:p>
-            <a:pPr algn="ctr" indent="0" marL="0">
+            <a:pPr marL="0" indent="0" algn="ctr">
               <a:buNone/>
             </a:pPr>
             <a:r>
@@ -19504,7 +19324,7 @@
           <a:bodyPr wrap="square" lIns="0" tIns="0" rIns="0" bIns="0" rtlCol="0" anchor="ctr"/>
           <a:lstStyle/>
           <a:p>
-            <a:pPr algn="ctr" indent="0" marL="0">
+            <a:pPr marL="0" indent="0" algn="ctr">
               <a:buNone/>
             </a:pPr>
             <a:r>
@@ -19543,7 +19363,7 @@
           <a:bodyPr wrap="square" rtlCol="0" anchor="ctr"/>
           <a:lstStyle/>
           <a:p>
-            <a:pPr algn="l" marL="152400" indent="-152400">
+            <a:pPr marL="152400" indent="-152400" algn="l">
               <a:spcAft>
                 <a:spcPts val="600"/>
               </a:spcAft>
@@ -19564,7 +19384,7 @@
             <a:endParaRPr lang="en-US" sz="1200" dirty="0"/>
           </a:p>
           <a:p>
-            <a:pPr algn="l" marL="152400" indent="-152400">
+            <a:pPr marL="152400" indent="-152400" algn="l">
               <a:spcAft>
                 <a:spcPts val="600"/>
               </a:spcAft>
@@ -19633,14 +19453,14 @@
       </p:sp>
       <p:pic>
         <p:nvPicPr>
-          <p:cNvPr id="38" name="Image 3" descr="preencoded.png">    </p:cNvPr>
+          <p:cNvPr id="38" name="Image 3" descr="preencoded.png"/>
           <p:cNvPicPr>
             <a:picLocks noChangeAspect="1"/>
           </p:cNvPicPr>
           <p:nvPr/>
         </p:nvPicPr>
         <p:blipFill>
-          <a:blip r:embed="rId4"/>
+          <a:blip r:embed="rId6"/>
           <a:stretch>
             <a:fillRect/>
           </a:stretch>
@@ -19676,7 +19496,7 @@
           <a:bodyPr wrap="square" rtlCol="0" anchor="ctr"/>
           <a:lstStyle/>
           <a:p>
-            <a:pPr indent="0" marL="0">
+            <a:pPr marL="0" indent="0">
               <a:buNone/>
             </a:pPr>
             <a:r>
@@ -19690,9 +19510,6 @@
               </a:rPr>
               <a:t>Klar getrennte Bausteine  </a:t>
             </a:r>
-            <a:pPr indent="0" marL="0">
-              <a:buNone/>
-            </a:pPr>
             <a:r>
               <a:rPr lang="en-US" sz="1300" dirty="0">
                 <a:solidFill>
@@ -19724,6 +19541,7 @@
         <a:solidFill>
           <a:srgbClr val="FFFFFF"/>
         </a:solidFill>
+        <a:effectLst/>
       </p:bgPr>
     </p:bg>
     <p:spTree>
@@ -19801,7 +19619,7 @@
           <a:bodyPr wrap="square" lIns="0" tIns="0" rIns="0" bIns="0" rtlCol="0" anchor="ctr"/>
           <a:lstStyle/>
           <a:p>
-            <a:pPr algn="l" indent="0" marL="0">
+            <a:pPr marL="0" indent="0" algn="l">
               <a:buNone/>
             </a:pPr>
             <a:r>
@@ -19840,7 +19658,7 @@
           <a:bodyPr wrap="square" lIns="0" tIns="0" rIns="0" bIns="0" rtlCol="0" anchor="ctr"/>
           <a:lstStyle/>
           <a:p>
-            <a:pPr algn="r" indent="0" marL="0">
+            <a:pPr marL="0" indent="0" algn="r">
               <a:buNone/>
             </a:pPr>
             <a:r>
@@ -19879,11 +19697,11 @@
           <a:bodyPr wrap="square" lIns="0" tIns="0" rIns="0" bIns="0" rtlCol="0" anchor="ctr"/>
           <a:lstStyle/>
           <a:p>
-            <a:pPr algn="r" indent="0" marL="0">
-              <a:buNone/>
-            </a:pPr>
-            <a:r>
-              <a:rPr lang="en-US" sz="900" b="1" spc="100" kern="0" dirty="0">
+            <a:pPr marL="0" indent="0" algn="r">
+              <a:buNone/>
+            </a:pPr>
+            <a:r>
+              <a:rPr lang="en-US" sz="900" b="1" kern="0" spc="100" dirty="0">
                 <a:solidFill>
                   <a:srgbClr val="C5394A"/>
                 </a:solidFill>
@@ -19918,11 +19736,11 @@
           <a:bodyPr wrap="square" lIns="0" tIns="0" rIns="0" bIns="0" rtlCol="0" anchor="ctr"/>
           <a:lstStyle/>
           <a:p>
-            <a:pPr indent="0" marL="0">
-              <a:buNone/>
-            </a:pPr>
-            <a:r>
-              <a:rPr lang="en-US" sz="1200" b="1" spc="200" kern="0" dirty="0">
+            <a:pPr marL="0" indent="0">
+              <a:buNone/>
+            </a:pPr>
+            <a:r>
+              <a:rPr lang="en-US" sz="1200" b="1" kern="0" spc="200" dirty="0">
                 <a:solidFill>
                   <a:srgbClr val="C5394A"/>
                 </a:solidFill>
@@ -19957,7 +19775,7 @@
           <a:bodyPr wrap="square" lIns="0" tIns="0" rIns="0" bIns="0" rtlCol="0" anchor="ctr"/>
           <a:lstStyle/>
           <a:p>
-            <a:pPr indent="0" marL="0">
+            <a:pPr marL="0" indent="0">
               <a:buNone/>
             </a:pPr>
             <a:r>
@@ -19999,7 +19817,7 @@
             <a:prstDash val="solid"/>
           </a:ln>
           <a:effectLst>
-            <a:outerShdw sx="100000" sy="100000" kx="0" ky="0" algn="bl" rotWithShape="0" blurRad="101600" dist="38100" dir="5400000">
+            <a:outerShdw blurRad="101600" dist="38100" dir="5400000" algn="bl" rotWithShape="0">
               <a:srgbClr val="000000">
                 <a:alpha val="8000"/>
               </a:srgbClr>
@@ -20049,14 +19867,14 @@
       </p:sp>
       <p:pic>
         <p:nvPicPr>
-          <p:cNvPr id="12" name="Image 0" descr="preencoded.png">    </p:cNvPr>
+          <p:cNvPr id="12" name="Image 0" descr="preencoded.png"/>
           <p:cNvPicPr>
             <a:picLocks noChangeAspect="1"/>
           </p:cNvPicPr>
           <p:nvPr/>
         </p:nvPicPr>
         <p:blipFill>
-          <a:blip r:embed="rId1"/>
+          <a:blip r:embed="rId3"/>
           <a:stretch>
             <a:fillRect/>
           </a:stretch>
@@ -20092,11 +19910,11 @@
           <a:bodyPr wrap="square" lIns="0" tIns="0" rIns="0" bIns="0" rtlCol="0" anchor="ctr"/>
           <a:lstStyle/>
           <a:p>
-            <a:pPr indent="0" marL="0">
-              <a:buNone/>
-            </a:pPr>
-            <a:r>
-              <a:rPr lang="en-US" sz="1000" b="1" spc="100" kern="0" dirty="0">
+            <a:pPr marL="0" indent="0">
+              <a:buNone/>
+            </a:pPr>
+            <a:r>
+              <a:rPr lang="en-US" sz="1000" b="1" kern="0" spc="100" dirty="0">
                 <a:solidFill>
                   <a:srgbClr val="C5394A"/>
                 </a:solidFill>
@@ -20131,7 +19949,7 @@
           <a:bodyPr wrap="square" lIns="0" tIns="0" rIns="0" bIns="0" rtlCol="0" anchor="ctr"/>
           <a:lstStyle/>
           <a:p>
-            <a:pPr indent="0" marL="0">
+            <a:pPr marL="0" indent="0">
               <a:buNone/>
             </a:pPr>
             <a:r>
@@ -20170,7 +19988,7 @@
           <a:bodyPr wrap="square" lIns="0" tIns="0" rIns="0" bIns="0" rtlCol="0" anchor="t"/>
           <a:lstStyle/>
           <a:p>
-            <a:pPr indent="0" marL="0">
+            <a:pPr marL="0" indent="0">
               <a:buNone/>
             </a:pPr>
             <a:r>
@@ -20212,7 +20030,7 @@
             <a:prstDash val="solid"/>
           </a:ln>
           <a:effectLst>
-            <a:outerShdw sx="100000" sy="100000" kx="0" ky="0" algn="bl" rotWithShape="0" blurRad="101600" dist="38100" dir="5400000">
+            <a:outerShdw blurRad="101600" dist="38100" dir="5400000" algn="bl" rotWithShape="0">
               <a:srgbClr val="000000">
                 <a:alpha val="8000"/>
               </a:srgbClr>
@@ -20262,14 +20080,14 @@
       </p:sp>
       <p:pic>
         <p:nvPicPr>
-          <p:cNvPr id="19" name="Image 1" descr="preencoded.png">    </p:cNvPr>
+          <p:cNvPr id="19" name="Image 1" descr="preencoded.png"/>
           <p:cNvPicPr>
             <a:picLocks noChangeAspect="1"/>
           </p:cNvPicPr>
           <p:nvPr/>
         </p:nvPicPr>
         <p:blipFill>
-          <a:blip r:embed="rId2"/>
+          <a:blip r:embed="rId4"/>
           <a:stretch>
             <a:fillRect/>
           </a:stretch>
@@ -20305,11 +20123,11 @@
           <a:bodyPr wrap="square" lIns="0" tIns="0" rIns="0" bIns="0" rtlCol="0" anchor="ctr"/>
           <a:lstStyle/>
           <a:p>
-            <a:pPr indent="0" marL="0">
-              <a:buNone/>
-            </a:pPr>
-            <a:r>
-              <a:rPr lang="en-US" sz="1000" b="1" spc="100" kern="0" dirty="0">
+            <a:pPr marL="0" indent="0">
+              <a:buNone/>
+            </a:pPr>
+            <a:r>
+              <a:rPr lang="en-US" sz="1000" b="1" kern="0" spc="100" dirty="0">
                 <a:solidFill>
                   <a:srgbClr val="3E4856"/>
                 </a:solidFill>
@@ -20344,7 +20162,7 @@
           <a:bodyPr wrap="square" lIns="0" tIns="0" rIns="0" bIns="0" rtlCol="0" anchor="ctr"/>
           <a:lstStyle/>
           <a:p>
-            <a:pPr indent="0" marL="0">
+            <a:pPr marL="0" indent="0">
               <a:buNone/>
             </a:pPr>
             <a:r>
@@ -20383,7 +20201,7 @@
           <a:bodyPr wrap="square" lIns="0" tIns="0" rIns="0" bIns="0" rtlCol="0" anchor="t"/>
           <a:lstStyle/>
           <a:p>
-            <a:pPr indent="0" marL="0">
+            <a:pPr marL="0" indent="0">
               <a:buNone/>
             </a:pPr>
             <a:r>
@@ -20425,7 +20243,7 @@
             <a:prstDash val="solid"/>
           </a:ln>
           <a:effectLst>
-            <a:outerShdw sx="100000" sy="100000" kx="0" ky="0" algn="bl" rotWithShape="0" blurRad="101600" dist="38100" dir="5400000">
+            <a:outerShdw blurRad="101600" dist="38100" dir="5400000" algn="bl" rotWithShape="0">
               <a:srgbClr val="000000">
                 <a:alpha val="8000"/>
               </a:srgbClr>
@@ -20475,14 +20293,14 @@
       </p:sp>
       <p:pic>
         <p:nvPicPr>
-          <p:cNvPr id="26" name="Image 2" descr="preencoded.png">    </p:cNvPr>
+          <p:cNvPr id="26" name="Image 2" descr="preencoded.png"/>
           <p:cNvPicPr>
             <a:picLocks noChangeAspect="1"/>
           </p:cNvPicPr>
           <p:nvPr/>
         </p:nvPicPr>
         <p:blipFill>
-          <a:blip r:embed="rId3"/>
+          <a:blip r:embed="rId5"/>
           <a:stretch>
             <a:fillRect/>
           </a:stretch>
@@ -20518,11 +20336,11 @@
           <a:bodyPr wrap="square" lIns="0" tIns="0" rIns="0" bIns="0" rtlCol="0" anchor="ctr"/>
           <a:lstStyle/>
           <a:p>
-            <a:pPr indent="0" marL="0">
-              <a:buNone/>
-            </a:pPr>
-            <a:r>
-              <a:rPr lang="en-US" sz="1000" b="1" spc="100" kern="0" dirty="0">
+            <a:pPr marL="0" indent="0">
+              <a:buNone/>
+            </a:pPr>
+            <a:r>
+              <a:rPr lang="en-US" sz="1000" b="1" kern="0" spc="100" dirty="0">
                 <a:solidFill>
                   <a:srgbClr val="C5394A"/>
                 </a:solidFill>
@@ -20557,7 +20375,7 @@
           <a:bodyPr wrap="square" lIns="0" tIns="0" rIns="0" bIns="0" rtlCol="0" anchor="ctr"/>
           <a:lstStyle/>
           <a:p>
-            <a:pPr indent="0" marL="0">
+            <a:pPr marL="0" indent="0">
               <a:buNone/>
             </a:pPr>
             <a:r>
@@ -20596,7 +20414,7 @@
           <a:bodyPr wrap="square" lIns="0" tIns="0" rIns="0" bIns="0" rtlCol="0" anchor="t"/>
           <a:lstStyle/>
           <a:p>
-            <a:pPr indent="0" marL="0">
+            <a:pPr marL="0" indent="0">
               <a:buNone/>
             </a:pPr>
             <a:r>
@@ -20638,7 +20456,7 @@
             <a:prstDash val="solid"/>
           </a:ln>
           <a:effectLst>
-            <a:outerShdw sx="100000" sy="100000" kx="0" ky="0" algn="bl" rotWithShape="0" blurRad="101600" dist="38100" dir="5400000">
+            <a:outerShdw blurRad="101600" dist="38100" dir="5400000" algn="bl" rotWithShape="0">
               <a:srgbClr val="000000">
                 <a:alpha val="8000"/>
               </a:srgbClr>
@@ -20688,14 +20506,14 @@
       </p:sp>
       <p:pic>
         <p:nvPicPr>
-          <p:cNvPr id="33" name="Image 3" descr="preencoded.png">    </p:cNvPr>
+          <p:cNvPr id="33" name="Image 3" descr="preencoded.png"/>
           <p:cNvPicPr>
             <a:picLocks noChangeAspect="1"/>
           </p:cNvPicPr>
           <p:nvPr/>
         </p:nvPicPr>
         <p:blipFill>
-          <a:blip r:embed="rId4"/>
+          <a:blip r:embed="rId6"/>
           <a:stretch>
             <a:fillRect/>
           </a:stretch>
@@ -20731,11 +20549,11 @@
           <a:bodyPr wrap="square" lIns="0" tIns="0" rIns="0" bIns="0" rtlCol="0" anchor="ctr"/>
           <a:lstStyle/>
           <a:p>
-            <a:pPr indent="0" marL="0">
-              <a:buNone/>
-            </a:pPr>
-            <a:r>
-              <a:rPr lang="en-US" sz="1000" b="1" spc="100" kern="0" dirty="0">
+            <a:pPr marL="0" indent="0">
+              <a:buNone/>
+            </a:pPr>
+            <a:r>
+              <a:rPr lang="en-US" sz="1000" b="1" kern="0" spc="100" dirty="0">
                 <a:solidFill>
                   <a:srgbClr val="3E4856"/>
                 </a:solidFill>
@@ -20770,7 +20588,7 @@
           <a:bodyPr wrap="square" lIns="0" tIns="0" rIns="0" bIns="0" rtlCol="0" anchor="ctr"/>
           <a:lstStyle/>
           <a:p>
-            <a:pPr indent="0" marL="0">
+            <a:pPr marL="0" indent="0">
               <a:buNone/>
             </a:pPr>
             <a:r>
@@ -20809,7 +20627,7 @@
           <a:bodyPr wrap="square" lIns="0" tIns="0" rIns="0" bIns="0" rtlCol="0" anchor="t"/>
           <a:lstStyle/>
           <a:p>
-            <a:pPr indent="0" marL="0">
+            <a:pPr marL="0" indent="0">
               <a:buNone/>
             </a:pPr>
             <a:r>
@@ -20843,6 +20661,7 @@
         <a:solidFill>
           <a:srgbClr val="FFFFFF"/>
         </a:solidFill>
+        <a:effectLst/>
       </p:bgPr>
     </p:bg>
     <p:spTree>
@@ -20920,7 +20739,7 @@
           <a:bodyPr wrap="square" lIns="0" tIns="0" rIns="0" bIns="0" rtlCol="0" anchor="ctr"/>
           <a:lstStyle/>
           <a:p>
-            <a:pPr algn="l" indent="0" marL="0">
+            <a:pPr marL="0" indent="0" algn="l">
               <a:buNone/>
             </a:pPr>
             <a:r>
@@ -20959,7 +20778,7 @@
           <a:bodyPr wrap="square" lIns="0" tIns="0" rIns="0" bIns="0" rtlCol="0" anchor="ctr"/>
           <a:lstStyle/>
           <a:p>
-            <a:pPr algn="r" indent="0" marL="0">
+            <a:pPr marL="0" indent="0" algn="r">
               <a:buNone/>
             </a:pPr>
             <a:r>
@@ -20998,11 +20817,11 @@
           <a:bodyPr wrap="square" lIns="0" tIns="0" rIns="0" bIns="0" rtlCol="0" anchor="ctr"/>
           <a:lstStyle/>
           <a:p>
-            <a:pPr algn="r" indent="0" marL="0">
-              <a:buNone/>
-            </a:pPr>
-            <a:r>
-              <a:rPr lang="en-US" sz="900" b="1" spc="100" kern="0" dirty="0">
+            <a:pPr marL="0" indent="0" algn="r">
+              <a:buNone/>
+            </a:pPr>
+            <a:r>
+              <a:rPr lang="en-US" sz="900" b="1" kern="0" spc="100" dirty="0">
                 <a:solidFill>
                   <a:srgbClr val="C5394A"/>
                 </a:solidFill>
@@ -21037,11 +20856,11 @@
           <a:bodyPr wrap="square" lIns="0" tIns="0" rIns="0" bIns="0" rtlCol="0" anchor="ctr"/>
           <a:lstStyle/>
           <a:p>
-            <a:pPr indent="0" marL="0">
-              <a:buNone/>
-            </a:pPr>
-            <a:r>
-              <a:rPr lang="en-US" sz="1200" b="1" spc="200" kern="0" dirty="0">
+            <a:pPr marL="0" indent="0">
+              <a:buNone/>
+            </a:pPr>
+            <a:r>
+              <a:rPr lang="en-US" sz="1200" b="1" kern="0" spc="200" dirty="0">
                 <a:solidFill>
                   <a:srgbClr val="C5394A"/>
                 </a:solidFill>
@@ -21076,7 +20895,7 @@
           <a:bodyPr wrap="square" lIns="0" tIns="0" rIns="0" bIns="0" rtlCol="0" anchor="ctr"/>
           <a:lstStyle/>
           <a:p>
-            <a:pPr indent="0" marL="0">
+            <a:pPr marL="0" indent="0">
               <a:buNone/>
             </a:pPr>
             <a:r>
@@ -21110,16 +20929,34 @@
         </p:nvGraphicFramePr>
         <p:xfrm>
           <a:off x="548640" y="1691640"/>
-          <a:ext cx="6766560" cy="914400"/>
+          <a:ext cx="6766560" cy="3872484"/>
         </p:xfrm>
         <a:graphic>
           <a:graphicData uri="http://schemas.openxmlformats.org/drawingml/2006/table">
             <a:tbl>
               <a:tblPr/>
               <a:tblGrid>
-                <a:gridCol w="2011680"/>
-                <a:gridCol w="3383280"/>
-                <a:gridCol w="1371600"/>
+                <a:gridCol w="2011680">
+                  <a:extLst>
+                    <a:ext uri="{9D8B030D-6E8A-4147-A177-3AD203B41FA5}">
+                      <a16:colId xmlns:a16="http://schemas.microsoft.com/office/drawing/2014/main" val="20000"/>
+                    </a:ext>
+                  </a:extLst>
+                </a:gridCol>
+                <a:gridCol w="3383280">
+                  <a:extLst>
+                    <a:ext uri="{9D8B030D-6E8A-4147-A177-3AD203B41FA5}">
+                      <a16:colId xmlns:a16="http://schemas.microsoft.com/office/drawing/2014/main" val="20001"/>
+                    </a:ext>
+                  </a:extLst>
+                </a:gridCol>
+                <a:gridCol w="1371600">
+                  <a:extLst>
+                    <a:ext uri="{9D8B030D-6E8A-4147-A177-3AD203B41FA5}">
+                      <a16:colId xmlns:a16="http://schemas.microsoft.com/office/drawing/2014/main" val="20002"/>
+                    </a:ext>
+                  </a:extLst>
+                </a:gridCol>
               </a:tblGrid>
               <a:tr h="352044">
                 <a:tc>
@@ -21127,7 +20964,7 @@
                     <a:bodyPr/>
                     <a:lstStyle/>
                     <a:p>
-                      <a:pPr algn="l" indent="0" marL="0">
+                      <a:pPr marL="0" indent="0" algn="l">
                         <a:buNone/>
                       </a:pPr>
                       <a:r>
@@ -21195,7 +21032,7 @@
                     <a:bodyPr/>
                     <a:lstStyle/>
                     <a:p>
-                      <a:pPr algn="l" indent="0" marL="0">
+                      <a:pPr marL="0" indent="0" algn="l">
                         <a:buNone/>
                       </a:pPr>
                       <a:r>
@@ -21263,7 +21100,7 @@
                     <a:bodyPr/>
                     <a:lstStyle/>
                     <a:p>
-                      <a:pPr algn="ctr" indent="0" marL="0">
+                      <a:pPr marL="0" indent="0" algn="ctr">
                         <a:buNone/>
                       </a:pPr>
                       <a:r>
@@ -21326,6 +21163,11 @@
                     </a:solidFill>
                   </a:tcPr>
                 </a:tc>
+                <a:extLst>
+                  <a:ext uri="{0D108BD9-81ED-4DB2-BD59-A6C34878D82A}">
+                    <a16:rowId xmlns:a16="http://schemas.microsoft.com/office/drawing/2014/main" val="10000"/>
+                  </a:ext>
+                </a:extLst>
               </a:tr>
               <a:tr h="352044">
                 <a:tc>
@@ -21333,7 +21175,7 @@
                     <a:bodyPr/>
                     <a:lstStyle/>
                     <a:p>
-                      <a:pPr algn="l" indent="0" marL="0">
+                      <a:pPr marL="0" indent="0" algn="l">
                         <a:buNone/>
                       </a:pPr>
                       <a:r>
@@ -21401,7 +21243,7 @@
                     <a:bodyPr/>
                     <a:lstStyle/>
                     <a:p>
-                      <a:pPr algn="l" indent="0" marL="0">
+                      <a:pPr marL="0" indent="0" algn="l">
                         <a:buNone/>
                       </a:pPr>
                       <a:r>
@@ -21469,7 +21311,7 @@
                     <a:bodyPr/>
                     <a:lstStyle/>
                     <a:p>
-                      <a:pPr algn="ctr" indent="0" marL="0">
+                      <a:pPr marL="0" indent="0" algn="ctr">
                         <a:buNone/>
                       </a:pPr>
                       <a:r>
@@ -21532,6 +21374,11 @@
                     </a:solidFill>
                   </a:tcPr>
                 </a:tc>
+                <a:extLst>
+                  <a:ext uri="{0D108BD9-81ED-4DB2-BD59-A6C34878D82A}">
+                    <a16:rowId xmlns:a16="http://schemas.microsoft.com/office/drawing/2014/main" val="10001"/>
+                  </a:ext>
+                </a:extLst>
               </a:tr>
               <a:tr h="352044">
                 <a:tc>
@@ -21539,7 +21386,7 @@
                     <a:bodyPr/>
                     <a:lstStyle/>
                     <a:p>
-                      <a:pPr algn="l" indent="0" marL="0">
+                      <a:pPr marL="0" indent="0" algn="l">
                         <a:buNone/>
                       </a:pPr>
                       <a:r>
@@ -21607,7 +21454,7 @@
                     <a:bodyPr/>
                     <a:lstStyle/>
                     <a:p>
-                      <a:pPr algn="l" indent="0" marL="0">
+                      <a:pPr marL="0" indent="0" algn="l">
                         <a:buNone/>
                       </a:pPr>
                       <a:r>
@@ -21675,7 +21522,7 @@
                     <a:bodyPr/>
                     <a:lstStyle/>
                     <a:p>
-                      <a:pPr algn="ctr" indent="0" marL="0">
+                      <a:pPr marL="0" indent="0" algn="ctr">
                         <a:buNone/>
                       </a:pPr>
                       <a:r>
@@ -21738,6 +21585,11 @@
                     </a:solidFill>
                   </a:tcPr>
                 </a:tc>
+                <a:extLst>
+                  <a:ext uri="{0D108BD9-81ED-4DB2-BD59-A6C34878D82A}">
+                    <a16:rowId xmlns:a16="http://schemas.microsoft.com/office/drawing/2014/main" val="10002"/>
+                  </a:ext>
+                </a:extLst>
               </a:tr>
               <a:tr h="352044">
                 <a:tc>
@@ -21745,7 +21597,7 @@
                     <a:bodyPr/>
                     <a:lstStyle/>
                     <a:p>
-                      <a:pPr algn="l" indent="0" marL="0">
+                      <a:pPr marL="0" indent="0" algn="l">
                         <a:buNone/>
                       </a:pPr>
                       <a:r>
@@ -21813,7 +21665,7 @@
                     <a:bodyPr/>
                     <a:lstStyle/>
                     <a:p>
-                      <a:pPr algn="l" indent="0" marL="0">
+                      <a:pPr marL="0" indent="0" algn="l">
                         <a:buNone/>
                       </a:pPr>
                       <a:r>
@@ -21881,7 +21733,7 @@
                     <a:bodyPr/>
                     <a:lstStyle/>
                     <a:p>
-                      <a:pPr algn="ctr" indent="0" marL="0">
+                      <a:pPr marL="0" indent="0" algn="ctr">
                         <a:buNone/>
                       </a:pPr>
                       <a:r>
@@ -21944,6 +21796,11 @@
                     </a:solidFill>
                   </a:tcPr>
                 </a:tc>
+                <a:extLst>
+                  <a:ext uri="{0D108BD9-81ED-4DB2-BD59-A6C34878D82A}">
+                    <a16:rowId xmlns:a16="http://schemas.microsoft.com/office/drawing/2014/main" val="10003"/>
+                  </a:ext>
+                </a:extLst>
               </a:tr>
               <a:tr h="352044">
                 <a:tc>
@@ -21951,7 +21808,7 @@
                     <a:bodyPr/>
                     <a:lstStyle/>
                     <a:p>
-                      <a:pPr algn="l" indent="0" marL="0">
+                      <a:pPr marL="0" indent="0" algn="l">
                         <a:buNone/>
                       </a:pPr>
                       <a:r>
@@ -22019,7 +21876,7 @@
                     <a:bodyPr/>
                     <a:lstStyle/>
                     <a:p>
-                      <a:pPr algn="l" indent="0" marL="0">
+                      <a:pPr marL="0" indent="0" algn="l">
                         <a:buNone/>
                       </a:pPr>
                       <a:r>
@@ -22087,7 +21944,7 @@
                     <a:bodyPr/>
                     <a:lstStyle/>
                     <a:p>
-                      <a:pPr algn="ctr" indent="0" marL="0">
+                      <a:pPr marL="0" indent="0" algn="ctr">
                         <a:buNone/>
                       </a:pPr>
                       <a:r>
@@ -22150,6 +22007,11 @@
                     </a:solidFill>
                   </a:tcPr>
                 </a:tc>
+                <a:extLst>
+                  <a:ext uri="{0D108BD9-81ED-4DB2-BD59-A6C34878D82A}">
+                    <a16:rowId xmlns:a16="http://schemas.microsoft.com/office/drawing/2014/main" val="10004"/>
+                  </a:ext>
+                </a:extLst>
               </a:tr>
               <a:tr h="352044">
                 <a:tc>
@@ -22157,7 +22019,7 @@
                     <a:bodyPr/>
                     <a:lstStyle/>
                     <a:p>
-                      <a:pPr algn="l" indent="0" marL="0">
+                      <a:pPr marL="0" indent="0" algn="l">
                         <a:buNone/>
                       </a:pPr>
                       <a:r>
@@ -22225,7 +22087,7 @@
                     <a:bodyPr/>
                     <a:lstStyle/>
                     <a:p>
-                      <a:pPr algn="l" indent="0" marL="0">
+                      <a:pPr marL="0" indent="0" algn="l">
                         <a:buNone/>
                       </a:pPr>
                       <a:r>
@@ -22293,7 +22155,7 @@
                     <a:bodyPr/>
                     <a:lstStyle/>
                     <a:p>
-                      <a:pPr algn="ctr" indent="0" marL="0">
+                      <a:pPr marL="0" indent="0" algn="ctr">
                         <a:buNone/>
                       </a:pPr>
                       <a:r>
@@ -22356,6 +22218,11 @@
                     </a:solidFill>
                   </a:tcPr>
                 </a:tc>
+                <a:extLst>
+                  <a:ext uri="{0D108BD9-81ED-4DB2-BD59-A6C34878D82A}">
+                    <a16:rowId xmlns:a16="http://schemas.microsoft.com/office/drawing/2014/main" val="10005"/>
+                  </a:ext>
+                </a:extLst>
               </a:tr>
               <a:tr h="352044">
                 <a:tc>
@@ -22363,7 +22230,7 @@
                     <a:bodyPr/>
                     <a:lstStyle/>
                     <a:p>
-                      <a:pPr algn="l" indent="0" marL="0">
+                      <a:pPr marL="0" indent="0" algn="l">
                         <a:buNone/>
                       </a:pPr>
                       <a:r>
@@ -22431,7 +22298,7 @@
                     <a:bodyPr/>
                     <a:lstStyle/>
                     <a:p>
-                      <a:pPr algn="l" indent="0" marL="0">
+                      <a:pPr marL="0" indent="0" algn="l">
                         <a:buNone/>
                       </a:pPr>
                       <a:r>
@@ -22499,7 +22366,7 @@
                     <a:bodyPr/>
                     <a:lstStyle/>
                     <a:p>
-                      <a:pPr algn="ctr" indent="0" marL="0">
+                      <a:pPr marL="0" indent="0" algn="ctr">
                         <a:buNone/>
                       </a:pPr>
                       <a:r>
@@ -22562,6 +22429,11 @@
                     </a:solidFill>
                   </a:tcPr>
                 </a:tc>
+                <a:extLst>
+                  <a:ext uri="{0D108BD9-81ED-4DB2-BD59-A6C34878D82A}">
+                    <a16:rowId xmlns:a16="http://schemas.microsoft.com/office/drawing/2014/main" val="10006"/>
+                  </a:ext>
+                </a:extLst>
               </a:tr>
               <a:tr h="352044">
                 <a:tc>
@@ -22569,7 +22441,7 @@
                     <a:bodyPr/>
                     <a:lstStyle/>
                     <a:p>
-                      <a:pPr algn="l" indent="0" marL="0">
+                      <a:pPr marL="0" indent="0" algn="l">
                         <a:buNone/>
                       </a:pPr>
                       <a:r>
@@ -22637,7 +22509,7 @@
                     <a:bodyPr/>
                     <a:lstStyle/>
                     <a:p>
-                      <a:pPr algn="l" indent="0" marL="0">
+                      <a:pPr marL="0" indent="0" algn="l">
                         <a:buNone/>
                       </a:pPr>
                       <a:r>
@@ -22705,7 +22577,7 @@
                     <a:bodyPr/>
                     <a:lstStyle/>
                     <a:p>
-                      <a:pPr algn="ctr" indent="0" marL="0">
+                      <a:pPr marL="0" indent="0" algn="ctr">
                         <a:buNone/>
                       </a:pPr>
                       <a:r>
@@ -22768,6 +22640,11 @@
                     </a:solidFill>
                   </a:tcPr>
                 </a:tc>
+                <a:extLst>
+                  <a:ext uri="{0D108BD9-81ED-4DB2-BD59-A6C34878D82A}">
+                    <a16:rowId xmlns:a16="http://schemas.microsoft.com/office/drawing/2014/main" val="10007"/>
+                  </a:ext>
+                </a:extLst>
               </a:tr>
               <a:tr h="352044">
                 <a:tc>
@@ -22775,7 +22652,7 @@
                     <a:bodyPr/>
                     <a:lstStyle/>
                     <a:p>
-                      <a:pPr algn="l" indent="0" marL="0">
+                      <a:pPr marL="0" indent="0" algn="l">
                         <a:buNone/>
                       </a:pPr>
                       <a:r>
@@ -22843,7 +22720,7 @@
                     <a:bodyPr/>
                     <a:lstStyle/>
                     <a:p>
-                      <a:pPr algn="l" indent="0" marL="0">
+                      <a:pPr marL="0" indent="0" algn="l">
                         <a:buNone/>
                       </a:pPr>
                       <a:r>
@@ -22911,7 +22788,7 @@
                     <a:bodyPr/>
                     <a:lstStyle/>
                     <a:p>
-                      <a:pPr algn="ctr" indent="0" marL="0">
+                      <a:pPr marL="0" indent="0" algn="ctr">
                         <a:buNone/>
                       </a:pPr>
                       <a:r>
@@ -22974,6 +22851,11 @@
                     </a:solidFill>
                   </a:tcPr>
                 </a:tc>
+                <a:extLst>
+                  <a:ext uri="{0D108BD9-81ED-4DB2-BD59-A6C34878D82A}">
+                    <a16:rowId xmlns:a16="http://schemas.microsoft.com/office/drawing/2014/main" val="10008"/>
+                  </a:ext>
+                </a:extLst>
               </a:tr>
               <a:tr h="352044">
                 <a:tc>
@@ -22981,7 +22863,7 @@
                     <a:bodyPr/>
                     <a:lstStyle/>
                     <a:p>
-                      <a:pPr algn="l" indent="0" marL="0">
+                      <a:pPr marL="0" indent="0" algn="l">
                         <a:buNone/>
                       </a:pPr>
                       <a:r>
@@ -23049,7 +22931,7 @@
                     <a:bodyPr/>
                     <a:lstStyle/>
                     <a:p>
-                      <a:pPr algn="l" indent="0" marL="0">
+                      <a:pPr marL="0" indent="0" algn="l">
                         <a:buNone/>
                       </a:pPr>
                       <a:r>
@@ -23117,7 +22999,7 @@
                     <a:bodyPr/>
                     <a:lstStyle/>
                     <a:p>
-                      <a:pPr algn="ctr" indent="0" marL="0">
+                      <a:pPr marL="0" indent="0" algn="ctr">
                         <a:buNone/>
                       </a:pPr>
                       <a:r>
@@ -23180,6 +23062,11 @@
                     </a:solidFill>
                   </a:tcPr>
                 </a:tc>
+                <a:extLst>
+                  <a:ext uri="{0D108BD9-81ED-4DB2-BD59-A6C34878D82A}">
+                    <a16:rowId xmlns:a16="http://schemas.microsoft.com/office/drawing/2014/main" val="10009"/>
+                  </a:ext>
+                </a:extLst>
               </a:tr>
               <a:tr h="352044">
                 <a:tc>
@@ -23187,7 +23074,7 @@
                     <a:bodyPr/>
                     <a:lstStyle/>
                     <a:p>
-                      <a:pPr algn="l" indent="0" marL="0">
+                      <a:pPr marL="0" indent="0" algn="l">
                         <a:buNone/>
                       </a:pPr>
                       <a:r>
@@ -23255,7 +23142,7 @@
                     <a:bodyPr/>
                     <a:lstStyle/>
                     <a:p>
-                      <a:pPr algn="l" indent="0" marL="0">
+                      <a:pPr marL="0" indent="0" algn="l">
                         <a:buNone/>
                       </a:pPr>
                       <a:r>
@@ -23323,7 +23210,7 @@
                     <a:bodyPr/>
                     <a:lstStyle/>
                     <a:p>
-                      <a:pPr algn="ctr" indent="0" marL="0">
+                      <a:pPr marL="0" indent="0" algn="ctr">
                         <a:buNone/>
                       </a:pPr>
                       <a:r>
@@ -23386,6 +23273,11 @@
                     </a:solidFill>
                   </a:tcPr>
                 </a:tc>
+                <a:extLst>
+                  <a:ext uri="{0D108BD9-81ED-4DB2-BD59-A6C34878D82A}">
+                    <a16:rowId xmlns:a16="http://schemas.microsoft.com/office/drawing/2014/main" val="10010"/>
+                  </a:ext>
+                </a:extLst>
               </a:tr>
             </a:tbl>
           </a:graphicData>
@@ -23393,7 +23285,7 @@
       </p:graphicFrame>
       <p:sp>
         <p:nvSpPr>
-          <p:cNvPr id="10" name="Shape 7"/>
+          <p:cNvPr id="9" name="Shape 7"/>
           <p:cNvSpPr/>
           <p:nvPr/>
         </p:nvSpPr>
@@ -23415,7 +23307,7 @@
             <a:prstDash val="solid"/>
           </a:ln>
           <a:effectLst>
-            <a:outerShdw sx="100000" sy="100000" kx="0" ky="0" algn="bl" rotWithShape="0" blurRad="101600" dist="38100" dir="5400000">
+            <a:outerShdw blurRad="101600" dist="38100" dir="5400000" algn="bl" rotWithShape="0">
               <a:srgbClr val="000000">
                 <a:alpha val="8000"/>
               </a:srgbClr>
@@ -23444,7 +23336,7 @@
           <a:bodyPr wrap="square" lIns="0" tIns="0" rIns="0" bIns="0" rtlCol="0" anchor="ctr"/>
           <a:lstStyle/>
           <a:p>
-            <a:pPr algn="ctr" indent="0" marL="0">
+            <a:pPr marL="0" indent="0" algn="ctr">
               <a:buNone/>
             </a:pPr>
             <a:r>
@@ -23483,7 +23375,7 @@
           <a:bodyPr wrap="square" lIns="0" tIns="0" rIns="0" bIns="0" rtlCol="0" anchor="ctr"/>
           <a:lstStyle/>
           <a:p>
-            <a:pPr indent="0" marL="0">
+            <a:pPr marL="0" indent="0">
               <a:buNone/>
             </a:pPr>
             <a:r>
@@ -23522,7 +23414,7 @@
           <a:bodyPr wrap="square" lIns="0" tIns="0" rIns="0" bIns="0" rtlCol="0" anchor="ctr"/>
           <a:lstStyle/>
           <a:p>
-            <a:pPr indent="0" marL="0">
+            <a:pPr marL="0" indent="0">
               <a:buNone/>
             </a:pPr>
             <a:r>
@@ -23564,7 +23456,7 @@
             <a:prstDash val="solid"/>
           </a:ln>
           <a:effectLst>
-            <a:outerShdw sx="100000" sy="100000" kx="0" ky="0" algn="bl" rotWithShape="0" blurRad="101600" dist="38100" dir="5400000">
+            <a:outerShdw blurRad="101600" dist="38100" dir="5400000" algn="bl" rotWithShape="0">
               <a:srgbClr val="000000">
                 <a:alpha val="8000"/>
               </a:srgbClr>
@@ -23593,7 +23485,7 @@
           <a:bodyPr wrap="square" lIns="0" tIns="0" rIns="0" bIns="0" rtlCol="0" anchor="ctr"/>
           <a:lstStyle/>
           <a:p>
-            <a:pPr algn="ctr" indent="0" marL="0">
+            <a:pPr marL="0" indent="0" algn="ctr">
               <a:buNone/>
             </a:pPr>
             <a:r>
@@ -23632,7 +23524,7 @@
           <a:bodyPr wrap="square" lIns="0" tIns="0" rIns="0" bIns="0" rtlCol="0" anchor="ctr"/>
           <a:lstStyle/>
           <a:p>
-            <a:pPr indent="0" marL="0">
+            <a:pPr marL="0" indent="0">
               <a:buNone/>
             </a:pPr>
             <a:r>
@@ -23671,7 +23563,7 @@
           <a:bodyPr wrap="square" lIns="0" tIns="0" rIns="0" bIns="0" rtlCol="0" anchor="ctr"/>
           <a:lstStyle/>
           <a:p>
-            <a:pPr indent="0" marL="0">
+            <a:pPr marL="0" indent="0">
               <a:buNone/>
             </a:pPr>
             <a:r>
@@ -23713,7 +23605,7 @@
             <a:prstDash val="solid"/>
           </a:ln>
           <a:effectLst>
-            <a:outerShdw sx="100000" sy="100000" kx="0" ky="0" algn="bl" rotWithShape="0" blurRad="101600" dist="38100" dir="5400000">
+            <a:outerShdw blurRad="101600" dist="38100" dir="5400000" algn="bl" rotWithShape="0">
               <a:srgbClr val="000000">
                 <a:alpha val="8000"/>
               </a:srgbClr>
@@ -23742,7 +23634,7 @@
           <a:bodyPr wrap="square" lIns="0" tIns="0" rIns="0" bIns="0" rtlCol="0" anchor="ctr"/>
           <a:lstStyle/>
           <a:p>
-            <a:pPr algn="ctr" indent="0" marL="0">
+            <a:pPr marL="0" indent="0" algn="ctr">
               <a:buNone/>
             </a:pPr>
             <a:r>
@@ -23781,7 +23673,7 @@
           <a:bodyPr wrap="square" lIns="0" tIns="0" rIns="0" bIns="0" rtlCol="0" anchor="ctr"/>
           <a:lstStyle/>
           <a:p>
-            <a:pPr indent="0" marL="0">
+            <a:pPr marL="0" indent="0">
               <a:buNone/>
             </a:pPr>
             <a:r>
@@ -23820,7 +23712,7 @@
           <a:bodyPr wrap="square" lIns="0" tIns="0" rIns="0" bIns="0" rtlCol="0" anchor="ctr"/>
           <a:lstStyle/>
           <a:p>
-            <a:pPr indent="0" marL="0">
+            <a:pPr marL="0" indent="0">
               <a:buNone/>
             </a:pPr>
             <a:r>
@@ -24139,4 +24031,319 @@
     </a:ext>
   </a:extLst>
 </a:theme>
+</file>
+
+<file path=ppt/theme/theme2.xml><?xml version="1.0" encoding="utf-8"?>
+<a:theme xmlns:a="http://schemas.openxmlformats.org/drawingml/2006/main" name="Office Theme">
+  <a:themeElements>
+    <a:clrScheme name="Office">
+      <a:dk1>
+        <a:sysClr val="windowText" lastClr="000000"/>
+      </a:dk1>
+      <a:lt1>
+        <a:sysClr val="window" lastClr="FFFFFF"/>
+      </a:lt1>
+      <a:dk2>
+        <a:srgbClr val="0E2841"/>
+      </a:dk2>
+      <a:lt2>
+        <a:srgbClr val="E8E8E8"/>
+      </a:lt2>
+      <a:accent1>
+        <a:srgbClr val="156082"/>
+      </a:accent1>
+      <a:accent2>
+        <a:srgbClr val="E97132"/>
+      </a:accent2>
+      <a:accent3>
+        <a:srgbClr val="196B24"/>
+      </a:accent3>
+      <a:accent4>
+        <a:srgbClr val="0F9ED5"/>
+      </a:accent4>
+      <a:accent5>
+        <a:srgbClr val="A02B93"/>
+      </a:accent5>
+      <a:accent6>
+        <a:srgbClr val="4EA72E"/>
+      </a:accent6>
+      <a:hlink>
+        <a:srgbClr val="467886"/>
+      </a:hlink>
+      <a:folHlink>
+        <a:srgbClr val="96607D"/>
+      </a:folHlink>
+    </a:clrScheme>
+    <a:fontScheme name="Office">
+      <a:majorFont>
+        <a:latin typeface="Aptos Display" panose="02110004020202020204"/>
+        <a:ea typeface=""/>
+        <a:cs typeface=""/>
+        <a:font script="Jpan" typeface="游ゴシック Light"/>
+        <a:font script="Hang" typeface="맑은 고딕"/>
+        <a:font script="Hans" typeface="等线 Light"/>
+        <a:font script="Hant" typeface="新細明體"/>
+        <a:font script="Arab" typeface="Times New Roman"/>
+        <a:font script="Hebr" typeface="Times New Roman"/>
+        <a:font script="Thai" typeface="Angsana New"/>
+        <a:font script="Ethi" typeface="Nyala"/>
+        <a:font script="Beng" typeface="Vrinda"/>
+        <a:font script="Gujr" typeface="Shruti"/>
+        <a:font script="Khmr" typeface="MoolBoran"/>
+        <a:font script="Knda" typeface="Tunga"/>
+        <a:font script="Guru" typeface="Raavi"/>
+        <a:font script="Cans" typeface="Euphemia"/>
+        <a:font script="Cher" typeface="Plantagenet Cherokee"/>
+        <a:font script="Yiii" typeface="Microsoft Yi Baiti"/>
+        <a:font script="Tibt" typeface="Microsoft Himalaya"/>
+        <a:font script="Thaa" typeface="MV Boli"/>
+        <a:font script="Deva" typeface="Mangal"/>
+        <a:font script="Telu" typeface="Gautami"/>
+        <a:font script="Taml" typeface="Latha"/>
+        <a:font script="Syrc" typeface="Estrangelo Edessa"/>
+        <a:font script="Orya" typeface="Kalinga"/>
+        <a:font script="Mlym" typeface="Kartika"/>
+        <a:font script="Laoo" typeface="DokChampa"/>
+        <a:font script="Sinh" typeface="Iskoola Pota"/>
+        <a:font script="Mong" typeface="Mongolian Baiti"/>
+        <a:font script="Viet" typeface="Times New Roman"/>
+        <a:font script="Uigh" typeface="Microsoft Uighur"/>
+        <a:font script="Geor" typeface="Sylfaen"/>
+        <a:font script="Armn" typeface="Arial"/>
+        <a:font script="Bugi" typeface="Leelawadee UI"/>
+        <a:font script="Bopo" typeface="Microsoft JhengHei"/>
+        <a:font script="Java" typeface="Javanese Text"/>
+        <a:font script="Lisu" typeface="Segoe UI"/>
+        <a:font script="Mymr" typeface="Myanmar Text"/>
+        <a:font script="Nkoo" typeface="Ebrima"/>
+        <a:font script="Olck" typeface="Nirmala UI"/>
+        <a:font script="Osma" typeface="Ebrima"/>
+        <a:font script="Phag" typeface="Phagspa"/>
+        <a:font script="Syrn" typeface="Estrangelo Edessa"/>
+        <a:font script="Syrj" typeface="Estrangelo Edessa"/>
+        <a:font script="Syre" typeface="Estrangelo Edessa"/>
+        <a:font script="Sora" typeface="Nirmala UI"/>
+        <a:font script="Tale" typeface="Microsoft Tai Le"/>
+        <a:font script="Talu" typeface="Microsoft New Tai Lue"/>
+        <a:font script="Tfng" typeface="Ebrima"/>
+      </a:majorFont>
+      <a:minorFont>
+        <a:latin typeface="Aptos" panose="02110004020202020204"/>
+        <a:ea typeface=""/>
+        <a:cs typeface=""/>
+        <a:font script="Jpan" typeface="游ゴシック"/>
+        <a:font script="Hang" typeface="맑은 고딕"/>
+        <a:font script="Hans" typeface="等线"/>
+        <a:font script="Hant" typeface="新細明體"/>
+        <a:font script="Arab" typeface="Arial"/>
+        <a:font script="Hebr" typeface="Arial"/>
+        <a:font script="Thai" typeface="Cordia New"/>
+        <a:font script="Ethi" typeface="Nyala"/>
+        <a:font script="Beng" typeface="Vrinda"/>
+        <a:font script="Gujr" typeface="Shruti"/>
+        <a:font script="Khmr" typeface="DaunPenh"/>
+        <a:font script="Knda" typeface="Tunga"/>
+        <a:font script="Guru" typeface="Raavi"/>
+        <a:font script="Cans" typeface="Euphemia"/>
+        <a:font script="Cher" typeface="Plantagenet Cherokee"/>
+        <a:font script="Yiii" typeface="Microsoft Yi Baiti"/>
+        <a:font script="Tibt" typeface="Microsoft Himalaya"/>
+        <a:font script="Thaa" typeface="MV Boli"/>
+        <a:font script="Deva" typeface="Mangal"/>
+        <a:font script="Telu" typeface="Gautami"/>
+        <a:font script="Taml" typeface="Latha"/>
+        <a:font script="Syrc" typeface="Estrangelo Edessa"/>
+        <a:font script="Orya" typeface="Kalinga"/>
+        <a:font script="Mlym" typeface="Kartika"/>
+        <a:font script="Laoo" typeface="DokChampa"/>
+        <a:font script="Sinh" typeface="Iskoola Pota"/>
+        <a:font script="Mong" typeface="Mongolian Baiti"/>
+        <a:font script="Viet" typeface="Arial"/>
+        <a:font script="Uigh" typeface="Microsoft Uighur"/>
+        <a:font script="Geor" typeface="Sylfaen"/>
+        <a:font script="Armn" typeface="Arial"/>
+        <a:font script="Bugi" typeface="Leelawadee UI"/>
+        <a:font script="Bopo" typeface="Microsoft JhengHei"/>
+        <a:font script="Java" typeface="Javanese Text"/>
+        <a:font script="Lisu" typeface="Segoe UI"/>
+        <a:font script="Mymr" typeface="Myanmar Text"/>
+        <a:font script="Nkoo" typeface="Ebrima"/>
+        <a:font script="Olck" typeface="Nirmala UI"/>
+        <a:font script="Osma" typeface="Ebrima"/>
+        <a:font script="Phag" typeface="Phagspa"/>
+        <a:font script="Syrn" typeface="Estrangelo Edessa"/>
+        <a:font script="Syrj" typeface="Estrangelo Edessa"/>
+        <a:font script="Syre" typeface="Estrangelo Edessa"/>
+        <a:font script="Sora" typeface="Nirmala UI"/>
+        <a:font script="Tale" typeface="Microsoft Tai Le"/>
+        <a:font script="Talu" typeface="Microsoft New Tai Lue"/>
+        <a:font script="Tfng" typeface="Ebrima"/>
+      </a:minorFont>
+    </a:fontScheme>
+    <a:fmtScheme name="Office">
+      <a:fillStyleLst>
+        <a:solidFill>
+          <a:schemeClr val="phClr"/>
+        </a:solidFill>
+        <a:gradFill rotWithShape="1">
+          <a:gsLst>
+            <a:gs pos="0">
+              <a:schemeClr val="phClr">
+                <a:lumMod val="110000"/>
+                <a:satMod val="105000"/>
+                <a:tint val="67000"/>
+              </a:schemeClr>
+            </a:gs>
+            <a:gs pos="50000">
+              <a:schemeClr val="phClr">
+                <a:lumMod val="105000"/>
+                <a:satMod val="103000"/>
+                <a:tint val="73000"/>
+              </a:schemeClr>
+            </a:gs>
+            <a:gs pos="100000">
+              <a:schemeClr val="phClr">
+                <a:lumMod val="105000"/>
+                <a:satMod val="109000"/>
+                <a:tint val="81000"/>
+              </a:schemeClr>
+            </a:gs>
+          </a:gsLst>
+          <a:lin ang="5400000" scaled="0"/>
+        </a:gradFill>
+        <a:gradFill rotWithShape="1">
+          <a:gsLst>
+            <a:gs pos="0">
+              <a:schemeClr val="phClr">
+                <a:satMod val="103000"/>
+                <a:lumMod val="102000"/>
+                <a:tint val="94000"/>
+              </a:schemeClr>
+            </a:gs>
+            <a:gs pos="50000">
+              <a:schemeClr val="phClr">
+                <a:satMod val="110000"/>
+                <a:lumMod val="100000"/>
+                <a:shade val="100000"/>
+              </a:schemeClr>
+            </a:gs>
+            <a:gs pos="100000">
+              <a:schemeClr val="phClr">
+                <a:lumMod val="99000"/>
+                <a:satMod val="120000"/>
+                <a:shade val="78000"/>
+              </a:schemeClr>
+            </a:gs>
+          </a:gsLst>
+          <a:lin ang="5400000" scaled="0"/>
+        </a:gradFill>
+      </a:fillStyleLst>
+      <a:lnStyleLst>
+        <a:ln w="12700" cap="flat" cmpd="sng" algn="ctr">
+          <a:solidFill>
+            <a:schemeClr val="phClr"/>
+          </a:solidFill>
+          <a:prstDash val="solid"/>
+          <a:miter lim="800000"/>
+        </a:ln>
+        <a:ln w="19050" cap="flat" cmpd="sng" algn="ctr">
+          <a:solidFill>
+            <a:schemeClr val="phClr"/>
+          </a:solidFill>
+          <a:prstDash val="solid"/>
+          <a:miter lim="800000"/>
+        </a:ln>
+        <a:ln w="25400" cap="flat" cmpd="sng" algn="ctr">
+          <a:solidFill>
+            <a:schemeClr val="phClr"/>
+          </a:solidFill>
+          <a:prstDash val="solid"/>
+          <a:miter lim="800000"/>
+        </a:ln>
+      </a:lnStyleLst>
+      <a:effectStyleLst>
+        <a:effectStyle>
+          <a:effectLst/>
+        </a:effectStyle>
+        <a:effectStyle>
+          <a:effectLst/>
+        </a:effectStyle>
+        <a:effectStyle>
+          <a:effectLst>
+            <a:outerShdw blurRad="57150" dist="19050" dir="5400000" algn="ctr" rotWithShape="0">
+              <a:srgbClr val="000000">
+                <a:alpha val="63000"/>
+              </a:srgbClr>
+            </a:outerShdw>
+          </a:effectLst>
+        </a:effectStyle>
+      </a:effectStyleLst>
+      <a:bgFillStyleLst>
+        <a:solidFill>
+          <a:schemeClr val="phClr"/>
+        </a:solidFill>
+        <a:solidFill>
+          <a:schemeClr val="phClr">
+            <a:tint val="95000"/>
+            <a:satMod val="170000"/>
+          </a:schemeClr>
+        </a:solidFill>
+        <a:gradFill rotWithShape="1">
+          <a:gsLst>
+            <a:gs pos="0">
+              <a:schemeClr val="phClr">
+                <a:tint val="93000"/>
+                <a:satMod val="150000"/>
+                <a:shade val="98000"/>
+                <a:lumMod val="102000"/>
+              </a:schemeClr>
+            </a:gs>
+            <a:gs pos="50000">
+              <a:schemeClr val="phClr">
+                <a:tint val="98000"/>
+                <a:satMod val="130000"/>
+                <a:shade val="90000"/>
+                <a:lumMod val="103000"/>
+              </a:schemeClr>
+            </a:gs>
+            <a:gs pos="100000">
+              <a:schemeClr val="phClr">
+                <a:shade val="63000"/>
+                <a:satMod val="120000"/>
+              </a:schemeClr>
+            </a:gs>
+          </a:gsLst>
+          <a:lin ang="5400000" scaled="0"/>
+        </a:gradFill>
+      </a:bgFillStyleLst>
+    </a:fmtScheme>
+  </a:themeElements>
+  <a:objectDefaults>
+    <a:lnDef>
+      <a:spPr/>
+      <a:bodyPr/>
+      <a:lstStyle/>
+      <a:style>
+        <a:lnRef idx="2">
+          <a:schemeClr val="accent1"/>
+        </a:lnRef>
+        <a:fillRef idx="0">
+          <a:schemeClr val="accent1"/>
+        </a:fillRef>
+        <a:effectRef idx="1">
+          <a:schemeClr val="accent1"/>
+        </a:effectRef>
+        <a:fontRef idx="minor">
+          <a:schemeClr val="tx1"/>
+        </a:fontRef>
+      </a:style>
+    </a:lnDef>
+  </a:objectDefaults>
+  <a:extraClrSchemeLst/>
+  <a:extLst>
+    <a:ext uri="{05A4C25C-085E-4340-85A3-A5531E510DB2}">
+      <thm15:themeFamily xmlns:thm15="http://schemas.microsoft.com/office/thememl/2012/main" name="Office Theme" id="{2E142A2C-CD16-42D6-873A-C26D2A0506FA}" vid="{1BDDFF52-6CD6-40A5-AB3C-68EB2F1E4D0A}"/>
+    </a:ext>
+  </a:extLst>
+</a:theme>
 </file>
--- a/docs/Abschlusspräsentation/DualNet-Abschlusspraesentation-v2.pptx
+++ b/docs/Abschlusspräsentation/DualNet-Abschlusspraesentation-v2.pptx
@@ -11469,7 +11469,7 @@
                 <a:ea typeface="Trebuchet MS" pitchFamily="34" charset="-122"/>
                 <a:cs typeface="Trebuchet MS" pitchFamily="34" charset="-120"/>
               </a:rPr>
-              <a:t>Idee &amp; Vision</a:t>
+              <a:t>Idee</a:t>
             </a:r>
             <a:endParaRPr lang="en-US" sz="1700" dirty="0"/>
           </a:p>
